--- a/static/ppts/G6_Math_T5_Probability_Basics.pptx
+++ b/static/ppts/G6_Math_T5_Probability_Basics.pptx
@@ -9,9 +9,10 @@
     <p:sldId id="257" r:id="rId3"/>
     <p:sldId id="258" r:id="rId4"/>
     <p:sldId id="259" r:id="rId5"/>
+    <p:sldId id="260" r:id="rId6"/>
   </p:sldIdLst>
   <p:notesMasterIdLst>
-    <p:notesMasterId r:id="rId6"/>
+    <p:notesMasterId r:id="rId7"/>
   </p:notesMasterIdLst>
   <p:sldSz cx="9144000" cy="5143500"/>
   <p:notesSz cx="5143500" cy="9144000"/>
@@ -811,6 +812,94 @@
 </p:notes>
 </file>
 
+<file path=ppt/notesSlides/notesSlide5.xml><?xml version="1.0" encoding="utf-8"?>
+<p:notes xmlns:a="http://schemas.openxmlformats.org/drawingml/2006/main" xmlns:r="http://schemas.openxmlformats.org/officeDocument/2006/relationships" xmlns:p="http://schemas.openxmlformats.org/presentationml/2006/main">
+  <p:cSld>
+    <p:spTree>
+      <p:nvGrpSpPr>
+        <p:cNvPr id="1" name=""/>
+        <p:cNvGrpSpPr/>
+        <p:nvPr/>
+      </p:nvGrpSpPr>
+      <p:grpSpPr>
+        <a:xfrm>
+          <a:off x="0" y="0"/>
+          <a:ext cx="0" cy="0"/>
+          <a:chOff x="0" y="0"/>
+          <a:chExt cx="0" cy="0"/>
+        </a:xfrm>
+      </p:grpSpPr>
+      <p:sp>
+        <p:nvSpPr>
+          <p:cNvPr id="2" name="Slide Image Placeholder 1"/>
+          <p:cNvSpPr>
+            <a:spLocks noGrp="1" noRot="1" noChangeAspect="1"/>
+          </p:cNvSpPr>
+          <p:nvPr>
+            <p:ph type="sldImg"/>
+          </p:nvPr>
+        </p:nvSpPr>
+        <p:spPr/>
+      </p:sp>
+      <p:sp>
+        <p:nvSpPr>
+          <p:cNvPr id="3" name="Notes Placeholder 2"/>
+          <p:cNvSpPr>
+            <a:spLocks noGrp="1"/>
+          </p:cNvSpPr>
+          <p:nvPr>
+            <p:ph type="body" idx="1"/>
+          </p:nvPr>
+        </p:nvSpPr>
+        <p:spPr/>
+        <p:txBody>
+          <a:bodyPr/>
+          <a:lstStyle/>
+          <a:p>
+            <a:r>
+              <a:rPr lang="en-US" dirty="0"/>
+              <a:t/>
+            </a:r>
+            <a:endParaRPr lang="en-US" dirty="0"/>
+          </a:p>
+        </p:txBody>
+      </p:sp>
+      <p:sp>
+        <p:nvSpPr>
+          <p:cNvPr id="4" name="Slide Number Placeholder 3"/>
+          <p:cNvSpPr>
+            <a:spLocks noGrp="1"/>
+          </p:cNvSpPr>
+          <p:nvPr>
+            <p:ph type="sldNum" sz="quarter" idx="10"/>
+          </p:nvPr>
+        </p:nvSpPr>
+        <p:spPr/>
+        <p:txBody>
+          <a:bodyPr/>
+          <a:lstStyle/>
+          <a:p>
+            <a:fld id="{F7021451-1387-4CA6-816F-3879F97B5CBC}" type="slidenum">
+              <a:rPr lang="en-US"/>
+              <a:t>5</a:t>
+            </a:fld>
+            <a:endParaRPr lang="en-US"/>
+          </a:p>
+        </p:txBody>
+      </p:sp>
+    </p:spTree>
+    <p:extLst>
+      <p:ext uri="{BB962C8B-B14F-4D97-AF65-F5344CB8AC3E}">
+        <p14:creationId xmlns:p14="http://schemas.microsoft.com/office/powerpoint/2010/main" val="1024086991"/>
+      </p:ext>
+    </p:extLst>
+  </p:cSld>
+  <p:clrMapOvr>
+    <a:masterClrMapping/>
+  </p:clrMapOvr>
+</p:notes>
+</file>
+
 <file path=ppt/slideLayouts/slideLayout1.xml><?xml version="1.0" encoding="utf-8"?>
 <p:sldLayout xmlns:a="http://schemas.openxmlformats.org/drawingml/2006/main" xmlns:r="http://schemas.openxmlformats.org/officeDocument/2006/relationships" xmlns:p="http://schemas.openxmlformats.org/presentationml/2006/main" preserve="1">
   <p:cSld name="DEFAULT">
@@ -1170,7 +1259,7 @@
         </p:nvSpPr>
         <p:spPr>
           <a:xfrm>
-            <a:off x="731520" y="1280160"/>
+            <a:off x="731520" y="1097280"/>
             <a:ext cx="7772400" cy="1371600"/>
           </a:xfrm>
           <a:prstGeom prst="rect">
@@ -1187,7 +1276,7 @@
               <a:buNone/>
             </a:pPr>
             <a:r>
-              <a:rPr lang="en-US" sz="3600" b="1" dirty="0">
+              <a:rPr lang="en-US" sz="4000" b="1" dirty="0">
                 <a:solidFill>
                   <a:srgbClr val="FFFFFF"/>
                 </a:solidFill>
@@ -1197,7 +1286,7 @@
               </a:rPr>
               <a:t>Introduction to Probability</a:t>
             </a:r>
-            <a:endParaRPr lang="en-US" sz="3600" dirty="0"/>
+            <a:endParaRPr lang="en-US" sz="4000" dirty="0"/>
           </a:p>
         </p:txBody>
       </p:sp>
@@ -1209,7 +1298,7 @@
         </p:nvSpPr>
         <p:spPr>
           <a:xfrm>
-            <a:off x="731520" y="2743200"/>
+            <a:off x="731520" y="2560320"/>
             <a:ext cx="7772400" cy="548640"/>
           </a:xfrm>
           <a:prstGeom prst="rect">
@@ -1228,13 +1317,13 @@
             <a:r>
               <a:rPr lang="en-US" sz="1600" dirty="0">
                 <a:solidFill>
-                  <a:srgbClr val="9B9690"/>
+                  <a:srgbClr val="E9C46A"/>
                 </a:solidFill>
                 <a:latin typeface="Calibri" pitchFamily="34" charset="0"/>
                 <a:ea typeface="Calibri" pitchFamily="34" charset="-122"/>
                 <a:cs typeface="Calibri" pitchFamily="34" charset="-120"/>
               </a:rPr>
-              <a:t>G6 Maths · Probability &amp; Statistics</a:t>
+              <a:t>Grade 6 Mathematics · Mr Zocchi</a:t>
             </a:r>
             <a:endParaRPr lang="en-US" sz="1600" dirty="0"/>
           </a:p>
@@ -1242,14 +1331,36 @@
       </p:sp>
       <p:sp>
         <p:nvSpPr>
-          <p:cNvPr id="5" name="Text 3"/>
+          <p:cNvPr id="5" name="Shape 3"/>
           <p:cNvSpPr/>
           <p:nvPr/>
         </p:nvSpPr>
         <p:spPr>
           <a:xfrm>
-            <a:off x="731520" y="4389120"/>
-            <a:ext cx="7772400" cy="457200"/>
+            <a:off x="731520" y="3474720"/>
+            <a:ext cx="2011680" cy="411480"/>
+          </a:xfrm>
+          <a:prstGeom prst="roundRect">
+            <a:avLst>
+              <a:gd name="adj" fmla="val 17778"/>
+            </a:avLst>
+          </a:prstGeom>
+          <a:solidFill>
+            <a:srgbClr val="2A9D8F"/>
+          </a:solidFill>
+          <a:ln/>
+        </p:spPr>
+      </p:sp>
+      <p:sp>
+        <p:nvSpPr>
+          <p:cNvPr id="6" name="Text 4"/>
+          <p:cNvSpPr/>
+          <p:nvPr/>
+        </p:nvSpPr>
+        <p:spPr>
+          <a:xfrm>
+            <a:off x="731520" y="3474720"/>
+            <a:ext cx="2011680" cy="411480"/>
           </a:xfrm>
           <a:prstGeom prst="rect">
             <a:avLst/>
@@ -1261,21 +1372,21 @@
           <a:bodyPr wrap="square" rtlCol="0" anchor="ctr"/>
           <a:lstStyle/>
           <a:p>
-            <a:pPr indent="0" marL="0">
+            <a:pPr algn="ctr" indent="0" marL="0">
               <a:buNone/>
             </a:pPr>
             <a:r>
-              <a:rPr lang="en-US" sz="1000" dirty="0">
-                <a:solidFill>
-                  <a:srgbClr val="6B6660"/>
+              <a:rPr lang="en-US" sz="1200" b="1" dirty="0">
+                <a:solidFill>
+                  <a:srgbClr val="FFFFFF"/>
                 </a:solidFill>
                 <a:latin typeface="Calibri" pitchFamily="34" charset="0"/>
                 <a:ea typeface="Calibri" pitchFamily="34" charset="-122"/>
                 <a:cs typeface="Calibri" pitchFamily="34" charset="-120"/>
               </a:rPr>
-              <a:t>Mr Zocchi · mrzocchi.com</a:t>
-            </a:r>
-            <a:endParaRPr lang="en-US" sz="1000" dirty="0"/>
+              <a:t>Term 5 · Probability &amp; Statistics</a:t>
+            </a:r>
+            <a:endParaRPr lang="en-US" sz="1200" dirty="0"/>
           </a:p>
         </p:txBody>
       </p:sp>
@@ -1293,7 +1404,7 @@
     <p:bg>
       <p:bgPr>
         <a:solidFill>
-          <a:srgbClr val="FFFFFF"/>
+          <a:srgbClr val="FAF8F5"/>
         </a:solidFill>
       </p:bgPr>
     </p:bg>
@@ -1339,8 +1450,8 @@
         </p:nvSpPr>
         <p:spPr>
           <a:xfrm>
-            <a:off x="548640" y="274320"/>
-            <a:ext cx="8046720" cy="640080"/>
+            <a:off x="7772400" y="4709160"/>
+            <a:ext cx="1097280" cy="320040"/>
           </a:xfrm>
           <a:prstGeom prst="rect">
             <a:avLst/>
@@ -1349,14 +1460,105 @@
           <a:ln/>
         </p:spPr>
         <p:txBody>
-          <a:bodyPr wrap="square" lIns="0" tIns="0" rIns="0" bIns="0" rtlCol="0" anchor="ctr"/>
+          <a:bodyPr wrap="square" rtlCol="0" anchor="ctr"/>
+          <a:lstStyle/>
+          <a:p>
+            <a:pPr algn="r" indent="0" marL="0">
+              <a:buNone/>
+            </a:pPr>
+            <a:r>
+              <a:rPr lang="en-US" sz="900" dirty="0">
+                <a:solidFill>
+                  <a:srgbClr val="6B6660"/>
+                </a:solidFill>
+                <a:latin typeface="Calibri" pitchFamily="34" charset="0"/>
+                <a:ea typeface="Calibri" pitchFamily="34" charset="-122"/>
+                <a:cs typeface="Calibri" pitchFamily="34" charset="-120"/>
+              </a:rPr>
+              <a:t>2 / 5</a:t>
+            </a:r>
+            <a:endParaRPr lang="en-US" sz="900" dirty="0"/>
+          </a:p>
+        </p:txBody>
+      </p:sp>
+      <p:sp>
+        <p:nvSpPr>
+          <p:cNvPr id="4" name="Shape 2"/>
+          <p:cNvSpPr/>
+          <p:nvPr/>
+        </p:nvSpPr>
+        <p:spPr>
+          <a:xfrm>
+            <a:off x="1371600" y="914400"/>
+            <a:ext cx="6400800" cy="3200400"/>
+          </a:xfrm>
+          <a:prstGeom prst="rect">
+            <a:avLst/>
+          </a:prstGeom>
+          <a:solidFill>
+            <a:srgbClr val="FFFFFF"/>
+          </a:solidFill>
+          <a:ln w="12700">
+            <a:solidFill>
+              <a:srgbClr val="E5E2DC"/>
+            </a:solidFill>
+            <a:prstDash val="solid"/>
+          </a:ln>
+          <a:effectLst>
+            <a:outerShdw sx="100000" sy="100000" kx="0" ky="0" algn="bl" rotWithShape="0" blurRad="50800" dist="25400" dir="8100000">
+              <a:srgbClr val="000000">
+                <a:alpha val="10000"/>
+              </a:srgbClr>
+            </a:outerShdw>
+          </a:effectLst>
+        </p:spPr>
+      </p:sp>
+      <p:sp>
+        <p:nvSpPr>
+          <p:cNvPr id="5" name="Shape 3"/>
+          <p:cNvSpPr/>
+          <p:nvPr/>
+        </p:nvSpPr>
+        <p:spPr>
+          <a:xfrm>
+            <a:off x="1371600" y="914400"/>
+            <a:ext cx="91440" cy="3200400"/>
+          </a:xfrm>
+          <a:prstGeom prst="rect">
+            <a:avLst/>
+          </a:prstGeom>
+          <a:solidFill>
+            <a:srgbClr val="2A9D8F"/>
+          </a:solidFill>
+          <a:ln/>
+        </p:spPr>
+      </p:sp>
+      <p:sp>
+        <p:nvSpPr>
+          <p:cNvPr id="6" name="Text 4"/>
+          <p:cNvSpPr/>
+          <p:nvPr/>
+        </p:nvSpPr>
+        <p:spPr>
+          <a:xfrm>
+            <a:off x="1828800" y="1097280"/>
+            <a:ext cx="5669280" cy="640080"/>
+          </a:xfrm>
+          <a:prstGeom prst="rect">
+            <a:avLst/>
+          </a:prstGeom>
+          <a:noFill/>
+          <a:ln/>
+        </p:spPr>
+        <p:txBody>
+          <a:bodyPr wrap="square" rtlCol="0" anchor="ctr"/>
           <a:lstStyle/>
           <a:p>
             <a:pPr indent="0" marL="0">
               <a:buNone/>
             </a:pPr>
             <a:r>
-              <a:rPr lang="en-US" sz="2600" b="1" dirty="0">
+              <a:rPr lang="en-US" sz="2400" b="1" dirty="0">
                 <a:solidFill>
                   <a:srgbClr val="1B2A4A"/>
                 </a:solidFill>
@@ -1364,22 +1566,22 @@
                 <a:ea typeface="Georgia" pitchFamily="34" charset="-122"/>
                 <a:cs typeface="Georgia" pitchFamily="34" charset="-120"/>
               </a:rPr>
-              <a:t>What is Probability?</a:t>
-            </a:r>
-            <a:endParaRPr lang="en-US" sz="2600" dirty="0"/>
-          </a:p>
-        </p:txBody>
-      </p:sp>
-      <p:sp>
-        <p:nvSpPr>
-          <p:cNvPr id="4" name="Text 2"/>
+              <a:t>How Likely Is It?</a:t>
+            </a:r>
+            <a:endParaRPr lang="en-US" sz="2400" dirty="0"/>
+          </a:p>
+        </p:txBody>
+      </p:sp>
+      <p:sp>
+        <p:nvSpPr>
+          <p:cNvPr id="7" name="Text 5"/>
           <p:cNvSpPr/>
           <p:nvPr/>
         </p:nvSpPr>
         <p:spPr>
           <a:xfrm>
-            <a:off x="548640" y="1097280"/>
-            <a:ext cx="8046720" cy="3474720"/>
+            <a:off x="1828800" y="1828800"/>
+            <a:ext cx="5669280" cy="2011680"/>
           </a:xfrm>
           <a:prstGeom prst="rect">
             <a:avLst/>
@@ -1391,12 +1593,11 @@
           <a:bodyPr wrap="square" rtlCol="0" anchor="t"/>
           <a:lstStyle/>
           <a:p>
-            <a:pPr marL="342900" indent="-342900">
-              <a:spcAft>
-                <a:spcPts val="800"/>
-              </a:spcAft>
-              <a:buSzPct val="100000"/>
-              <a:buChar char="•"/>
+            <a:pPr indent="0" marL="0">
+              <a:lnSpc>
+                <a:spcPct val="130000"/>
+              </a:lnSpc>
+              <a:buNone/>
             </a:pPr>
             <a:r>
               <a:rPr lang="en-US" sz="1500" dirty="0">
@@ -1407,129 +1608,9 @@
                 <a:ea typeface="Calibri" pitchFamily="34" charset="-122"/>
                 <a:cs typeface="Calibri" pitchFamily="34" charset="-120"/>
               </a:rPr>
-              <a:t>How LIKELY something is to happen</a:t>
+              <a:t>Probability measures how likely an event is to happen. It is always between 0 (impossible) and 1 (certain). We can express probability as a fraction, decimal, or percentage. Example: the probability of flipping heads on a fair coin is ½ = 0.5 = 50%.</a:t>
             </a:r>
             <a:endParaRPr lang="en-US" sz="1500" dirty="0"/>
-          </a:p>
-          <a:p>
-            <a:pPr marL="342900" indent="-342900">
-              <a:spcAft>
-                <a:spcPts val="800"/>
-              </a:spcAft>
-              <a:buSzPct val="100000"/>
-              <a:buChar char="•"/>
-            </a:pPr>
-            <a:r>
-              <a:rPr lang="en-US" sz="1500" dirty="0">
-                <a:solidFill>
-                  <a:srgbClr val="3D3A36"/>
-                </a:solidFill>
-                <a:latin typeface="Calibri" pitchFamily="34" charset="0"/>
-                <a:ea typeface="Calibri" pitchFamily="34" charset="-122"/>
-                <a:cs typeface="Calibri" pitchFamily="34" charset="-120"/>
-              </a:rPr>
-              <a:t>Measured from 0 (impossible) to 1 (certain)</a:t>
-            </a:r>
-            <a:endParaRPr lang="en-US" sz="1500" dirty="0"/>
-          </a:p>
-          <a:p>
-            <a:pPr marL="342900" indent="-342900">
-              <a:spcAft>
-                <a:spcPts val="800"/>
-              </a:spcAft>
-              <a:buSzPct val="100000"/>
-              <a:buChar char="•"/>
-            </a:pPr>
-            <a:r>
-              <a:rPr lang="en-US" sz="1500" dirty="0">
-                <a:solidFill>
-                  <a:srgbClr val="3D3A36"/>
-                </a:solidFill>
-                <a:latin typeface="Calibri" pitchFamily="34" charset="0"/>
-                <a:ea typeface="Calibri" pitchFamily="34" charset="-122"/>
-                <a:cs typeface="Calibri" pitchFamily="34" charset="-120"/>
-              </a:rPr>
-              <a:t>Can be written as fraction, decimal, or percentage</a:t>
-            </a:r>
-            <a:endParaRPr lang="en-US" sz="1500" dirty="0"/>
-          </a:p>
-          <a:p>
-            <a:pPr marL="342900" indent="-342900">
-              <a:spcAft>
-                <a:spcPts val="800"/>
-              </a:spcAft>
-              <a:buSzPct val="100000"/>
-              <a:buChar char="•"/>
-            </a:pPr>
-            <a:r>
-              <a:rPr lang="en-US" sz="1500" dirty="0">
-                <a:solidFill>
-                  <a:srgbClr val="3D3A36"/>
-                </a:solidFill>
-                <a:latin typeface="Calibri" pitchFamily="34" charset="0"/>
-                <a:ea typeface="Calibri" pitchFamily="34" charset="-122"/>
-                <a:cs typeface="Calibri" pitchFamily="34" charset="-120"/>
-              </a:rPr>
-              <a:t>P(event) = number of favourable outcomes ÷ total number of outcomes</a:t>
-            </a:r>
-            <a:endParaRPr lang="en-US" sz="1500" dirty="0"/>
-          </a:p>
-          <a:p>
-            <a:pPr marL="342900" indent="-342900">
-              <a:spcAft>
-                <a:spcPts val="800"/>
-              </a:spcAft>
-              <a:buSzPct val="100000"/>
-              <a:buChar char="•"/>
-            </a:pPr>
-            <a:r>
-              <a:rPr lang="en-US" sz="1500" dirty="0">
-                <a:solidFill>
-                  <a:srgbClr val="3D3A36"/>
-                </a:solidFill>
-                <a:latin typeface="Calibri" pitchFamily="34" charset="0"/>
-                <a:ea typeface="Calibri" pitchFamily="34" charset="-122"/>
-                <a:cs typeface="Calibri" pitchFamily="34" charset="-120"/>
-              </a:rPr>
-              <a:t>Example: P(heads on a coin) = 1/2 = 0.5 = 50%</a:t>
-            </a:r>
-            <a:endParaRPr lang="en-US" sz="1500" dirty="0"/>
-          </a:p>
-        </p:txBody>
-      </p:sp>
-      <p:sp>
-        <p:nvSpPr>
-          <p:cNvPr id="5" name="Text 3"/>
-          <p:cNvSpPr/>
-          <p:nvPr/>
-        </p:nvSpPr>
-        <p:spPr>
-          <a:xfrm>
-            <a:off x="548640" y="4800600"/>
-            <a:ext cx="3657600" cy="274320"/>
-          </a:xfrm>
-          <a:prstGeom prst="rect">
-            <a:avLst/>
-          </a:prstGeom>
-          <a:noFill/>
-          <a:ln/>
-        </p:spPr>
-        <p:txBody>
-          <a:bodyPr wrap="square" rtlCol="0" anchor="ctr"/>
-          <a:lstStyle/>
-          <a:p>
-            <a:pPr indent="0" marL="0">
-              <a:buNone/>
-            </a:pPr>
-            <a:r>
-              <a:rPr lang="en-US" sz="800" dirty="0">
-                <a:solidFill>
-                  <a:srgbClr val="9B9690"/>
-                </a:solidFill>
-              </a:rPr>
-              <a:t>mrzocchi.com</a:t>
-            </a:r>
-            <a:endParaRPr lang="en-US" sz="800" dirty="0"/>
           </a:p>
         </p:txBody>
       </p:sp>
@@ -1547,7 +1628,7 @@
     <p:bg>
       <p:bgPr>
         <a:solidFill>
-          <a:srgbClr val="FFFFFF"/>
+          <a:srgbClr val="FAF8F5"/>
         </a:solidFill>
       </p:bgPr>
     </p:bg>
@@ -1593,8 +1674,8 @@
         </p:nvSpPr>
         <p:spPr>
           <a:xfrm>
-            <a:off x="548640" y="274320"/>
-            <a:ext cx="8046720" cy="640080"/>
+            <a:off x="7772400" y="4709160"/>
+            <a:ext cx="1097280" cy="320040"/>
           </a:xfrm>
           <a:prstGeom prst="rect">
             <a:avLst/>
@@ -1603,7 +1684,46 @@
           <a:ln/>
         </p:spPr>
         <p:txBody>
-          <a:bodyPr wrap="square" lIns="0" tIns="0" rIns="0" bIns="0" rtlCol="0" anchor="ctr"/>
+          <a:bodyPr wrap="square" rtlCol="0" anchor="ctr"/>
+          <a:lstStyle/>
+          <a:p>
+            <a:pPr algn="r" indent="0" marL="0">
+              <a:buNone/>
+            </a:pPr>
+            <a:r>
+              <a:rPr lang="en-US" sz="900" dirty="0">
+                <a:solidFill>
+                  <a:srgbClr val="6B6660"/>
+                </a:solidFill>
+                <a:latin typeface="Calibri" pitchFamily="34" charset="0"/>
+                <a:ea typeface="Calibri" pitchFamily="34" charset="-122"/>
+                <a:cs typeface="Calibri" pitchFamily="34" charset="-120"/>
+              </a:rPr>
+              <a:t>3 / 5</a:t>
+            </a:r>
+            <a:endParaRPr lang="en-US" sz="900" dirty="0"/>
+          </a:p>
+        </p:txBody>
+      </p:sp>
+      <p:sp>
+        <p:nvSpPr>
+          <p:cNvPr id="4" name="Text 2"/>
+          <p:cNvSpPr/>
+          <p:nvPr/>
+        </p:nvSpPr>
+        <p:spPr>
+          <a:xfrm>
+            <a:off x="457200" y="274320"/>
+            <a:ext cx="8229600" cy="640080"/>
+          </a:xfrm>
+          <a:prstGeom prst="rect">
+            <a:avLst/>
+          </a:prstGeom>
+          <a:noFill/>
+          <a:ln/>
+        </p:spPr>
+        <p:txBody>
+          <a:bodyPr wrap="square" rtlCol="0" anchor="ctr"/>
           <a:lstStyle/>
           <a:p>
             <a:pPr indent="0" marL="0">
@@ -1618,7 +1738,7 @@
                 <a:ea typeface="Georgia" pitchFamily="34" charset="-122"/>
                 <a:cs typeface="Georgia" pitchFamily="34" charset="-120"/>
               </a:rPr>
-              <a:t>Calculating Probability</a:t>
+              <a:t>The Probability Scale</a:t>
             </a:r>
             <a:endParaRPr lang="en-US" sz="2600" dirty="0"/>
           </a:p>
@@ -1626,14 +1746,14 @@
       </p:sp>
       <p:sp>
         <p:nvSpPr>
-          <p:cNvPr id="4" name="Text 2"/>
+          <p:cNvPr id="5" name="Text 3"/>
           <p:cNvSpPr/>
           <p:nvPr/>
         </p:nvSpPr>
         <p:spPr>
           <a:xfrm>
-            <a:off x="548640" y="1097280"/>
-            <a:ext cx="8046720" cy="3474720"/>
+            <a:off x="457200" y="1188720"/>
+            <a:ext cx="3840480" cy="3474720"/>
           </a:xfrm>
           <a:prstGeom prst="rect">
             <a:avLst/>
@@ -1647,13 +1767,13 @@
           <a:p>
             <a:pPr marL="342900" indent="-342900">
               <a:spcAft>
-                <a:spcPts val="800"/>
+                <a:spcPts val="600"/>
               </a:spcAft>
               <a:buSzPct val="100000"/>
               <a:buChar char="•"/>
             </a:pPr>
             <a:r>
-              <a:rPr lang="en-US" sz="1500" dirty="0">
+              <a:rPr lang="en-US" sz="1400" dirty="0">
                 <a:solidFill>
                   <a:srgbClr val="3D3A36"/>
                 </a:solidFill>
@@ -1661,20 +1781,20 @@
                 <a:ea typeface="Calibri" pitchFamily="34" charset="-122"/>
                 <a:cs typeface="Calibri" pitchFamily="34" charset="-120"/>
               </a:rPr>
-              <a:t>Fair dice: P(6) = 1/6 (one 6 out of six possible outcomes)</a:t>
-            </a:r>
-            <a:endParaRPr lang="en-US" sz="1500" dirty="0"/>
+              <a:t>0 = impossible (rolling 7 on a normal die)</a:t>
+            </a:r>
+            <a:endParaRPr lang="en-US" sz="1400" dirty="0"/>
           </a:p>
           <a:p>
             <a:pPr marL="342900" indent="-342900">
               <a:spcAft>
-                <a:spcPts val="800"/>
+                <a:spcPts val="600"/>
               </a:spcAft>
               <a:buSzPct val="100000"/>
               <a:buChar char="•"/>
             </a:pPr>
             <a:r>
-              <a:rPr lang="en-US" sz="1500" dirty="0">
+              <a:rPr lang="en-US" sz="1400" dirty="0">
                 <a:solidFill>
                   <a:srgbClr val="3D3A36"/>
                 </a:solidFill>
@@ -1682,20 +1802,20 @@
                 <a:ea typeface="Calibri" pitchFamily="34" charset="-122"/>
                 <a:cs typeface="Calibri" pitchFamily="34" charset="-120"/>
               </a:rPr>
-              <a:t>P(even number) = 3/6 = 1/2 (three even numbers: 2, 4, 6)</a:t>
-            </a:r>
-            <a:endParaRPr lang="en-US" sz="1500" dirty="0"/>
+              <a:t>Low probability = unlikely (winning the lottery)</a:t>
+            </a:r>
+            <a:endParaRPr lang="en-US" sz="1400" dirty="0"/>
           </a:p>
           <a:p>
             <a:pPr marL="342900" indent="-342900">
               <a:spcAft>
-                <a:spcPts val="800"/>
+                <a:spcPts val="600"/>
               </a:spcAft>
               <a:buSzPct val="100000"/>
               <a:buChar char="•"/>
             </a:pPr>
             <a:r>
-              <a:rPr lang="en-US" sz="1500" dirty="0">
+              <a:rPr lang="en-US" sz="1400" dirty="0">
                 <a:solidFill>
                   <a:srgbClr val="3D3A36"/>
                 </a:solidFill>
@@ -1703,20 +1823,20 @@
                 <a:ea typeface="Calibri" pitchFamily="34" charset="-122"/>
                 <a:cs typeface="Calibri" pitchFamily="34" charset="-120"/>
               </a:rPr>
-              <a:t>All probabilities of an event add up to 1</a:t>
-            </a:r>
-            <a:endParaRPr lang="en-US" sz="1500" dirty="0"/>
+              <a:t>0.5 = even chance (flipping heads)</a:t>
+            </a:r>
+            <a:endParaRPr lang="en-US" sz="1400" dirty="0"/>
           </a:p>
           <a:p>
             <a:pPr marL="342900" indent="-342900">
               <a:spcAft>
-                <a:spcPts val="800"/>
+                <a:spcPts val="600"/>
               </a:spcAft>
               <a:buSzPct val="100000"/>
               <a:buChar char="•"/>
             </a:pPr>
             <a:r>
-              <a:rPr lang="en-US" sz="1500" dirty="0">
+              <a:rPr lang="en-US" sz="1400" dirty="0">
                 <a:solidFill>
                   <a:srgbClr val="3D3A36"/>
                 </a:solidFill>
@@ -1724,20 +1844,20 @@
                 <a:ea typeface="Calibri" pitchFamily="34" charset="-122"/>
                 <a:cs typeface="Calibri" pitchFamily="34" charset="-120"/>
               </a:rPr>
-              <a:t>P(not A) = 1 - P(A)</a:t>
-            </a:r>
-            <a:endParaRPr lang="en-US" sz="1500" dirty="0"/>
+              <a:t>High probability = likely (sun rising tomorrow)</a:t>
+            </a:r>
+            <a:endParaRPr lang="en-US" sz="1400" dirty="0"/>
           </a:p>
           <a:p>
             <a:pPr marL="342900" indent="-342900">
               <a:spcAft>
-                <a:spcPts val="800"/>
+                <a:spcPts val="600"/>
               </a:spcAft>
               <a:buSzPct val="100000"/>
               <a:buChar char="•"/>
             </a:pPr>
             <a:r>
-              <a:rPr lang="en-US" sz="1500" dirty="0">
+              <a:rPr lang="en-US" sz="1400" dirty="0">
                 <a:solidFill>
                   <a:srgbClr val="3D3A36"/>
                 </a:solidFill>
@@ -1745,22 +1865,95 @@
                 <a:ea typeface="Calibri" pitchFamily="34" charset="-122"/>
                 <a:cs typeface="Calibri" pitchFamily="34" charset="-120"/>
               </a:rPr>
-              <a:t>Events are 'equally likely' if they have the same probability</a:t>
-            </a:r>
-            <a:endParaRPr lang="en-US" sz="1500" dirty="0"/>
-          </a:p>
-        </p:txBody>
-      </p:sp>
-      <p:sp>
-        <p:nvSpPr>
-          <p:cNvPr id="5" name="Text 3"/>
+              <a:t>1 = certain (a day having 24 hours)</a:t>
+            </a:r>
+            <a:endParaRPr lang="en-US" sz="1400" dirty="0"/>
+          </a:p>
+          <a:p>
+            <a:pPr marL="342900" indent="-342900">
+              <a:spcAft>
+                <a:spcPts val="600"/>
+              </a:spcAft>
+              <a:buSzPct val="100000"/>
+              <a:buChar char="•"/>
+            </a:pPr>
+            <a:r>
+              <a:rPr lang="en-US" sz="1400" dirty="0">
+                <a:solidFill>
+                  <a:srgbClr val="3D3A36"/>
+                </a:solidFill>
+                <a:latin typeface="Calibri" pitchFamily="34" charset="0"/>
+                <a:ea typeface="Calibri" pitchFamily="34" charset="-122"/>
+                <a:cs typeface="Calibri" pitchFamily="34" charset="-120"/>
+              </a:rPr>
+              <a:t>Probabilities of all outcomes always add up to 1</a:t>
+            </a:r>
+            <a:endParaRPr lang="en-US" sz="1400" dirty="0"/>
+          </a:p>
+        </p:txBody>
+      </p:sp>
+      <p:sp>
+        <p:nvSpPr>
+          <p:cNvPr id="6" name="Shape 4"/>
           <p:cNvSpPr/>
           <p:nvPr/>
         </p:nvSpPr>
         <p:spPr>
           <a:xfrm>
-            <a:off x="548640" y="4800600"/>
-            <a:ext cx="3657600" cy="274320"/>
+            <a:off x="4846320" y="1188720"/>
+            <a:ext cx="3840480" cy="3474720"/>
+          </a:xfrm>
+          <a:prstGeom prst="rect">
+            <a:avLst/>
+          </a:prstGeom>
+          <a:solidFill>
+            <a:srgbClr val="FFFFFF"/>
+          </a:solidFill>
+          <a:ln w="12700">
+            <a:solidFill>
+              <a:srgbClr val="E5E2DC"/>
+            </a:solidFill>
+            <a:prstDash val="solid"/>
+          </a:ln>
+          <a:effectLst>
+            <a:outerShdw sx="100000" sy="100000" kx="0" ky="0" algn="bl" rotWithShape="0" blurRad="50800" dist="25400" dir="8100000">
+              <a:srgbClr val="000000">
+                <a:alpha val="10000"/>
+              </a:srgbClr>
+            </a:outerShdw>
+          </a:effectLst>
+        </p:spPr>
+      </p:sp>
+      <p:sp>
+        <p:nvSpPr>
+          <p:cNvPr id="7" name="Shape 5"/>
+          <p:cNvSpPr/>
+          <p:nvPr/>
+        </p:nvSpPr>
+        <p:spPr>
+          <a:xfrm>
+            <a:off x="4846320" y="1188720"/>
+            <a:ext cx="3840480" cy="54864"/>
+          </a:xfrm>
+          <a:prstGeom prst="rect">
+            <a:avLst/>
+          </a:prstGeom>
+          <a:solidFill>
+            <a:srgbClr val="2A9D8F"/>
+          </a:solidFill>
+          <a:ln/>
+        </p:spPr>
+      </p:sp>
+      <p:sp>
+        <p:nvSpPr>
+          <p:cNvPr id="8" name="Text 6"/>
+          <p:cNvSpPr/>
+          <p:nvPr/>
+        </p:nvSpPr>
+        <p:spPr>
+          <a:xfrm>
+            <a:off x="5120640" y="1371600"/>
+            <a:ext cx="3291840" cy="3108960"/>
           </a:xfrm>
           <a:prstGeom prst="rect">
             <a:avLst/>
@@ -1769,21 +1962,136 @@
           <a:ln/>
         </p:spPr>
         <p:txBody>
-          <a:bodyPr wrap="square" rtlCol="0" anchor="ctr"/>
+          <a:bodyPr wrap="square" rtlCol="0" anchor="t"/>
           <a:lstStyle/>
           <a:p>
             <a:pPr indent="0" marL="0">
+              <a:spcAft>
+                <a:spcPts val="400"/>
+              </a:spcAft>
               <a:buNone/>
             </a:pPr>
             <a:r>
-              <a:rPr lang="en-US" sz="800" dirty="0">
-                <a:solidFill>
-                  <a:srgbClr val="9B9690"/>
-                </a:solidFill>
-              </a:rPr>
-              <a:t>mrzocchi.com</a:t>
-            </a:r>
-            <a:endParaRPr lang="en-US" sz="800" dirty="0"/>
+              <a:rPr lang="en-US" sz="1600" b="1" dirty="0">
+                <a:solidFill>
+                  <a:srgbClr val="1B2A4A"/>
+                </a:solidFill>
+                <a:latin typeface="Calibri" pitchFamily="34" charset="0"/>
+                <a:ea typeface="Calibri" pitchFamily="34" charset="-122"/>
+                <a:cs typeface="Calibri" pitchFamily="34" charset="-120"/>
+              </a:rPr>
+              <a:t>Calculating Probability</a:t>
+            </a:r>
+            <a:endParaRPr lang="en-US" sz="1600" dirty="0"/>
+          </a:p>
+          <a:p>
+            <a:pPr indent="0" marL="0">
+              <a:spcAft>
+                <a:spcPts val="400"/>
+              </a:spcAft>
+              <a:buNone/>
+            </a:pPr>
+            <a:endParaRPr lang="en-US" sz="1600" dirty="0"/>
+          </a:p>
+          <a:p>
+            <a:pPr indent="0" marL="0">
+              <a:spcAft>
+                <a:spcPts val="400"/>
+              </a:spcAft>
+              <a:buNone/>
+            </a:pPr>
+            <a:r>
+              <a:rPr lang="en-US" sz="1300" dirty="0">
+                <a:solidFill>
+                  <a:srgbClr val="3D3A36"/>
+                </a:solidFill>
+                <a:latin typeface="Calibri" pitchFamily="34" charset="0"/>
+                <a:ea typeface="Calibri" pitchFamily="34" charset="-122"/>
+                <a:cs typeface="Calibri" pitchFamily="34" charset="-120"/>
+              </a:rPr>
+              <a:t>P(event) = number of favourable outcomes ÷ total number of possible outcomes</a:t>
+            </a:r>
+            <a:endParaRPr lang="en-US" sz="1600" dirty="0"/>
+          </a:p>
+          <a:p>
+            <a:pPr indent="0" marL="0">
+              <a:spcAft>
+                <a:spcPts val="400"/>
+              </a:spcAft>
+              <a:buNone/>
+            </a:pPr>
+            <a:r>
+              <a:rPr lang="en-US" sz="1300" dirty="0">
+                <a:solidFill>
+                  <a:srgbClr val="3D3A36"/>
+                </a:solidFill>
+                <a:latin typeface="Calibri" pitchFamily="34" charset="0"/>
+                <a:ea typeface="Calibri" pitchFamily="34" charset="-122"/>
+                <a:cs typeface="Calibri" pitchFamily="34" charset="-120"/>
+              </a:rPr>
+              <a:t>Die: P(rolling a 3) = 1/6</a:t>
+            </a:r>
+            <a:endParaRPr lang="en-US" sz="1600" dirty="0"/>
+          </a:p>
+          <a:p>
+            <a:pPr indent="0" marL="0">
+              <a:spcAft>
+                <a:spcPts val="400"/>
+              </a:spcAft>
+              <a:buNone/>
+            </a:pPr>
+            <a:r>
+              <a:rPr lang="en-US" sz="1300" dirty="0">
+                <a:solidFill>
+                  <a:srgbClr val="3D3A36"/>
+                </a:solidFill>
+                <a:latin typeface="Calibri" pitchFamily="34" charset="0"/>
+                <a:ea typeface="Calibri" pitchFamily="34" charset="-122"/>
+                <a:cs typeface="Calibri" pitchFamily="34" charset="-120"/>
+              </a:rPr>
+              <a:t>Die: P(even number) = 3/6 = 1/2</a:t>
+            </a:r>
+            <a:endParaRPr lang="en-US" sz="1600" dirty="0"/>
+          </a:p>
+          <a:p>
+            <a:pPr indent="0" marL="0">
+              <a:spcAft>
+                <a:spcPts val="400"/>
+              </a:spcAft>
+              <a:buNone/>
+            </a:pPr>
+            <a:r>
+              <a:rPr lang="en-US" sz="1300" dirty="0">
+                <a:solidFill>
+                  <a:srgbClr val="3D3A36"/>
+                </a:solidFill>
+                <a:latin typeface="Calibri" pitchFamily="34" charset="0"/>
+                <a:ea typeface="Calibri" pitchFamily="34" charset="-122"/>
+                <a:cs typeface="Calibri" pitchFamily="34" charset="-120"/>
+              </a:rPr>
+              <a:t>Cards: P(heart) = 13/52 = 1/4</a:t>
+            </a:r>
+            <a:endParaRPr lang="en-US" sz="1600" dirty="0"/>
+          </a:p>
+          <a:p>
+            <a:pPr indent="0" marL="0">
+              <a:spcAft>
+                <a:spcPts val="400"/>
+              </a:spcAft>
+              <a:buNone/>
+            </a:pPr>
+            <a:r>
+              <a:rPr lang="en-US" sz="1300" dirty="0">
+                <a:solidFill>
+                  <a:srgbClr val="3D3A36"/>
+                </a:solidFill>
+                <a:latin typeface="Calibri" pitchFamily="34" charset="0"/>
+                <a:ea typeface="Calibri" pitchFamily="34" charset="-122"/>
+                <a:cs typeface="Calibri" pitchFamily="34" charset="-120"/>
+              </a:rPr>
+              <a:t>Spinner with 3 red, 2 blue: P(red) = 3/5</a:t>
+            </a:r>
+            <a:endParaRPr lang="en-US" sz="1600" dirty="0"/>
           </a:p>
         </p:txBody>
       </p:sp>
@@ -1798,6 +2106,284 @@
 <file path=ppt/slides/slide4.xml><?xml version="1.0" encoding="utf-8"?>
 <p:sld xmlns:a="http://schemas.openxmlformats.org/drawingml/2006/main" xmlns:r="http://schemas.openxmlformats.org/officeDocument/2006/relationships" xmlns:p="http://schemas.openxmlformats.org/presentationml/2006/main">
   <p:cSld name="Slide 4">
+    <p:bg>
+      <p:bgPr>
+        <a:solidFill>
+          <a:srgbClr val="FAF8F5"/>
+        </a:solidFill>
+      </p:bgPr>
+    </p:bg>
+    <p:spTree>
+      <p:nvGrpSpPr>
+        <p:cNvPr id="1" name=""/>
+        <p:cNvGrpSpPr/>
+        <p:nvPr/>
+      </p:nvGrpSpPr>
+      <p:grpSpPr>
+        <a:xfrm>
+          <a:off x="0" y="0"/>
+          <a:ext cx="0" cy="0"/>
+          <a:chOff x="0" y="0"/>
+          <a:chExt cx="0" cy="0"/>
+        </a:xfrm>
+      </p:grpSpPr>
+      <p:sp>
+        <p:nvSpPr>
+          <p:cNvPr id="2" name="Shape 0"/>
+          <p:cNvSpPr/>
+          <p:nvPr/>
+        </p:nvSpPr>
+        <p:spPr>
+          <a:xfrm>
+            <a:off x="0" y="0"/>
+            <a:ext cx="9144000" cy="54864"/>
+          </a:xfrm>
+          <a:prstGeom prst="rect">
+            <a:avLst/>
+          </a:prstGeom>
+          <a:solidFill>
+            <a:srgbClr val="2A9D8F"/>
+          </a:solidFill>
+          <a:ln/>
+        </p:spPr>
+      </p:sp>
+      <p:sp>
+        <p:nvSpPr>
+          <p:cNvPr id="3" name="Text 1"/>
+          <p:cNvSpPr/>
+          <p:nvPr/>
+        </p:nvSpPr>
+        <p:spPr>
+          <a:xfrm>
+            <a:off x="7772400" y="4709160"/>
+            <a:ext cx="1097280" cy="320040"/>
+          </a:xfrm>
+          <a:prstGeom prst="rect">
+            <a:avLst/>
+          </a:prstGeom>
+          <a:noFill/>
+          <a:ln/>
+        </p:spPr>
+        <p:txBody>
+          <a:bodyPr wrap="square" rtlCol="0" anchor="ctr"/>
+          <a:lstStyle/>
+          <a:p>
+            <a:pPr algn="r" indent="0" marL="0">
+              <a:buNone/>
+            </a:pPr>
+            <a:r>
+              <a:rPr lang="en-US" sz="900" dirty="0">
+                <a:solidFill>
+                  <a:srgbClr val="6B6660"/>
+                </a:solidFill>
+                <a:latin typeface="Calibri" pitchFamily="34" charset="0"/>
+                <a:ea typeface="Calibri" pitchFamily="34" charset="-122"/>
+                <a:cs typeface="Calibri" pitchFamily="34" charset="-120"/>
+              </a:rPr>
+              <a:t>4 / 5</a:t>
+            </a:r>
+            <a:endParaRPr lang="en-US" sz="900" dirty="0"/>
+          </a:p>
+        </p:txBody>
+      </p:sp>
+      <p:sp>
+        <p:nvSpPr>
+          <p:cNvPr id="4" name="Text 2"/>
+          <p:cNvSpPr/>
+          <p:nvPr/>
+        </p:nvSpPr>
+        <p:spPr>
+          <a:xfrm>
+            <a:off x="457200" y="274320"/>
+            <a:ext cx="8229600" cy="640080"/>
+          </a:xfrm>
+          <a:prstGeom prst="rect">
+            <a:avLst/>
+          </a:prstGeom>
+          <a:noFill/>
+          <a:ln/>
+        </p:spPr>
+        <p:txBody>
+          <a:bodyPr wrap="square" rtlCol="0" anchor="ctr"/>
+          <a:lstStyle/>
+          <a:p>
+            <a:pPr indent="0" marL="0">
+              <a:buNone/>
+            </a:pPr>
+            <a:r>
+              <a:rPr lang="en-US" sz="2600" b="1" dirty="0">
+                <a:solidFill>
+                  <a:srgbClr val="1B2A4A"/>
+                </a:solidFill>
+                <a:latin typeface="Georgia" pitchFamily="34" charset="0"/>
+                <a:ea typeface="Georgia" pitchFamily="34" charset="-122"/>
+                <a:cs typeface="Georgia" pitchFamily="34" charset="-120"/>
+              </a:rPr>
+              <a:t>Key Vocabulary</a:t>
+            </a:r>
+            <a:endParaRPr lang="en-US" sz="2600" dirty="0"/>
+          </a:p>
+        </p:txBody>
+      </p:sp>
+      <p:sp>
+        <p:nvSpPr>
+          <p:cNvPr id="5" name="Text 3"/>
+          <p:cNvSpPr/>
+          <p:nvPr/>
+        </p:nvSpPr>
+        <p:spPr>
+          <a:xfrm>
+            <a:off x="457200" y="1097280"/>
+            <a:ext cx="8229600" cy="3657600"/>
+          </a:xfrm>
+          <a:prstGeom prst="rect">
+            <a:avLst/>
+          </a:prstGeom>
+          <a:noFill/>
+          <a:ln/>
+        </p:spPr>
+        <p:txBody>
+          <a:bodyPr wrap="square" rtlCol="0" anchor="t"/>
+          <a:lstStyle/>
+          <a:p>
+            <a:pPr marL="342900" indent="-342900">
+              <a:spcAft>
+                <a:spcPts val="800"/>
+              </a:spcAft>
+              <a:buSzPct val="100000"/>
+              <a:buChar char="•"/>
+            </a:pPr>
+            <a:r>
+              <a:rPr lang="en-US" sz="1400" dirty="0">
+                <a:solidFill>
+                  <a:srgbClr val="3D3A36"/>
+                </a:solidFill>
+                <a:latin typeface="Calibri" pitchFamily="34" charset="0"/>
+                <a:ea typeface="Calibri" pitchFamily="34" charset="-122"/>
+                <a:cs typeface="Calibri" pitchFamily="34" charset="-120"/>
+              </a:rPr>
+              <a:t>Event: the thing you're measuring (e.g. rolling a 6)</a:t>
+            </a:r>
+            <a:endParaRPr lang="en-US" sz="1400" dirty="0"/>
+          </a:p>
+          <a:p>
+            <a:pPr marL="342900" indent="-342900">
+              <a:spcAft>
+                <a:spcPts val="800"/>
+              </a:spcAft>
+              <a:buSzPct val="100000"/>
+              <a:buChar char="•"/>
+            </a:pPr>
+            <a:r>
+              <a:rPr lang="en-US" sz="1400" dirty="0">
+                <a:solidFill>
+                  <a:srgbClr val="3D3A36"/>
+                </a:solidFill>
+                <a:latin typeface="Calibri" pitchFamily="34" charset="0"/>
+                <a:ea typeface="Calibri" pitchFamily="34" charset="-122"/>
+                <a:cs typeface="Calibri" pitchFamily="34" charset="-120"/>
+              </a:rPr>
+              <a:t>Outcome: one possible result (e.g. rolling a 1, 2, 3, 4, 5, or 6)</a:t>
+            </a:r>
+            <a:endParaRPr lang="en-US" sz="1400" dirty="0"/>
+          </a:p>
+          <a:p>
+            <a:pPr marL="342900" indent="-342900">
+              <a:spcAft>
+                <a:spcPts val="800"/>
+              </a:spcAft>
+              <a:buSzPct val="100000"/>
+              <a:buChar char="•"/>
+            </a:pPr>
+            <a:r>
+              <a:rPr lang="en-US" sz="1400" dirty="0">
+                <a:solidFill>
+                  <a:srgbClr val="3D3A36"/>
+                </a:solidFill>
+                <a:latin typeface="Calibri" pitchFamily="34" charset="0"/>
+                <a:ea typeface="Calibri" pitchFamily="34" charset="-122"/>
+                <a:cs typeface="Calibri" pitchFamily="34" charset="-120"/>
+              </a:rPr>
+              <a:t>Sample space: all possible outcomes (e.g. {1, 2, 3, 4, 5, 6})</a:t>
+            </a:r>
+            <a:endParaRPr lang="en-US" sz="1400" dirty="0"/>
+          </a:p>
+          <a:p>
+            <a:pPr marL="342900" indent="-342900">
+              <a:spcAft>
+                <a:spcPts val="800"/>
+              </a:spcAft>
+              <a:buSzPct val="100000"/>
+              <a:buChar char="•"/>
+            </a:pPr>
+            <a:r>
+              <a:rPr lang="en-US" sz="1400" dirty="0">
+                <a:solidFill>
+                  <a:srgbClr val="3D3A36"/>
+                </a:solidFill>
+                <a:latin typeface="Calibri" pitchFamily="34" charset="0"/>
+                <a:ea typeface="Calibri" pitchFamily="34" charset="-122"/>
+                <a:cs typeface="Calibri" pitchFamily="34" charset="-120"/>
+              </a:rPr>
+              <a:t>Fair: each outcome is equally likely</a:t>
+            </a:r>
+            <a:endParaRPr lang="en-US" sz="1400" dirty="0"/>
+          </a:p>
+          <a:p>
+            <a:pPr marL="342900" indent="-342900">
+              <a:spcAft>
+                <a:spcPts val="800"/>
+              </a:spcAft>
+              <a:buSzPct val="100000"/>
+              <a:buChar char="•"/>
+            </a:pPr>
+            <a:r>
+              <a:rPr lang="en-US" sz="1400" dirty="0">
+                <a:solidFill>
+                  <a:srgbClr val="3D3A36"/>
+                </a:solidFill>
+                <a:latin typeface="Calibri" pitchFamily="34" charset="0"/>
+                <a:ea typeface="Calibri" pitchFamily="34" charset="-122"/>
+                <a:cs typeface="Calibri" pitchFamily="34" charset="-120"/>
+              </a:rPr>
+              <a:t>Biased: some outcomes are more likely than others</a:t>
+            </a:r>
+            <a:endParaRPr lang="en-US" sz="1400" dirty="0"/>
+          </a:p>
+          <a:p>
+            <a:pPr marL="342900" indent="-342900">
+              <a:spcAft>
+                <a:spcPts val="800"/>
+              </a:spcAft>
+              <a:buSzPct val="100000"/>
+              <a:buChar char="•"/>
+            </a:pPr>
+            <a:r>
+              <a:rPr lang="en-US" sz="1400" dirty="0">
+                <a:solidFill>
+                  <a:srgbClr val="3D3A36"/>
+                </a:solidFill>
+                <a:latin typeface="Calibri" pitchFamily="34" charset="0"/>
+                <a:ea typeface="Calibri" pitchFamily="34" charset="-122"/>
+                <a:cs typeface="Calibri" pitchFamily="34" charset="-120"/>
+              </a:rPr>
+              <a:t>Random: each outcome has an equal chance of occurring</a:t>
+            </a:r>
+            <a:endParaRPr lang="en-US" sz="1400" dirty="0"/>
+          </a:p>
+        </p:txBody>
+      </p:sp>
+    </p:spTree>
+  </p:cSld>
+  <p:clrMapOvr>
+    <a:masterClrMapping/>
+  </p:clrMapOvr>
+</p:sld>
+</file>
+
+<file path=ppt/slides/slide5.xml><?xml version="1.0" encoding="utf-8"?>
+<p:sld xmlns:a="http://schemas.openxmlformats.org/drawingml/2006/main" xmlns:r="http://schemas.openxmlformats.org/officeDocument/2006/relationships" xmlns:p="http://schemas.openxmlformats.org/presentationml/2006/main">
+  <p:cSld name="Slide 5">
     <p:bg>
       <p:bgPr>
         <a:solidFill>
@@ -1828,13 +2414,13 @@
         <p:spPr>
           <a:xfrm>
             <a:off x="0" y="0"/>
-            <a:ext cx="9144000" cy="54864"/>
-          </a:xfrm>
-          <a:prstGeom prst="rect">
-            <a:avLst/>
-          </a:prstGeom>
-          <a:solidFill>
-            <a:srgbClr val="2A9D8F"/>
+            <a:ext cx="109728" cy="5143500"/>
+          </a:xfrm>
+          <a:prstGeom prst="rect">
+            <a:avLst/>
+          </a:prstGeom>
+          <a:solidFill>
+            <a:srgbClr val="E9C46A"/>
           </a:solidFill>
           <a:ln/>
         </p:spPr>
@@ -1847,8 +2433,8 @@
         </p:nvSpPr>
         <p:spPr>
           <a:xfrm>
-            <a:off x="548640" y="457200"/>
-            <a:ext cx="8046720" cy="640080"/>
+            <a:off x="731520" y="457200"/>
+            <a:ext cx="7772400" cy="731520"/>
           </a:xfrm>
           <a:prstGeom prst="rect">
             <a:avLst/>
@@ -1864,7 +2450,7 @@
               <a:buNone/>
             </a:pPr>
             <a:r>
-              <a:rPr lang="en-US" sz="2800" b="1" dirty="0">
+              <a:rPr lang="en-US" sz="3200" b="1" dirty="0">
                 <a:solidFill>
                   <a:srgbClr val="FFFFFF"/>
                 </a:solidFill>
@@ -1874,7 +2460,7 @@
               </a:rPr>
               <a:t>Key Takeaways</a:t>
             </a:r>
-            <a:endParaRPr lang="en-US" sz="2800" dirty="0"/>
+            <a:endParaRPr lang="en-US" sz="3200" dirty="0"/>
           </a:p>
         </p:txBody>
       </p:sp>
@@ -1886,8 +2472,8 @@
         </p:nvSpPr>
         <p:spPr>
           <a:xfrm>
-            <a:off x="731520" y="1371600"/>
-            <a:ext cx="7680960" cy="3200400"/>
+            <a:off x="731520" y="1463040"/>
+            <a:ext cx="7772400" cy="3200400"/>
           </a:xfrm>
           <a:prstGeom prst="rect">
             <a:avLst/>
@@ -1907,7 +2493,7 @@
               <a:buChar char="•"/>
             </a:pPr>
             <a:r>
-              <a:rPr lang="en-US" sz="1600" dirty="0">
+              <a:rPr lang="en-US" sz="1500" dirty="0">
                 <a:solidFill>
                   <a:srgbClr val="CADCFC"/>
                 </a:solidFill>
@@ -1915,9 +2501,9 @@
                 <a:ea typeface="Calibri" pitchFamily="34" charset="-122"/>
                 <a:cs typeface="Calibri" pitchFamily="34" charset="-120"/>
               </a:rPr>
-              <a:t>Probability: 0 = impossible, 1 = certain</a:t>
-            </a:r>
-            <a:endParaRPr lang="en-US" sz="1600" dirty="0"/>
+              <a:t>Probability = favourable outcomes ÷ total outcomes</a:t>
+            </a:r>
+            <a:endParaRPr lang="en-US" sz="1500" dirty="0"/>
           </a:p>
           <a:p>
             <a:pPr marL="342900" indent="-342900">
@@ -1928,7 +2514,7 @@
               <a:buChar char="•"/>
             </a:pPr>
             <a:r>
-              <a:rPr lang="en-US" sz="1600" dirty="0">
+              <a:rPr lang="en-US" sz="1500" dirty="0">
                 <a:solidFill>
                   <a:srgbClr val="CADCFC"/>
                 </a:solidFill>
@@ -1936,9 +2522,9 @@
                 <a:ea typeface="Calibri" pitchFamily="34" charset="-122"/>
                 <a:cs typeface="Calibri" pitchFamily="34" charset="-120"/>
               </a:rPr>
-              <a:t>P(event) = favourable outcomes ÷ total outcomes</a:t>
-            </a:r>
-            <a:endParaRPr lang="en-US" sz="1600" dirty="0"/>
+              <a:t>Scale: 0 (impossible) to 1 (certain)</a:t>
+            </a:r>
+            <a:endParaRPr lang="en-US" sz="1500" dirty="0"/>
           </a:p>
           <a:p>
             <a:pPr marL="342900" indent="-342900">
@@ -1949,7 +2535,7 @@
               <a:buChar char="•"/>
             </a:pPr>
             <a:r>
-              <a:rPr lang="en-US" sz="1600" dirty="0">
+              <a:rPr lang="en-US" sz="1500" dirty="0">
                 <a:solidFill>
                   <a:srgbClr val="CADCFC"/>
                 </a:solidFill>
@@ -1957,9 +2543,9 @@
                 <a:ea typeface="Calibri" pitchFamily="34" charset="-122"/>
                 <a:cs typeface="Calibri" pitchFamily="34" charset="-120"/>
               </a:rPr>
-              <a:t>All probabilities add up to 1</a:t>
-            </a:r>
-            <a:endParaRPr lang="en-US" sz="1600" dirty="0"/>
+              <a:t>Express as fraction, decimal, or percentage</a:t>
+            </a:r>
+            <a:endParaRPr lang="en-US" sz="1500" dirty="0"/>
           </a:p>
           <a:p>
             <a:pPr marL="342900" indent="-342900">
@@ -1970,7 +2556,7 @@
               <a:buChar char="•"/>
             </a:pPr>
             <a:r>
-              <a:rPr lang="en-US" sz="1600" dirty="0">
+              <a:rPr lang="en-US" sz="1500" dirty="0">
                 <a:solidFill>
                   <a:srgbClr val="CADCFC"/>
                 </a:solidFill>
@@ -1978,9 +2564,30 @@
                 <a:ea typeface="Calibri" pitchFamily="34" charset="-122"/>
                 <a:cs typeface="Calibri" pitchFamily="34" charset="-120"/>
               </a:rPr>
-              <a:t>P(not happening) = 1 - P(happening)</a:t>
-            </a:r>
-            <a:endParaRPr lang="en-US" sz="1600" dirty="0"/>
+              <a:t>All probabilities of outcomes add to 1</a:t>
+            </a:r>
+            <a:endParaRPr lang="en-US" sz="1500" dirty="0"/>
+          </a:p>
+          <a:p>
+            <a:pPr marL="342900" indent="-342900">
+              <a:spcAft>
+                <a:spcPts val="1000"/>
+              </a:spcAft>
+              <a:buSzPct val="100000"/>
+              <a:buChar char="•"/>
+            </a:pPr>
+            <a:r>
+              <a:rPr lang="en-US" sz="1500" dirty="0">
+                <a:solidFill>
+                  <a:srgbClr val="CADCFC"/>
+                </a:solidFill>
+                <a:latin typeface="Calibri" pitchFamily="34" charset="0"/>
+                <a:ea typeface="Calibri" pitchFamily="34" charset="-122"/>
+                <a:cs typeface="Calibri" pitchFamily="34" charset="-120"/>
+              </a:rPr>
+              <a:t>Fair = equally likely; biased = some more likely</a:t>
+            </a:r>
+            <a:endParaRPr lang="en-US" sz="1500" dirty="0"/>
           </a:p>
         </p:txBody>
       </p:sp>
@@ -1992,8 +2599,8 @@
         </p:nvSpPr>
         <p:spPr>
           <a:xfrm>
-            <a:off x="548640" y="4572000"/>
-            <a:ext cx="3657600" cy="274320"/>
+            <a:off x="731520" y="4572000"/>
+            <a:ext cx="7772400" cy="365760"/>
           </a:xfrm>
           <a:prstGeom prst="rect">
             <a:avLst/>
@@ -2009,14 +2616,17 @@
               <a:buNone/>
             </a:pPr>
             <a:r>
-              <a:rPr lang="en-US" sz="1000" dirty="0">
-                <a:solidFill>
-                  <a:srgbClr val="6B6660"/>
-                </a:solidFill>
+              <a:rPr lang="en-US" sz="1100" dirty="0">
+                <a:solidFill>
+                  <a:srgbClr val="E9C46A"/>
+                </a:solidFill>
+                <a:latin typeface="Calibri" pitchFamily="34" charset="0"/>
+                <a:ea typeface="Calibri" pitchFamily="34" charset="-122"/>
+                <a:cs typeface="Calibri" pitchFamily="34" charset="-120"/>
               </a:rPr>
               <a:t>mrzocchi.com</a:t>
             </a:r>
-            <a:endParaRPr lang="en-US" sz="1000" dirty="0"/>
+            <a:endParaRPr lang="en-US" sz="1100" dirty="0"/>
           </a:p>
         </p:txBody>
       </p:sp>

--- a/static/ppts/G6_Math_T5_Probability_Basics.pptx
+++ b/static/ppts/G6_Math_T5_Probability_Basics.pptx
@@ -10,9 +10,11 @@
     <p:sldId id="258" r:id="rId4"/>
     <p:sldId id="259" r:id="rId5"/>
     <p:sldId id="260" r:id="rId6"/>
+    <p:sldId id="261" r:id="rId7"/>
+    <p:sldId id="262" r:id="rId8"/>
   </p:sldIdLst>
   <p:notesMasterIdLst>
-    <p:notesMasterId r:id="rId7"/>
+    <p:notesMasterId r:id="rId9"/>
   </p:notesMasterIdLst>
   <p:sldSz cx="9144000" cy="5143500"/>
   <p:notesSz cx="5143500" cy="9144000"/>
@@ -900,6 +902,182 @@
 </p:notes>
 </file>
 
+<file path=ppt/notesSlides/notesSlide6.xml><?xml version="1.0" encoding="utf-8"?>
+<p:notes xmlns:a="http://schemas.openxmlformats.org/drawingml/2006/main" xmlns:r="http://schemas.openxmlformats.org/officeDocument/2006/relationships" xmlns:p="http://schemas.openxmlformats.org/presentationml/2006/main">
+  <p:cSld>
+    <p:spTree>
+      <p:nvGrpSpPr>
+        <p:cNvPr id="1" name=""/>
+        <p:cNvGrpSpPr/>
+        <p:nvPr/>
+      </p:nvGrpSpPr>
+      <p:grpSpPr>
+        <a:xfrm>
+          <a:off x="0" y="0"/>
+          <a:ext cx="0" cy="0"/>
+          <a:chOff x="0" y="0"/>
+          <a:chExt cx="0" cy="0"/>
+        </a:xfrm>
+      </p:grpSpPr>
+      <p:sp>
+        <p:nvSpPr>
+          <p:cNvPr id="2" name="Slide Image Placeholder 1"/>
+          <p:cNvSpPr>
+            <a:spLocks noGrp="1" noRot="1" noChangeAspect="1"/>
+          </p:cNvSpPr>
+          <p:nvPr>
+            <p:ph type="sldImg"/>
+          </p:nvPr>
+        </p:nvSpPr>
+        <p:spPr/>
+      </p:sp>
+      <p:sp>
+        <p:nvSpPr>
+          <p:cNvPr id="3" name="Notes Placeholder 2"/>
+          <p:cNvSpPr>
+            <a:spLocks noGrp="1"/>
+          </p:cNvSpPr>
+          <p:nvPr>
+            <p:ph type="body" idx="1"/>
+          </p:nvPr>
+        </p:nvSpPr>
+        <p:spPr/>
+        <p:txBody>
+          <a:bodyPr/>
+          <a:lstStyle/>
+          <a:p>
+            <a:r>
+              <a:rPr lang="en-US" dirty="0"/>
+              <a:t/>
+            </a:r>
+            <a:endParaRPr lang="en-US" dirty="0"/>
+          </a:p>
+        </p:txBody>
+      </p:sp>
+      <p:sp>
+        <p:nvSpPr>
+          <p:cNvPr id="4" name="Slide Number Placeholder 3"/>
+          <p:cNvSpPr>
+            <a:spLocks noGrp="1"/>
+          </p:cNvSpPr>
+          <p:nvPr>
+            <p:ph type="sldNum" sz="quarter" idx="10"/>
+          </p:nvPr>
+        </p:nvSpPr>
+        <p:spPr/>
+        <p:txBody>
+          <a:bodyPr/>
+          <a:lstStyle/>
+          <a:p>
+            <a:fld id="{F7021451-1387-4CA6-816F-3879F97B5CBC}" type="slidenum">
+              <a:rPr lang="en-US"/>
+              <a:t>6</a:t>
+            </a:fld>
+            <a:endParaRPr lang="en-US"/>
+          </a:p>
+        </p:txBody>
+      </p:sp>
+    </p:spTree>
+    <p:extLst>
+      <p:ext uri="{BB962C8B-B14F-4D97-AF65-F5344CB8AC3E}">
+        <p14:creationId xmlns:p14="http://schemas.microsoft.com/office/powerpoint/2010/main" val="1024086991"/>
+      </p:ext>
+    </p:extLst>
+  </p:cSld>
+  <p:clrMapOvr>
+    <a:masterClrMapping/>
+  </p:clrMapOvr>
+</p:notes>
+</file>
+
+<file path=ppt/notesSlides/notesSlide7.xml><?xml version="1.0" encoding="utf-8"?>
+<p:notes xmlns:a="http://schemas.openxmlformats.org/drawingml/2006/main" xmlns:r="http://schemas.openxmlformats.org/officeDocument/2006/relationships" xmlns:p="http://schemas.openxmlformats.org/presentationml/2006/main">
+  <p:cSld>
+    <p:spTree>
+      <p:nvGrpSpPr>
+        <p:cNvPr id="1" name=""/>
+        <p:cNvGrpSpPr/>
+        <p:nvPr/>
+      </p:nvGrpSpPr>
+      <p:grpSpPr>
+        <a:xfrm>
+          <a:off x="0" y="0"/>
+          <a:ext cx="0" cy="0"/>
+          <a:chOff x="0" y="0"/>
+          <a:chExt cx="0" cy="0"/>
+        </a:xfrm>
+      </p:grpSpPr>
+      <p:sp>
+        <p:nvSpPr>
+          <p:cNvPr id="2" name="Slide Image Placeholder 1"/>
+          <p:cNvSpPr>
+            <a:spLocks noGrp="1" noRot="1" noChangeAspect="1"/>
+          </p:cNvSpPr>
+          <p:nvPr>
+            <p:ph type="sldImg"/>
+          </p:nvPr>
+        </p:nvSpPr>
+        <p:spPr/>
+      </p:sp>
+      <p:sp>
+        <p:nvSpPr>
+          <p:cNvPr id="3" name="Notes Placeholder 2"/>
+          <p:cNvSpPr>
+            <a:spLocks noGrp="1"/>
+          </p:cNvSpPr>
+          <p:nvPr>
+            <p:ph type="body" idx="1"/>
+          </p:nvPr>
+        </p:nvSpPr>
+        <p:spPr/>
+        <p:txBody>
+          <a:bodyPr/>
+          <a:lstStyle/>
+          <a:p>
+            <a:r>
+              <a:rPr lang="en-US" dirty="0"/>
+              <a:t/>
+            </a:r>
+            <a:endParaRPr lang="en-US" dirty="0"/>
+          </a:p>
+        </p:txBody>
+      </p:sp>
+      <p:sp>
+        <p:nvSpPr>
+          <p:cNvPr id="4" name="Slide Number Placeholder 3"/>
+          <p:cNvSpPr>
+            <a:spLocks noGrp="1"/>
+          </p:cNvSpPr>
+          <p:nvPr>
+            <p:ph type="sldNum" sz="quarter" idx="10"/>
+          </p:nvPr>
+        </p:nvSpPr>
+        <p:spPr/>
+        <p:txBody>
+          <a:bodyPr/>
+          <a:lstStyle/>
+          <a:p>
+            <a:fld id="{F7021451-1387-4CA6-816F-3879F97B5CBC}" type="slidenum">
+              <a:rPr lang="en-US"/>
+              <a:t>7</a:t>
+            </a:fld>
+            <a:endParaRPr lang="en-US"/>
+          </a:p>
+        </p:txBody>
+      </p:sp>
+    </p:spTree>
+    <p:extLst>
+      <p:ext uri="{BB962C8B-B14F-4D97-AF65-F5344CB8AC3E}">
+        <p14:creationId xmlns:p14="http://schemas.microsoft.com/office/powerpoint/2010/main" val="1024086991"/>
+      </p:ext>
+    </p:extLst>
+  </p:cSld>
+  <p:clrMapOvr>
+    <a:masterClrMapping/>
+  </p:clrMapOvr>
+</p:notes>
+</file>
+
 <file path=ppt/slideLayouts/slideLayout1.xml><?xml version="1.0" encoding="utf-8"?>
 <p:sldLayout xmlns:a="http://schemas.openxmlformats.org/drawingml/2006/main" xmlns:r="http://schemas.openxmlformats.org/officeDocument/2006/relationships" xmlns:p="http://schemas.openxmlformats.org/presentationml/2006/main" preserve="1">
   <p:cSld name="DEFAULT">
@@ -1210,13 +1388,6 @@
 <file path=ppt/slides/slide1.xml><?xml version="1.0" encoding="utf-8"?>
 <p:sld xmlns:a="http://schemas.openxmlformats.org/drawingml/2006/main" xmlns:r="http://schemas.openxmlformats.org/officeDocument/2006/relationships" xmlns:p="http://schemas.openxmlformats.org/presentationml/2006/main">
   <p:cSld name="Slide 1">
-    <p:bg>
-      <p:bgPr>
-        <a:solidFill>
-          <a:srgbClr val="1B2A4A"/>
-        </a:solidFill>
-      </p:bgPr>
-    </p:bg>
     <p:spTree>
       <p:nvGrpSpPr>
         <p:cNvPr id="1" name=""/>
@@ -1240,7 +1411,27 @@
         <p:spPr>
           <a:xfrm>
             <a:off x="0" y="0"/>
-            <a:ext cx="109728" cy="5143500"/>
+            <a:ext cx="9144000" cy="5143500"/>
+          </a:xfrm>
+          <a:prstGeom prst="rect">
+            <a:avLst/>
+          </a:prstGeom>
+          <a:solidFill>
+            <a:srgbClr val="1B2A4A"/>
+          </a:solidFill>
+          <a:ln/>
+        </p:spPr>
+      </p:sp>
+      <p:sp>
+        <p:nvSpPr>
+          <p:cNvPr id="3" name="Shape 1"/>
+          <p:cNvSpPr/>
+          <p:nvPr/>
+        </p:nvSpPr>
+        <p:spPr>
+          <a:xfrm>
+            <a:off x="0" y="4777740"/>
+            <a:ext cx="9144000" cy="365760"/>
           </a:xfrm>
           <a:prstGeom prst="rect">
             <a:avLst/>
@@ -1253,14 +1444,36 @@
       </p:sp>
       <p:sp>
         <p:nvSpPr>
-          <p:cNvPr id="3" name="Text 1"/>
-          <p:cNvSpPr/>
-          <p:nvPr/>
-        </p:nvSpPr>
-        <p:spPr>
-          <a:xfrm>
-            <a:off x="731520" y="1097280"/>
-            <a:ext cx="7772400" cy="1371600"/>
+          <p:cNvPr id="4" name="Shape 2"/>
+          <p:cNvSpPr/>
+          <p:nvPr/>
+        </p:nvSpPr>
+        <p:spPr>
+          <a:xfrm>
+            <a:off x="6858000" y="-1371600"/>
+            <a:ext cx="4572000" cy="4572000"/>
+          </a:xfrm>
+          <a:prstGeom prst="ellipse">
+            <a:avLst/>
+          </a:prstGeom>
+          <a:solidFill>
+            <a:srgbClr val="2A9D8F">
+              <a:alpha val="12000"/>
+            </a:srgbClr>
+          </a:solidFill>
+          <a:ln/>
+        </p:spPr>
+      </p:sp>
+      <p:sp>
+        <p:nvSpPr>
+          <p:cNvPr id="5" name="Text 3"/>
+          <p:cNvSpPr/>
+          <p:nvPr/>
+        </p:nvSpPr>
+        <p:spPr>
+          <a:xfrm>
+            <a:off x="731520" y="914400"/>
+            <a:ext cx="7680960" cy="457200"/>
           </a:xfrm>
           <a:prstGeom prst="rect">
             <a:avLst/>
@@ -1276,7 +1489,46 @@
               <a:buNone/>
             </a:pPr>
             <a:r>
-              <a:rPr lang="en-US" sz="4000" b="1" dirty="0">
+              <a:rPr lang="en-US" sz="1300" b="1" spc="500" kern="0" dirty="0">
+                <a:solidFill>
+                  <a:srgbClr val="2A9D8F"/>
+                </a:solidFill>
+                <a:latin typeface="Calibri" pitchFamily="34" charset="0"/>
+                <a:ea typeface="Calibri" pitchFamily="34" charset="-122"/>
+                <a:cs typeface="Calibri" pitchFamily="34" charset="-120"/>
+              </a:rPr>
+              <a:t>GRADE 6 MATHEMATICS</a:t>
+            </a:r>
+            <a:endParaRPr lang="en-US" sz="1300" dirty="0"/>
+          </a:p>
+        </p:txBody>
+      </p:sp>
+      <p:sp>
+        <p:nvSpPr>
+          <p:cNvPr id="6" name="Text 4"/>
+          <p:cNvSpPr/>
+          <p:nvPr/>
+        </p:nvSpPr>
+        <p:spPr>
+          <a:xfrm>
+            <a:off x="731520" y="1463040"/>
+            <a:ext cx="6858000" cy="1645920"/>
+          </a:xfrm>
+          <a:prstGeom prst="rect">
+            <a:avLst/>
+          </a:prstGeom>
+          <a:noFill/>
+          <a:ln/>
+        </p:spPr>
+        <p:txBody>
+          <a:bodyPr wrap="square" rtlCol="0" anchor="t"/>
+          <a:lstStyle/>
+          <a:p>
+            <a:pPr indent="0" marL="0">
+              <a:buNone/>
+            </a:pPr>
+            <a:r>
+              <a:rPr lang="en-US" sz="3800" b="1" dirty="0">
                 <a:solidFill>
                   <a:srgbClr val="FFFFFF"/>
                 </a:solidFill>
@@ -1284,46 +1536,63 @@
                 <a:ea typeface="Georgia" pitchFamily="34" charset="-122"/>
                 <a:cs typeface="Georgia" pitchFamily="34" charset="-120"/>
               </a:rPr>
-              <a:t>Introduction to Probability</a:t>
-            </a:r>
-            <a:endParaRPr lang="en-US" sz="4000" dirty="0"/>
-          </a:p>
-        </p:txBody>
-      </p:sp>
-      <p:sp>
-        <p:nvSpPr>
-          <p:cNvPr id="4" name="Text 2"/>
-          <p:cNvSpPr/>
-          <p:nvPr/>
-        </p:nvSpPr>
-        <p:spPr>
-          <a:xfrm>
-            <a:off x="731520" y="2560320"/>
-            <a:ext cx="7772400" cy="548640"/>
-          </a:xfrm>
-          <a:prstGeom prst="rect">
-            <a:avLst/>
-          </a:prstGeom>
-          <a:noFill/>
-          <a:ln/>
-        </p:spPr>
-        <p:txBody>
-          <a:bodyPr wrap="square" rtlCol="0" anchor="ctr"/>
-          <a:lstStyle/>
+              <a:t>Introduction to</a:t>
+            </a:r>
+            <a:endParaRPr lang="en-US" sz="3800" dirty="0"/>
+          </a:p>
           <a:p>
             <a:pPr indent="0" marL="0">
               <a:buNone/>
             </a:pPr>
             <a:r>
-              <a:rPr lang="en-US" sz="1600" dirty="0">
-                <a:solidFill>
-                  <a:srgbClr val="E9C46A"/>
+              <a:rPr lang="en-US" sz="3800" b="1" dirty="0">
+                <a:solidFill>
+                  <a:srgbClr val="FFFFFF"/>
+                </a:solidFill>
+                <a:latin typeface="Georgia" pitchFamily="34" charset="0"/>
+                <a:ea typeface="Georgia" pitchFamily="34" charset="-122"/>
+                <a:cs typeface="Georgia" pitchFamily="34" charset="-120"/>
+              </a:rPr>
+              <a:t>Probability</a:t>
+            </a:r>
+            <a:endParaRPr lang="en-US" sz="3800" dirty="0"/>
+          </a:p>
+        </p:txBody>
+      </p:sp>
+      <p:sp>
+        <p:nvSpPr>
+          <p:cNvPr id="7" name="Text 5"/>
+          <p:cNvSpPr/>
+          <p:nvPr/>
+        </p:nvSpPr>
+        <p:spPr>
+          <a:xfrm>
+            <a:off x="731520" y="3200400"/>
+            <a:ext cx="6400800" cy="548640"/>
+          </a:xfrm>
+          <a:prstGeom prst="rect">
+            <a:avLst/>
+          </a:prstGeom>
+          <a:noFill/>
+          <a:ln/>
+        </p:spPr>
+        <p:txBody>
+          <a:bodyPr wrap="square" rtlCol="0" anchor="ctr"/>
+          <a:lstStyle/>
+          <a:p>
+            <a:pPr indent="0" marL="0">
+              <a:buNone/>
+            </a:pPr>
+            <a:r>
+              <a:rPr lang="en-US" sz="1600" i="1" dirty="0">
+                <a:solidFill>
+                  <a:srgbClr val="9B9690"/>
                 </a:solidFill>
                 <a:latin typeface="Calibri" pitchFamily="34" charset="0"/>
                 <a:ea typeface="Calibri" pitchFamily="34" charset="-122"/>
                 <a:cs typeface="Calibri" pitchFamily="34" charset="-120"/>
               </a:rPr>
-              <a:t>Grade 6 Mathematics · Mr Zocchi</a:t>
+              <a:t>How likely is it to happen?</a:t>
             </a:r>
             <a:endParaRPr lang="en-US" sz="1600" dirty="0"/>
           </a:p>
@@ -1331,36 +1600,14 @@
       </p:sp>
       <p:sp>
         <p:nvSpPr>
-          <p:cNvPr id="5" name="Shape 3"/>
-          <p:cNvSpPr/>
-          <p:nvPr/>
-        </p:nvSpPr>
-        <p:spPr>
-          <a:xfrm>
-            <a:off x="731520" y="3474720"/>
-            <a:ext cx="2011680" cy="411480"/>
-          </a:xfrm>
-          <a:prstGeom prst="roundRect">
-            <a:avLst>
-              <a:gd name="adj" fmla="val 17778"/>
-            </a:avLst>
-          </a:prstGeom>
-          <a:solidFill>
-            <a:srgbClr val="2A9D8F"/>
-          </a:solidFill>
-          <a:ln/>
-        </p:spPr>
-      </p:sp>
-      <p:sp>
-        <p:nvSpPr>
-          <p:cNvPr id="6" name="Text 4"/>
-          <p:cNvSpPr/>
-          <p:nvPr/>
-        </p:nvSpPr>
-        <p:spPr>
-          <a:xfrm>
-            <a:off x="731520" y="3474720"/>
-            <a:ext cx="2011680" cy="411480"/>
+          <p:cNvPr id="8" name="Text 6"/>
+          <p:cNvSpPr/>
+          <p:nvPr/>
+        </p:nvSpPr>
+        <p:spPr>
+          <a:xfrm>
+            <a:off x="731520" y="4297680"/>
+            <a:ext cx="2743200" cy="365760"/>
           </a:xfrm>
           <a:prstGeom prst="rect">
             <a:avLst/>
@@ -1372,21 +1619,21 @@
           <a:bodyPr wrap="square" rtlCol="0" anchor="ctr"/>
           <a:lstStyle/>
           <a:p>
-            <a:pPr algn="ctr" indent="0" marL="0">
+            <a:pPr indent="0" marL="0">
               <a:buNone/>
             </a:pPr>
             <a:r>
-              <a:rPr lang="en-US" sz="1200" b="1" dirty="0">
-                <a:solidFill>
-                  <a:srgbClr val="FFFFFF"/>
+              <a:rPr lang="en-US" sz="1100" dirty="0">
+                <a:solidFill>
+                  <a:srgbClr val="9B9690"/>
                 </a:solidFill>
                 <a:latin typeface="Calibri" pitchFamily="34" charset="0"/>
                 <a:ea typeface="Calibri" pitchFamily="34" charset="-122"/>
                 <a:cs typeface="Calibri" pitchFamily="34" charset="-120"/>
               </a:rPr>
-              <a:t>Term 5 · Probability &amp; Statistics</a:t>
-            </a:r>
-            <a:endParaRPr lang="en-US" sz="1200" dirty="0"/>
+              <a:t>mrzocchi.com</a:t>
+            </a:r>
+            <a:endParaRPr lang="en-US" sz="1100" dirty="0"/>
           </a:p>
         </p:txBody>
       </p:sp>
@@ -1431,7 +1678,47 @@
         <p:spPr>
           <a:xfrm>
             <a:off x="0" y="0"/>
-            <a:ext cx="9144000" cy="54864"/>
+            <a:ext cx="9144000" cy="822960"/>
+          </a:xfrm>
+          <a:prstGeom prst="rect">
+            <a:avLst/>
+          </a:prstGeom>
+          <a:solidFill>
+            <a:srgbClr val="FFFFFF"/>
+          </a:solidFill>
+          <a:ln/>
+        </p:spPr>
+      </p:sp>
+      <p:sp>
+        <p:nvSpPr>
+          <p:cNvPr id="3" name="Shape 1"/>
+          <p:cNvSpPr/>
+          <p:nvPr/>
+        </p:nvSpPr>
+        <p:spPr>
+          <a:xfrm>
+            <a:off x="0" y="804672"/>
+            <a:ext cx="9144000" cy="27432"/>
+          </a:xfrm>
+          <a:prstGeom prst="rect">
+            <a:avLst/>
+          </a:prstGeom>
+          <a:solidFill>
+            <a:srgbClr val="E5E2DC"/>
+          </a:solidFill>
+          <a:ln/>
+        </p:spPr>
+      </p:sp>
+      <p:sp>
+        <p:nvSpPr>
+          <p:cNvPr id="4" name="Shape 2"/>
+          <p:cNvSpPr/>
+          <p:nvPr/>
+        </p:nvSpPr>
+        <p:spPr>
+          <a:xfrm>
+            <a:off x="548640" y="201168"/>
+            <a:ext cx="54864" cy="420624"/>
           </a:xfrm>
           <a:prstGeom prst="rect">
             <a:avLst/>
@@ -1444,14 +1731,14 @@
       </p:sp>
       <p:sp>
         <p:nvSpPr>
-          <p:cNvPr id="3" name="Text 1"/>
-          <p:cNvSpPr/>
-          <p:nvPr/>
-        </p:nvSpPr>
-        <p:spPr>
-          <a:xfrm>
-            <a:off x="7772400" y="4709160"/>
-            <a:ext cx="1097280" cy="320040"/>
+          <p:cNvPr id="5" name="Text 3"/>
+          <p:cNvSpPr/>
+          <p:nvPr/>
+        </p:nvSpPr>
+        <p:spPr>
+          <a:xfrm>
+            <a:off x="777240" y="137160"/>
+            <a:ext cx="7772400" cy="548640"/>
           </a:xfrm>
           <a:prstGeom prst="rect">
             <a:avLst/>
@@ -1460,37 +1747,37 @@
           <a:ln/>
         </p:spPr>
         <p:txBody>
-          <a:bodyPr wrap="square" rtlCol="0" anchor="ctr"/>
-          <a:lstStyle/>
-          <a:p>
-            <a:pPr algn="r" indent="0" marL="0">
+          <a:bodyPr wrap="square" lIns="0" tIns="0" rIns="0" bIns="0" rtlCol="0" anchor="ctr"/>
+          <a:lstStyle/>
+          <a:p>
+            <a:pPr indent="0" marL="0">
               <a:buNone/>
             </a:pPr>
             <a:r>
-              <a:rPr lang="en-US" sz="900" dirty="0">
-                <a:solidFill>
-                  <a:srgbClr val="6B6660"/>
-                </a:solidFill>
-                <a:latin typeface="Calibri" pitchFamily="34" charset="0"/>
-                <a:ea typeface="Calibri" pitchFamily="34" charset="-122"/>
-                <a:cs typeface="Calibri" pitchFamily="34" charset="-120"/>
-              </a:rPr>
-              <a:t>2 / 5</a:t>
-            </a:r>
-            <a:endParaRPr lang="en-US" sz="900" dirty="0"/>
-          </a:p>
-        </p:txBody>
-      </p:sp>
-      <p:sp>
-        <p:nvSpPr>
-          <p:cNvPr id="4" name="Shape 2"/>
-          <p:cNvSpPr/>
-          <p:nvPr/>
-        </p:nvSpPr>
-        <p:spPr>
-          <a:xfrm>
-            <a:off x="1371600" y="914400"/>
-            <a:ext cx="6400800" cy="3200400"/>
+              <a:rPr lang="en-US" sz="2000" b="1" dirty="0">
+                <a:solidFill>
+                  <a:srgbClr val="1B2A4A"/>
+                </a:solidFill>
+                <a:latin typeface="Georgia" pitchFamily="34" charset="0"/>
+                <a:ea typeface="Georgia" pitchFamily="34" charset="-122"/>
+                <a:cs typeface="Georgia" pitchFamily="34" charset="-120"/>
+              </a:rPr>
+              <a:t>Key Vocabulary</a:t>
+            </a:r>
+            <a:endParaRPr lang="en-US" sz="2000" dirty="0"/>
+          </a:p>
+        </p:txBody>
+      </p:sp>
+      <p:sp>
+        <p:nvSpPr>
+          <p:cNvPr id="6" name="Shape 4"/>
+          <p:cNvSpPr/>
+          <p:nvPr/>
+        </p:nvSpPr>
+        <p:spPr>
+          <a:xfrm>
+            <a:off x="731520" y="1051560"/>
+            <a:ext cx="3657600" cy="658368"/>
           </a:xfrm>
           <a:prstGeom prst="rect">
             <a:avLst/>
@@ -1498,12 +1785,7 @@
           <a:solidFill>
             <a:srgbClr val="FFFFFF"/>
           </a:solidFill>
-          <a:ln w="12700">
-            <a:solidFill>
-              <a:srgbClr val="E5E2DC"/>
-            </a:solidFill>
-            <a:prstDash val="solid"/>
-          </a:ln>
+          <a:ln/>
           <a:effectLst>
             <a:outerShdw sx="100000" sy="100000" kx="0" ky="0" algn="bl" rotWithShape="0" blurRad="50800" dist="25400" dir="8100000">
               <a:srgbClr val="000000">
@@ -1515,14 +1797,14 @@
       </p:sp>
       <p:sp>
         <p:nvSpPr>
-          <p:cNvPr id="5" name="Shape 3"/>
-          <p:cNvSpPr/>
-          <p:nvPr/>
-        </p:nvSpPr>
-        <p:spPr>
-          <a:xfrm>
-            <a:off x="1371600" y="914400"/>
-            <a:ext cx="91440" cy="3200400"/>
+          <p:cNvPr id="7" name="Shape 5"/>
+          <p:cNvSpPr/>
+          <p:nvPr/>
+        </p:nvSpPr>
+        <p:spPr>
+          <a:xfrm>
+            <a:off x="731520" y="1051560"/>
+            <a:ext cx="54864" cy="658368"/>
           </a:xfrm>
           <a:prstGeom prst="rect">
             <a:avLst/>
@@ -1535,14 +1817,14 @@
       </p:sp>
       <p:sp>
         <p:nvSpPr>
-          <p:cNvPr id="6" name="Text 4"/>
-          <p:cNvSpPr/>
-          <p:nvPr/>
-        </p:nvSpPr>
-        <p:spPr>
-          <a:xfrm>
-            <a:off x="1828800" y="1097280"/>
-            <a:ext cx="5669280" cy="640080"/>
+          <p:cNvPr id="8" name="Text 6"/>
+          <p:cNvSpPr/>
+          <p:nvPr/>
+        </p:nvSpPr>
+        <p:spPr>
+          <a:xfrm>
+            <a:off x="914400" y="1051560"/>
+            <a:ext cx="1463040" cy="658368"/>
           </a:xfrm>
           <a:prstGeom prst="rect">
             <a:avLst/>
@@ -1551,14 +1833,14 @@
           <a:ln/>
         </p:spPr>
         <p:txBody>
-          <a:bodyPr wrap="square" rtlCol="0" anchor="ctr"/>
+          <a:bodyPr wrap="square" lIns="0" tIns="0" rIns="0" bIns="0" rtlCol="0" anchor="ctr"/>
           <a:lstStyle/>
           <a:p>
             <a:pPr indent="0" marL="0">
               <a:buNone/>
             </a:pPr>
             <a:r>
-              <a:rPr lang="en-US" sz="2400" b="1" dirty="0">
+              <a:rPr lang="en-US" sz="1300" b="1" dirty="0">
                 <a:solidFill>
                   <a:srgbClr val="1B2A4A"/>
                 </a:solidFill>
@@ -1566,22 +1848,22 @@
                 <a:ea typeface="Georgia" pitchFamily="34" charset="-122"/>
                 <a:cs typeface="Georgia" pitchFamily="34" charset="-120"/>
               </a:rPr>
-              <a:t>How Likely Is It?</a:t>
-            </a:r>
-            <a:endParaRPr lang="en-US" sz="2400" dirty="0"/>
-          </a:p>
-        </p:txBody>
-      </p:sp>
-      <p:sp>
-        <p:nvSpPr>
-          <p:cNvPr id="7" name="Text 5"/>
-          <p:cNvSpPr/>
-          <p:nvPr/>
-        </p:nvSpPr>
-        <p:spPr>
-          <a:xfrm>
-            <a:off x="1828800" y="1828800"/>
-            <a:ext cx="5669280" cy="2011680"/>
+              <a:t>Probability</a:t>
+            </a:r>
+            <a:endParaRPr lang="en-US" sz="1300" dirty="0"/>
+          </a:p>
+        </p:txBody>
+      </p:sp>
+      <p:sp>
+        <p:nvSpPr>
+          <p:cNvPr id="9" name="Text 7"/>
+          <p:cNvSpPr/>
+          <p:nvPr/>
+        </p:nvSpPr>
+        <p:spPr>
+          <a:xfrm>
+            <a:off x="2377440" y="1051560"/>
+            <a:ext cx="1920240" cy="658368"/>
           </a:xfrm>
           <a:prstGeom prst="rect">
             <a:avLst/>
@@ -1590,27 +1872,649 @@
           <a:ln/>
         </p:spPr>
         <p:txBody>
-          <a:bodyPr wrap="square" rtlCol="0" anchor="t"/>
+          <a:bodyPr wrap="square" lIns="0" tIns="0" rIns="0" bIns="0" rtlCol="0" anchor="ctr"/>
           <a:lstStyle/>
           <a:p>
             <a:pPr indent="0" marL="0">
-              <a:lnSpc>
-                <a:spcPct val="130000"/>
-              </a:lnSpc>
               <a:buNone/>
             </a:pPr>
             <a:r>
-              <a:rPr lang="en-US" sz="1500" dirty="0">
-                <a:solidFill>
-                  <a:srgbClr val="3D3A36"/>
+              <a:rPr lang="en-US" sz="1100" dirty="0">
+                <a:solidFill>
+                  <a:srgbClr val="6B6660"/>
                 </a:solidFill>
                 <a:latin typeface="Calibri" pitchFamily="34" charset="0"/>
                 <a:ea typeface="Calibri" pitchFamily="34" charset="-122"/>
                 <a:cs typeface="Calibri" pitchFamily="34" charset="-120"/>
               </a:rPr>
-              <a:t>Probability measures how likely an event is to happen. It is always between 0 (impossible) and 1 (certain). We can express probability as a fraction, decimal, or percentage. Example: the probability of flipping heads on a fair coin is ½ = 0.5 = 50%.</a:t>
-            </a:r>
-            <a:endParaRPr lang="en-US" sz="1500" dirty="0"/>
+              <a:t>How likely an event is to happen</a:t>
+            </a:r>
+            <a:endParaRPr lang="en-US" sz="1100" dirty="0"/>
+          </a:p>
+        </p:txBody>
+      </p:sp>
+      <p:sp>
+        <p:nvSpPr>
+          <p:cNvPr id="10" name="Shape 8"/>
+          <p:cNvSpPr/>
+          <p:nvPr/>
+        </p:nvSpPr>
+        <p:spPr>
+          <a:xfrm>
+            <a:off x="4754880" y="1051560"/>
+            <a:ext cx="3657600" cy="658368"/>
+          </a:xfrm>
+          <a:prstGeom prst="rect">
+            <a:avLst/>
+          </a:prstGeom>
+          <a:solidFill>
+            <a:srgbClr val="FFFFFF"/>
+          </a:solidFill>
+          <a:ln/>
+          <a:effectLst>
+            <a:outerShdw sx="100000" sy="100000" kx="0" ky="0" algn="bl" rotWithShape="0" blurRad="50800" dist="25400" dir="8100000">
+              <a:srgbClr val="000000">
+                <a:alpha val="10000"/>
+              </a:srgbClr>
+            </a:outerShdw>
+          </a:effectLst>
+        </p:spPr>
+      </p:sp>
+      <p:sp>
+        <p:nvSpPr>
+          <p:cNvPr id="11" name="Shape 9"/>
+          <p:cNvSpPr/>
+          <p:nvPr/>
+        </p:nvSpPr>
+        <p:spPr>
+          <a:xfrm>
+            <a:off x="4754880" y="1051560"/>
+            <a:ext cx="54864" cy="658368"/>
+          </a:xfrm>
+          <a:prstGeom prst="rect">
+            <a:avLst/>
+          </a:prstGeom>
+          <a:solidFill>
+            <a:srgbClr val="2A9D8F"/>
+          </a:solidFill>
+          <a:ln/>
+        </p:spPr>
+      </p:sp>
+      <p:sp>
+        <p:nvSpPr>
+          <p:cNvPr id="12" name="Text 10"/>
+          <p:cNvSpPr/>
+          <p:nvPr/>
+        </p:nvSpPr>
+        <p:spPr>
+          <a:xfrm>
+            <a:off x="4937760" y="1051560"/>
+            <a:ext cx="1463040" cy="658368"/>
+          </a:xfrm>
+          <a:prstGeom prst="rect">
+            <a:avLst/>
+          </a:prstGeom>
+          <a:noFill/>
+          <a:ln/>
+        </p:spPr>
+        <p:txBody>
+          <a:bodyPr wrap="square" lIns="0" tIns="0" rIns="0" bIns="0" rtlCol="0" anchor="ctr"/>
+          <a:lstStyle/>
+          <a:p>
+            <a:pPr indent="0" marL="0">
+              <a:buNone/>
+            </a:pPr>
+            <a:r>
+              <a:rPr lang="en-US" sz="1300" b="1" dirty="0">
+                <a:solidFill>
+                  <a:srgbClr val="1B2A4A"/>
+                </a:solidFill>
+                <a:latin typeface="Georgia" pitchFamily="34" charset="0"/>
+                <a:ea typeface="Georgia" pitchFamily="34" charset="-122"/>
+                <a:cs typeface="Georgia" pitchFamily="34" charset="-120"/>
+              </a:rPr>
+              <a:t>Event</a:t>
+            </a:r>
+            <a:endParaRPr lang="en-US" sz="1300" dirty="0"/>
+          </a:p>
+        </p:txBody>
+      </p:sp>
+      <p:sp>
+        <p:nvSpPr>
+          <p:cNvPr id="13" name="Text 11"/>
+          <p:cNvSpPr/>
+          <p:nvPr/>
+        </p:nvSpPr>
+        <p:spPr>
+          <a:xfrm>
+            <a:off x="6400800" y="1051560"/>
+            <a:ext cx="1920240" cy="658368"/>
+          </a:xfrm>
+          <a:prstGeom prst="rect">
+            <a:avLst/>
+          </a:prstGeom>
+          <a:noFill/>
+          <a:ln/>
+        </p:spPr>
+        <p:txBody>
+          <a:bodyPr wrap="square" lIns="0" tIns="0" rIns="0" bIns="0" rtlCol="0" anchor="ctr"/>
+          <a:lstStyle/>
+          <a:p>
+            <a:pPr indent="0" marL="0">
+              <a:buNone/>
+            </a:pPr>
+            <a:r>
+              <a:rPr lang="en-US" sz="1100" dirty="0">
+                <a:solidFill>
+                  <a:srgbClr val="6B6660"/>
+                </a:solidFill>
+                <a:latin typeface="Calibri" pitchFamily="34" charset="0"/>
+                <a:ea typeface="Calibri" pitchFamily="34" charset="-122"/>
+                <a:cs typeface="Calibri" pitchFamily="34" charset="-120"/>
+              </a:rPr>
+              <a:t>Something that might happen</a:t>
+            </a:r>
+            <a:endParaRPr lang="en-US" sz="1100" dirty="0"/>
+          </a:p>
+        </p:txBody>
+      </p:sp>
+      <p:sp>
+        <p:nvSpPr>
+          <p:cNvPr id="14" name="Shape 12"/>
+          <p:cNvSpPr/>
+          <p:nvPr/>
+        </p:nvSpPr>
+        <p:spPr>
+          <a:xfrm>
+            <a:off x="731520" y="1819656"/>
+            <a:ext cx="3657600" cy="658368"/>
+          </a:xfrm>
+          <a:prstGeom prst="rect">
+            <a:avLst/>
+          </a:prstGeom>
+          <a:solidFill>
+            <a:srgbClr val="FFFFFF"/>
+          </a:solidFill>
+          <a:ln/>
+          <a:effectLst>
+            <a:outerShdw sx="100000" sy="100000" kx="0" ky="0" algn="bl" rotWithShape="0" blurRad="50800" dist="25400" dir="8100000">
+              <a:srgbClr val="000000">
+                <a:alpha val="10000"/>
+              </a:srgbClr>
+            </a:outerShdw>
+          </a:effectLst>
+        </p:spPr>
+      </p:sp>
+      <p:sp>
+        <p:nvSpPr>
+          <p:cNvPr id="15" name="Shape 13"/>
+          <p:cNvSpPr/>
+          <p:nvPr/>
+        </p:nvSpPr>
+        <p:spPr>
+          <a:xfrm>
+            <a:off x="731520" y="1819656"/>
+            <a:ext cx="54864" cy="658368"/>
+          </a:xfrm>
+          <a:prstGeom prst="rect">
+            <a:avLst/>
+          </a:prstGeom>
+          <a:solidFill>
+            <a:srgbClr val="2A9D8F"/>
+          </a:solidFill>
+          <a:ln/>
+        </p:spPr>
+      </p:sp>
+      <p:sp>
+        <p:nvSpPr>
+          <p:cNvPr id="16" name="Text 14"/>
+          <p:cNvSpPr/>
+          <p:nvPr/>
+        </p:nvSpPr>
+        <p:spPr>
+          <a:xfrm>
+            <a:off x="914400" y="1819656"/>
+            <a:ext cx="1463040" cy="658368"/>
+          </a:xfrm>
+          <a:prstGeom prst="rect">
+            <a:avLst/>
+          </a:prstGeom>
+          <a:noFill/>
+          <a:ln/>
+        </p:spPr>
+        <p:txBody>
+          <a:bodyPr wrap="square" lIns="0" tIns="0" rIns="0" bIns="0" rtlCol="0" anchor="ctr"/>
+          <a:lstStyle/>
+          <a:p>
+            <a:pPr indent="0" marL="0">
+              <a:buNone/>
+            </a:pPr>
+            <a:r>
+              <a:rPr lang="en-US" sz="1300" b="1" dirty="0">
+                <a:solidFill>
+                  <a:srgbClr val="1B2A4A"/>
+                </a:solidFill>
+                <a:latin typeface="Georgia" pitchFamily="34" charset="0"/>
+                <a:ea typeface="Georgia" pitchFamily="34" charset="-122"/>
+                <a:cs typeface="Georgia" pitchFamily="34" charset="-120"/>
+              </a:rPr>
+              <a:t>Outcome</a:t>
+            </a:r>
+            <a:endParaRPr lang="en-US" sz="1300" dirty="0"/>
+          </a:p>
+        </p:txBody>
+      </p:sp>
+      <p:sp>
+        <p:nvSpPr>
+          <p:cNvPr id="17" name="Text 15"/>
+          <p:cNvSpPr/>
+          <p:nvPr/>
+        </p:nvSpPr>
+        <p:spPr>
+          <a:xfrm>
+            <a:off x="2377440" y="1819656"/>
+            <a:ext cx="1920240" cy="658368"/>
+          </a:xfrm>
+          <a:prstGeom prst="rect">
+            <a:avLst/>
+          </a:prstGeom>
+          <a:noFill/>
+          <a:ln/>
+        </p:spPr>
+        <p:txBody>
+          <a:bodyPr wrap="square" lIns="0" tIns="0" rIns="0" bIns="0" rtlCol="0" anchor="ctr"/>
+          <a:lstStyle/>
+          <a:p>
+            <a:pPr indent="0" marL="0">
+              <a:buNone/>
+            </a:pPr>
+            <a:r>
+              <a:rPr lang="en-US" sz="1100" dirty="0">
+                <a:solidFill>
+                  <a:srgbClr val="6B6660"/>
+                </a:solidFill>
+                <a:latin typeface="Calibri" pitchFamily="34" charset="0"/>
+                <a:ea typeface="Calibri" pitchFamily="34" charset="-122"/>
+                <a:cs typeface="Calibri" pitchFamily="34" charset="-120"/>
+              </a:rPr>
+              <a:t>A possible result</a:t>
+            </a:r>
+            <a:endParaRPr lang="en-US" sz="1100" dirty="0"/>
+          </a:p>
+        </p:txBody>
+      </p:sp>
+      <p:sp>
+        <p:nvSpPr>
+          <p:cNvPr id="18" name="Shape 16"/>
+          <p:cNvSpPr/>
+          <p:nvPr/>
+        </p:nvSpPr>
+        <p:spPr>
+          <a:xfrm>
+            <a:off x="4754880" y="1819656"/>
+            <a:ext cx="3657600" cy="658368"/>
+          </a:xfrm>
+          <a:prstGeom prst="rect">
+            <a:avLst/>
+          </a:prstGeom>
+          <a:solidFill>
+            <a:srgbClr val="FFFFFF"/>
+          </a:solidFill>
+          <a:ln/>
+          <a:effectLst>
+            <a:outerShdw sx="100000" sy="100000" kx="0" ky="0" algn="bl" rotWithShape="0" blurRad="50800" dist="25400" dir="8100000">
+              <a:srgbClr val="000000">
+                <a:alpha val="10000"/>
+              </a:srgbClr>
+            </a:outerShdw>
+          </a:effectLst>
+        </p:spPr>
+      </p:sp>
+      <p:sp>
+        <p:nvSpPr>
+          <p:cNvPr id="19" name="Shape 17"/>
+          <p:cNvSpPr/>
+          <p:nvPr/>
+        </p:nvSpPr>
+        <p:spPr>
+          <a:xfrm>
+            <a:off x="4754880" y="1819656"/>
+            <a:ext cx="54864" cy="658368"/>
+          </a:xfrm>
+          <a:prstGeom prst="rect">
+            <a:avLst/>
+          </a:prstGeom>
+          <a:solidFill>
+            <a:srgbClr val="2A9D8F"/>
+          </a:solidFill>
+          <a:ln/>
+        </p:spPr>
+      </p:sp>
+      <p:sp>
+        <p:nvSpPr>
+          <p:cNvPr id="20" name="Text 18"/>
+          <p:cNvSpPr/>
+          <p:nvPr/>
+        </p:nvSpPr>
+        <p:spPr>
+          <a:xfrm>
+            <a:off x="4937760" y="1819656"/>
+            <a:ext cx="1463040" cy="658368"/>
+          </a:xfrm>
+          <a:prstGeom prst="rect">
+            <a:avLst/>
+          </a:prstGeom>
+          <a:noFill/>
+          <a:ln/>
+        </p:spPr>
+        <p:txBody>
+          <a:bodyPr wrap="square" lIns="0" tIns="0" rIns="0" bIns="0" rtlCol="0" anchor="ctr"/>
+          <a:lstStyle/>
+          <a:p>
+            <a:pPr indent="0" marL="0">
+              <a:buNone/>
+            </a:pPr>
+            <a:r>
+              <a:rPr lang="en-US" sz="1300" b="1" dirty="0">
+                <a:solidFill>
+                  <a:srgbClr val="1B2A4A"/>
+                </a:solidFill>
+                <a:latin typeface="Georgia" pitchFamily="34" charset="0"/>
+                <a:ea typeface="Georgia" pitchFamily="34" charset="-122"/>
+                <a:cs typeface="Georgia" pitchFamily="34" charset="-120"/>
+              </a:rPr>
+              <a:t>Impossible</a:t>
+            </a:r>
+            <a:endParaRPr lang="en-US" sz="1300" dirty="0"/>
+          </a:p>
+        </p:txBody>
+      </p:sp>
+      <p:sp>
+        <p:nvSpPr>
+          <p:cNvPr id="21" name="Text 19"/>
+          <p:cNvSpPr/>
+          <p:nvPr/>
+        </p:nvSpPr>
+        <p:spPr>
+          <a:xfrm>
+            <a:off x="6400800" y="1819656"/>
+            <a:ext cx="1920240" cy="658368"/>
+          </a:xfrm>
+          <a:prstGeom prst="rect">
+            <a:avLst/>
+          </a:prstGeom>
+          <a:noFill/>
+          <a:ln/>
+        </p:spPr>
+        <p:txBody>
+          <a:bodyPr wrap="square" lIns="0" tIns="0" rIns="0" bIns="0" rtlCol="0" anchor="ctr"/>
+          <a:lstStyle/>
+          <a:p>
+            <a:pPr indent="0" marL="0">
+              <a:buNone/>
+            </a:pPr>
+            <a:r>
+              <a:rPr lang="en-US" sz="1100" dirty="0">
+                <a:solidFill>
+                  <a:srgbClr val="6B6660"/>
+                </a:solidFill>
+                <a:latin typeface="Calibri" pitchFamily="34" charset="0"/>
+                <a:ea typeface="Calibri" pitchFamily="34" charset="-122"/>
+                <a:cs typeface="Calibri" pitchFamily="34" charset="-120"/>
+              </a:rPr>
+              <a:t>Probability = 0 (cannot happen)</a:t>
+            </a:r>
+            <a:endParaRPr lang="en-US" sz="1100" dirty="0"/>
+          </a:p>
+        </p:txBody>
+      </p:sp>
+      <p:sp>
+        <p:nvSpPr>
+          <p:cNvPr id="22" name="Shape 20"/>
+          <p:cNvSpPr/>
+          <p:nvPr/>
+        </p:nvSpPr>
+        <p:spPr>
+          <a:xfrm>
+            <a:off x="731520" y="2587752"/>
+            <a:ext cx="3657600" cy="658368"/>
+          </a:xfrm>
+          <a:prstGeom prst="rect">
+            <a:avLst/>
+          </a:prstGeom>
+          <a:solidFill>
+            <a:srgbClr val="FFFFFF"/>
+          </a:solidFill>
+          <a:ln/>
+          <a:effectLst>
+            <a:outerShdw sx="100000" sy="100000" kx="0" ky="0" algn="bl" rotWithShape="0" blurRad="50800" dist="25400" dir="8100000">
+              <a:srgbClr val="000000">
+                <a:alpha val="10000"/>
+              </a:srgbClr>
+            </a:outerShdw>
+          </a:effectLst>
+        </p:spPr>
+      </p:sp>
+      <p:sp>
+        <p:nvSpPr>
+          <p:cNvPr id="23" name="Shape 21"/>
+          <p:cNvSpPr/>
+          <p:nvPr/>
+        </p:nvSpPr>
+        <p:spPr>
+          <a:xfrm>
+            <a:off x="731520" y="2587752"/>
+            <a:ext cx="54864" cy="658368"/>
+          </a:xfrm>
+          <a:prstGeom prst="rect">
+            <a:avLst/>
+          </a:prstGeom>
+          <a:solidFill>
+            <a:srgbClr val="2A9D8F"/>
+          </a:solidFill>
+          <a:ln/>
+        </p:spPr>
+      </p:sp>
+      <p:sp>
+        <p:nvSpPr>
+          <p:cNvPr id="24" name="Text 22"/>
+          <p:cNvSpPr/>
+          <p:nvPr/>
+        </p:nvSpPr>
+        <p:spPr>
+          <a:xfrm>
+            <a:off x="914400" y="2587752"/>
+            <a:ext cx="1463040" cy="658368"/>
+          </a:xfrm>
+          <a:prstGeom prst="rect">
+            <a:avLst/>
+          </a:prstGeom>
+          <a:noFill/>
+          <a:ln/>
+        </p:spPr>
+        <p:txBody>
+          <a:bodyPr wrap="square" lIns="0" tIns="0" rIns="0" bIns="0" rtlCol="0" anchor="ctr"/>
+          <a:lstStyle/>
+          <a:p>
+            <a:pPr indent="0" marL="0">
+              <a:buNone/>
+            </a:pPr>
+            <a:r>
+              <a:rPr lang="en-US" sz="1300" b="1" dirty="0">
+                <a:solidFill>
+                  <a:srgbClr val="1B2A4A"/>
+                </a:solidFill>
+                <a:latin typeface="Georgia" pitchFamily="34" charset="0"/>
+                <a:ea typeface="Georgia" pitchFamily="34" charset="-122"/>
+                <a:cs typeface="Georgia" pitchFamily="34" charset="-120"/>
+              </a:rPr>
+              <a:t>Certain</a:t>
+            </a:r>
+            <a:endParaRPr lang="en-US" sz="1300" dirty="0"/>
+          </a:p>
+        </p:txBody>
+      </p:sp>
+      <p:sp>
+        <p:nvSpPr>
+          <p:cNvPr id="25" name="Text 23"/>
+          <p:cNvSpPr/>
+          <p:nvPr/>
+        </p:nvSpPr>
+        <p:spPr>
+          <a:xfrm>
+            <a:off x="2377440" y="2587752"/>
+            <a:ext cx="1920240" cy="658368"/>
+          </a:xfrm>
+          <a:prstGeom prst="rect">
+            <a:avLst/>
+          </a:prstGeom>
+          <a:noFill/>
+          <a:ln/>
+        </p:spPr>
+        <p:txBody>
+          <a:bodyPr wrap="square" lIns="0" tIns="0" rIns="0" bIns="0" rtlCol="0" anchor="ctr"/>
+          <a:lstStyle/>
+          <a:p>
+            <a:pPr indent="0" marL="0">
+              <a:buNone/>
+            </a:pPr>
+            <a:r>
+              <a:rPr lang="en-US" sz="1100" dirty="0">
+                <a:solidFill>
+                  <a:srgbClr val="6B6660"/>
+                </a:solidFill>
+                <a:latin typeface="Calibri" pitchFamily="34" charset="0"/>
+                <a:ea typeface="Calibri" pitchFamily="34" charset="-122"/>
+                <a:cs typeface="Calibri" pitchFamily="34" charset="-120"/>
+              </a:rPr>
+              <a:t>Probability = 1 (must happen)</a:t>
+            </a:r>
+            <a:endParaRPr lang="en-US" sz="1100" dirty="0"/>
+          </a:p>
+        </p:txBody>
+      </p:sp>
+      <p:sp>
+        <p:nvSpPr>
+          <p:cNvPr id="26" name="Shape 24"/>
+          <p:cNvSpPr/>
+          <p:nvPr/>
+        </p:nvSpPr>
+        <p:spPr>
+          <a:xfrm>
+            <a:off x="4754880" y="2587752"/>
+            <a:ext cx="3657600" cy="658368"/>
+          </a:xfrm>
+          <a:prstGeom prst="rect">
+            <a:avLst/>
+          </a:prstGeom>
+          <a:solidFill>
+            <a:srgbClr val="FFFFFF"/>
+          </a:solidFill>
+          <a:ln/>
+          <a:effectLst>
+            <a:outerShdw sx="100000" sy="100000" kx="0" ky="0" algn="bl" rotWithShape="0" blurRad="50800" dist="25400" dir="8100000">
+              <a:srgbClr val="000000">
+                <a:alpha val="10000"/>
+              </a:srgbClr>
+            </a:outerShdw>
+          </a:effectLst>
+        </p:spPr>
+      </p:sp>
+      <p:sp>
+        <p:nvSpPr>
+          <p:cNvPr id="27" name="Shape 25"/>
+          <p:cNvSpPr/>
+          <p:nvPr/>
+        </p:nvSpPr>
+        <p:spPr>
+          <a:xfrm>
+            <a:off x="4754880" y="2587752"/>
+            <a:ext cx="54864" cy="658368"/>
+          </a:xfrm>
+          <a:prstGeom prst="rect">
+            <a:avLst/>
+          </a:prstGeom>
+          <a:solidFill>
+            <a:srgbClr val="2A9D8F"/>
+          </a:solidFill>
+          <a:ln/>
+        </p:spPr>
+      </p:sp>
+      <p:sp>
+        <p:nvSpPr>
+          <p:cNvPr id="28" name="Text 26"/>
+          <p:cNvSpPr/>
+          <p:nvPr/>
+        </p:nvSpPr>
+        <p:spPr>
+          <a:xfrm>
+            <a:off x="4937760" y="2587752"/>
+            <a:ext cx="1463040" cy="658368"/>
+          </a:xfrm>
+          <a:prstGeom prst="rect">
+            <a:avLst/>
+          </a:prstGeom>
+          <a:noFill/>
+          <a:ln/>
+        </p:spPr>
+        <p:txBody>
+          <a:bodyPr wrap="square" lIns="0" tIns="0" rIns="0" bIns="0" rtlCol="0" anchor="ctr"/>
+          <a:lstStyle/>
+          <a:p>
+            <a:pPr indent="0" marL="0">
+              <a:buNone/>
+            </a:pPr>
+            <a:r>
+              <a:rPr lang="en-US" sz="1300" b="1" dirty="0">
+                <a:solidFill>
+                  <a:srgbClr val="1B2A4A"/>
+                </a:solidFill>
+                <a:latin typeface="Georgia" pitchFamily="34" charset="0"/>
+                <a:ea typeface="Georgia" pitchFamily="34" charset="-122"/>
+                <a:cs typeface="Georgia" pitchFamily="34" charset="-120"/>
+              </a:rPr>
+              <a:t>Even chance</a:t>
+            </a:r>
+            <a:endParaRPr lang="en-US" sz="1300" dirty="0"/>
+          </a:p>
+        </p:txBody>
+      </p:sp>
+      <p:sp>
+        <p:nvSpPr>
+          <p:cNvPr id="29" name="Text 27"/>
+          <p:cNvSpPr/>
+          <p:nvPr/>
+        </p:nvSpPr>
+        <p:spPr>
+          <a:xfrm>
+            <a:off x="6400800" y="2587752"/>
+            <a:ext cx="1920240" cy="658368"/>
+          </a:xfrm>
+          <a:prstGeom prst="rect">
+            <a:avLst/>
+          </a:prstGeom>
+          <a:noFill/>
+          <a:ln/>
+        </p:spPr>
+        <p:txBody>
+          <a:bodyPr wrap="square" lIns="0" tIns="0" rIns="0" bIns="0" rtlCol="0" anchor="ctr"/>
+          <a:lstStyle/>
+          <a:p>
+            <a:pPr indent="0" marL="0">
+              <a:buNone/>
+            </a:pPr>
+            <a:r>
+              <a:rPr lang="en-US" sz="1100" dirty="0">
+                <a:solidFill>
+                  <a:srgbClr val="6B6660"/>
+                </a:solidFill>
+                <a:latin typeface="Calibri" pitchFamily="34" charset="0"/>
+                <a:ea typeface="Calibri" pitchFamily="34" charset="-122"/>
+                <a:cs typeface="Calibri" pitchFamily="34" charset="-120"/>
+              </a:rPr>
+              <a:t>Probability = ½ (equally likely)</a:t>
+            </a:r>
+            <a:endParaRPr lang="en-US" sz="1100" dirty="0"/>
           </a:p>
         </p:txBody>
       </p:sp>
@@ -1655,7 +2559,47 @@
         <p:spPr>
           <a:xfrm>
             <a:off x="0" y="0"/>
-            <a:ext cx="9144000" cy="54864"/>
+            <a:ext cx="9144000" cy="822960"/>
+          </a:xfrm>
+          <a:prstGeom prst="rect">
+            <a:avLst/>
+          </a:prstGeom>
+          <a:solidFill>
+            <a:srgbClr val="FFFFFF"/>
+          </a:solidFill>
+          <a:ln/>
+        </p:spPr>
+      </p:sp>
+      <p:sp>
+        <p:nvSpPr>
+          <p:cNvPr id="3" name="Shape 1"/>
+          <p:cNvSpPr/>
+          <p:nvPr/>
+        </p:nvSpPr>
+        <p:spPr>
+          <a:xfrm>
+            <a:off x="0" y="804672"/>
+            <a:ext cx="9144000" cy="27432"/>
+          </a:xfrm>
+          <a:prstGeom prst="rect">
+            <a:avLst/>
+          </a:prstGeom>
+          <a:solidFill>
+            <a:srgbClr val="E5E2DC"/>
+          </a:solidFill>
+          <a:ln/>
+        </p:spPr>
+      </p:sp>
+      <p:sp>
+        <p:nvSpPr>
+          <p:cNvPr id="4" name="Shape 2"/>
+          <p:cNvSpPr/>
+          <p:nvPr/>
+        </p:nvSpPr>
+        <p:spPr>
+          <a:xfrm>
+            <a:off x="548640" y="201168"/>
+            <a:ext cx="54864" cy="420624"/>
           </a:xfrm>
           <a:prstGeom prst="rect">
             <a:avLst/>
@@ -1668,14 +2612,14 @@
       </p:sp>
       <p:sp>
         <p:nvSpPr>
-          <p:cNvPr id="3" name="Text 1"/>
-          <p:cNvSpPr/>
-          <p:nvPr/>
-        </p:nvSpPr>
-        <p:spPr>
-          <a:xfrm>
-            <a:off x="7772400" y="4709160"/>
-            <a:ext cx="1097280" cy="320040"/>
+          <p:cNvPr id="5" name="Text 3"/>
+          <p:cNvSpPr/>
+          <p:nvPr/>
+        </p:nvSpPr>
+        <p:spPr>
+          <a:xfrm>
+            <a:off x="777240" y="137160"/>
+            <a:ext cx="7772400" cy="548640"/>
           </a:xfrm>
           <a:prstGeom prst="rect">
             <a:avLst/>
@@ -1684,96 +2628,78 @@
           <a:ln/>
         </p:spPr>
         <p:txBody>
-          <a:bodyPr wrap="square" rtlCol="0" anchor="ctr"/>
-          <a:lstStyle/>
-          <a:p>
-            <a:pPr algn="r" indent="0" marL="0">
+          <a:bodyPr wrap="square" lIns="0" tIns="0" rIns="0" bIns="0" rtlCol="0" anchor="ctr"/>
+          <a:lstStyle/>
+          <a:p>
+            <a:pPr indent="0" marL="0">
               <a:buNone/>
             </a:pPr>
             <a:r>
-              <a:rPr lang="en-US" sz="900" dirty="0">
-                <a:solidFill>
-                  <a:srgbClr val="6B6660"/>
+              <a:rPr lang="en-US" sz="2000" b="1" dirty="0">
+                <a:solidFill>
+                  <a:srgbClr val="1B2A4A"/>
+                </a:solidFill>
+                <a:latin typeface="Georgia" pitchFamily="34" charset="0"/>
+                <a:ea typeface="Georgia" pitchFamily="34" charset="-122"/>
+                <a:cs typeface="Georgia" pitchFamily="34" charset="-120"/>
+              </a:rPr>
+              <a:t>The Probability Scale</a:t>
+            </a:r>
+            <a:endParaRPr lang="en-US" sz="2000" dirty="0"/>
+          </a:p>
+        </p:txBody>
+      </p:sp>
+      <p:sp>
+        <p:nvSpPr>
+          <p:cNvPr id="6" name="Text 4"/>
+          <p:cNvSpPr/>
+          <p:nvPr/>
+        </p:nvSpPr>
+        <p:spPr>
+          <a:xfrm>
+            <a:off x="731520" y="1051560"/>
+            <a:ext cx="7680960" cy="3108960"/>
+          </a:xfrm>
+          <a:prstGeom prst="rect">
+            <a:avLst/>
+          </a:prstGeom>
+          <a:noFill/>
+          <a:ln/>
+        </p:spPr>
+        <p:txBody>
+          <a:bodyPr wrap="square" rtlCol="0" anchor="t"/>
+          <a:lstStyle/>
+          <a:p>
+            <a:pPr marL="342900" indent="-342900">
+              <a:spcAft>
+                <a:spcPts val="800"/>
+              </a:spcAft>
+              <a:buSzPct val="100000"/>
+              <a:buChar char="•"/>
+            </a:pPr>
+            <a:r>
+              <a:rPr lang="en-US" sz="1500" dirty="0">
+                <a:solidFill>
+                  <a:srgbClr val="3D3A36"/>
                 </a:solidFill>
                 <a:latin typeface="Calibri" pitchFamily="34" charset="0"/>
                 <a:ea typeface="Calibri" pitchFamily="34" charset="-122"/>
                 <a:cs typeface="Calibri" pitchFamily="34" charset="-120"/>
               </a:rPr>
-              <a:t>3 / 5</a:t>
-            </a:r>
-            <a:endParaRPr lang="en-US" sz="900" dirty="0"/>
-          </a:p>
-        </p:txBody>
-      </p:sp>
-      <p:sp>
-        <p:nvSpPr>
-          <p:cNvPr id="4" name="Text 2"/>
-          <p:cNvSpPr/>
-          <p:nvPr/>
-        </p:nvSpPr>
-        <p:spPr>
-          <a:xfrm>
-            <a:off x="457200" y="274320"/>
-            <a:ext cx="8229600" cy="640080"/>
-          </a:xfrm>
-          <a:prstGeom prst="rect">
-            <a:avLst/>
-          </a:prstGeom>
-          <a:noFill/>
-          <a:ln/>
-        </p:spPr>
-        <p:txBody>
-          <a:bodyPr wrap="square" rtlCol="0" anchor="ctr"/>
-          <a:lstStyle/>
-          <a:p>
-            <a:pPr indent="0" marL="0">
-              <a:buNone/>
-            </a:pPr>
-            <a:r>
-              <a:rPr lang="en-US" sz="2600" b="1" dirty="0">
-                <a:solidFill>
-                  <a:srgbClr val="1B2A4A"/>
-                </a:solidFill>
-                <a:latin typeface="Georgia" pitchFamily="34" charset="0"/>
-                <a:ea typeface="Georgia" pitchFamily="34" charset="-122"/>
-                <a:cs typeface="Georgia" pitchFamily="34" charset="-120"/>
-              </a:rPr>
-              <a:t>The Probability Scale</a:t>
-            </a:r>
-            <a:endParaRPr lang="en-US" sz="2600" dirty="0"/>
-          </a:p>
-        </p:txBody>
-      </p:sp>
-      <p:sp>
-        <p:nvSpPr>
-          <p:cNvPr id="5" name="Text 3"/>
-          <p:cNvSpPr/>
-          <p:nvPr/>
-        </p:nvSpPr>
-        <p:spPr>
-          <a:xfrm>
-            <a:off x="457200" y="1188720"/>
-            <a:ext cx="3840480" cy="3474720"/>
-          </a:xfrm>
-          <a:prstGeom prst="rect">
-            <a:avLst/>
-          </a:prstGeom>
-          <a:noFill/>
-          <a:ln/>
-        </p:spPr>
-        <p:txBody>
-          <a:bodyPr wrap="square" rtlCol="0" anchor="t"/>
-          <a:lstStyle/>
+              <a:t>Probability is measured on a scale from 0 to 1.</a:t>
+            </a:r>
+            <a:endParaRPr lang="en-US" sz="1500" dirty="0"/>
+          </a:p>
           <a:p>
             <a:pPr marL="342900" indent="-342900">
               <a:spcAft>
-                <a:spcPts val="600"/>
+                <a:spcPts val="800"/>
               </a:spcAft>
               <a:buSzPct val="100000"/>
               <a:buChar char="•"/>
             </a:pPr>
             <a:r>
-              <a:rPr lang="en-US" sz="1400" dirty="0">
+              <a:rPr lang="en-US" sz="1500" dirty="0">
                 <a:solidFill>
                   <a:srgbClr val="3D3A36"/>
                 </a:solidFill>
@@ -1781,20 +2707,20 @@
                 <a:ea typeface="Calibri" pitchFamily="34" charset="-122"/>
                 <a:cs typeface="Calibri" pitchFamily="34" charset="-120"/>
               </a:rPr>
-              <a:t>0 = impossible (rolling 7 on a normal die)</a:t>
-            </a:r>
-            <a:endParaRPr lang="en-US" sz="1400" dirty="0"/>
+              <a:t>0 = impossible (rolling a 7 on a normal dice).</a:t>
+            </a:r>
+            <a:endParaRPr lang="en-US" sz="1500" dirty="0"/>
           </a:p>
           <a:p>
             <a:pPr marL="342900" indent="-342900">
               <a:spcAft>
-                <a:spcPts val="600"/>
+                <a:spcPts val="800"/>
               </a:spcAft>
               <a:buSzPct val="100000"/>
               <a:buChar char="•"/>
             </a:pPr>
             <a:r>
-              <a:rPr lang="en-US" sz="1400" dirty="0">
+              <a:rPr lang="en-US" sz="1500" dirty="0">
                 <a:solidFill>
                   <a:srgbClr val="3D3A36"/>
                 </a:solidFill>
@@ -1802,20 +2728,20 @@
                 <a:ea typeface="Calibri" pitchFamily="34" charset="-122"/>
                 <a:cs typeface="Calibri" pitchFamily="34" charset="-120"/>
               </a:rPr>
-              <a:t>Low probability = unlikely (winning the lottery)</a:t>
-            </a:r>
-            <a:endParaRPr lang="en-US" sz="1400" dirty="0"/>
+              <a:t>½ = even chance (flipping heads on a fair coin).</a:t>
+            </a:r>
+            <a:endParaRPr lang="en-US" sz="1500" dirty="0"/>
           </a:p>
           <a:p>
             <a:pPr marL="342900" indent="-342900">
               <a:spcAft>
-                <a:spcPts val="600"/>
+                <a:spcPts val="800"/>
               </a:spcAft>
               <a:buSzPct val="100000"/>
               <a:buChar char="•"/>
             </a:pPr>
             <a:r>
-              <a:rPr lang="en-US" sz="1400" dirty="0">
+              <a:rPr lang="en-US" sz="1500" dirty="0">
                 <a:solidFill>
                   <a:srgbClr val="3D3A36"/>
                 </a:solidFill>
@@ -1823,20 +2749,20 @@
                 <a:ea typeface="Calibri" pitchFamily="34" charset="-122"/>
                 <a:cs typeface="Calibri" pitchFamily="34" charset="-120"/>
               </a:rPr>
-              <a:t>0.5 = even chance (flipping heads)</a:t>
-            </a:r>
-            <a:endParaRPr lang="en-US" sz="1400" dirty="0"/>
+              <a:t>1 = certain (the sun rising tomorrow).</a:t>
+            </a:r>
+            <a:endParaRPr lang="en-US" sz="1500" dirty="0"/>
           </a:p>
           <a:p>
             <a:pPr marL="342900" indent="-342900">
               <a:spcAft>
-                <a:spcPts val="600"/>
+                <a:spcPts val="800"/>
               </a:spcAft>
               <a:buSzPct val="100000"/>
               <a:buChar char="•"/>
             </a:pPr>
             <a:r>
-              <a:rPr lang="en-US" sz="1400" dirty="0">
+              <a:rPr lang="en-US" sz="1500" dirty="0">
                 <a:solidFill>
                   <a:srgbClr val="3D3A36"/>
                 </a:solidFill>
@@ -1844,20 +2770,20 @@
                 <a:ea typeface="Calibri" pitchFamily="34" charset="-122"/>
                 <a:cs typeface="Calibri" pitchFamily="34" charset="-120"/>
               </a:rPr>
-              <a:t>High probability = likely (sun rising tomorrow)</a:t>
-            </a:r>
-            <a:endParaRPr lang="en-US" sz="1400" dirty="0"/>
+              <a:t>Probability = number of favourable outcomes ÷ total number of outcomes.</a:t>
+            </a:r>
+            <a:endParaRPr lang="en-US" sz="1500" dirty="0"/>
           </a:p>
           <a:p>
             <a:pPr marL="342900" indent="-342900">
               <a:spcAft>
-                <a:spcPts val="600"/>
+                <a:spcPts val="800"/>
               </a:spcAft>
               <a:buSzPct val="100000"/>
               <a:buChar char="•"/>
             </a:pPr>
             <a:r>
-              <a:rPr lang="en-US" sz="1400" dirty="0">
+              <a:rPr lang="en-US" sz="1500" dirty="0">
                 <a:solidFill>
                   <a:srgbClr val="3D3A36"/>
                 </a:solidFill>
@@ -1865,56 +2791,30 @@
                 <a:ea typeface="Calibri" pitchFamily="34" charset="-122"/>
                 <a:cs typeface="Calibri" pitchFamily="34" charset="-120"/>
               </a:rPr>
-              <a:t>1 = certain (a day having 24 hours)</a:t>
-            </a:r>
-            <a:endParaRPr lang="en-US" sz="1400" dirty="0"/>
-          </a:p>
-          <a:p>
-            <a:pPr marL="342900" indent="-342900">
-              <a:spcAft>
-                <a:spcPts val="600"/>
-              </a:spcAft>
-              <a:buSzPct val="100000"/>
-              <a:buChar char="•"/>
-            </a:pPr>
-            <a:r>
-              <a:rPr lang="en-US" sz="1400" dirty="0">
-                <a:solidFill>
-                  <a:srgbClr val="3D3A36"/>
-                </a:solidFill>
-                <a:latin typeface="Calibri" pitchFamily="34" charset="0"/>
-                <a:ea typeface="Calibri" pitchFamily="34" charset="-122"/>
-                <a:cs typeface="Calibri" pitchFamily="34" charset="-120"/>
-              </a:rPr>
-              <a:t>Probabilities of all outcomes always add up to 1</a:t>
-            </a:r>
-            <a:endParaRPr lang="en-US" sz="1400" dirty="0"/>
-          </a:p>
-        </p:txBody>
-      </p:sp>
-      <p:sp>
-        <p:nvSpPr>
-          <p:cNvPr id="6" name="Shape 4"/>
-          <p:cNvSpPr/>
-          <p:nvPr/>
-        </p:nvSpPr>
-        <p:spPr>
-          <a:xfrm>
-            <a:off x="4846320" y="1188720"/>
-            <a:ext cx="3840480" cy="3474720"/>
-          </a:xfrm>
-          <a:prstGeom prst="rect">
-            <a:avLst/>
-          </a:prstGeom>
-          <a:solidFill>
-            <a:srgbClr val="FFFFFF"/>
-          </a:solidFill>
-          <a:ln w="12700">
-            <a:solidFill>
-              <a:srgbClr val="E5E2DC"/>
-            </a:solidFill>
-            <a:prstDash val="solid"/>
-          </a:ln>
+              <a:t>Can be written as a fraction, decimal, or percentage.</a:t>
+            </a:r>
+            <a:endParaRPr lang="en-US" sz="1500" dirty="0"/>
+          </a:p>
+        </p:txBody>
+      </p:sp>
+      <p:sp>
+        <p:nvSpPr>
+          <p:cNvPr id="7" name="Shape 5"/>
+          <p:cNvSpPr/>
+          <p:nvPr/>
+        </p:nvSpPr>
+        <p:spPr>
+          <a:xfrm>
+            <a:off x="731520" y="4206240"/>
+            <a:ext cx="7680960" cy="640080"/>
+          </a:xfrm>
+          <a:prstGeom prst="rect">
+            <a:avLst/>
+          </a:prstGeom>
+          <a:solidFill>
+            <a:srgbClr val="E8F5F3"/>
+          </a:solidFill>
+          <a:ln/>
           <a:effectLst>
             <a:outerShdw sx="100000" sy="100000" kx="0" ky="0" algn="bl" rotWithShape="0" blurRad="50800" dist="25400" dir="8100000">
               <a:srgbClr val="000000">
@@ -1926,34 +2826,14 @@
       </p:sp>
       <p:sp>
         <p:nvSpPr>
-          <p:cNvPr id="7" name="Shape 5"/>
-          <p:cNvSpPr/>
-          <p:nvPr/>
-        </p:nvSpPr>
-        <p:spPr>
-          <a:xfrm>
-            <a:off x="4846320" y="1188720"/>
-            <a:ext cx="3840480" cy="54864"/>
-          </a:xfrm>
-          <a:prstGeom prst="rect">
-            <a:avLst/>
-          </a:prstGeom>
-          <a:solidFill>
-            <a:srgbClr val="2A9D8F"/>
-          </a:solidFill>
-          <a:ln/>
-        </p:spPr>
-      </p:sp>
-      <p:sp>
-        <p:nvSpPr>
           <p:cNvPr id="8" name="Text 6"/>
           <p:cNvSpPr/>
           <p:nvPr/>
         </p:nvSpPr>
         <p:spPr>
           <a:xfrm>
-            <a:off x="5120640" y="1371600"/>
-            <a:ext cx="3291840" cy="3108960"/>
+            <a:off x="914400" y="4251960"/>
+            <a:ext cx="7315200" cy="548640"/>
           </a:xfrm>
           <a:prstGeom prst="rect">
             <a:avLst/>
@@ -1962,46 +2842,28 @@
           <a:ln/>
         </p:spPr>
         <p:txBody>
-          <a:bodyPr wrap="square" rtlCol="0" anchor="t"/>
+          <a:bodyPr wrap="square" rtlCol="0" anchor="ctr"/>
           <a:lstStyle/>
           <a:p>
             <a:pPr indent="0" marL="0">
-              <a:spcAft>
-                <a:spcPts val="400"/>
-              </a:spcAft>
               <a:buNone/>
             </a:pPr>
             <a:r>
-              <a:rPr lang="en-US" sz="1600" b="1" dirty="0">
-                <a:solidFill>
-                  <a:srgbClr val="1B2A4A"/>
+              <a:rPr lang="en-US" sz="1200" b="1" dirty="0">
+                <a:solidFill>
+                  <a:srgbClr val="2A9D8F"/>
                 </a:solidFill>
                 <a:latin typeface="Calibri" pitchFamily="34" charset="0"/>
                 <a:ea typeface="Calibri" pitchFamily="34" charset="-122"/>
                 <a:cs typeface="Calibri" pitchFamily="34" charset="-120"/>
               </a:rPr>
-              <a:t>Calculating Probability</a:t>
-            </a:r>
-            <a:endParaRPr lang="en-US" sz="1600" dirty="0"/>
-          </a:p>
-          <a:p>
+              <a:t>Key Idea: </a:t>
+            </a:r>
             <a:pPr indent="0" marL="0">
-              <a:spcAft>
-                <a:spcPts val="400"/>
-              </a:spcAft>
               <a:buNone/>
             </a:pPr>
-            <a:endParaRPr lang="en-US" sz="1600" dirty="0"/>
-          </a:p>
-          <a:p>
-            <a:pPr indent="0" marL="0">
-              <a:spcAft>
-                <a:spcPts val="400"/>
-              </a:spcAft>
-              <a:buNone/>
-            </a:pPr>
-            <a:r>
-              <a:rPr lang="en-US" sz="1300" dirty="0">
+            <a:r>
+              <a:rPr lang="en-US" sz="1200" i="1" dirty="0">
                 <a:solidFill>
                   <a:srgbClr val="3D3A36"/>
                 </a:solidFill>
@@ -2009,89 +2871,9 @@
                 <a:ea typeface="Calibri" pitchFamily="34" charset="-122"/>
                 <a:cs typeface="Calibri" pitchFamily="34" charset="-120"/>
               </a:rPr>
-              <a:t>P(event) = number of favourable outcomes ÷ total number of possible outcomes</a:t>
-            </a:r>
-            <a:endParaRPr lang="en-US" sz="1600" dirty="0"/>
-          </a:p>
-          <a:p>
-            <a:pPr indent="0" marL="0">
-              <a:spcAft>
-                <a:spcPts val="400"/>
-              </a:spcAft>
-              <a:buNone/>
-            </a:pPr>
-            <a:r>
-              <a:rPr lang="en-US" sz="1300" dirty="0">
-                <a:solidFill>
-                  <a:srgbClr val="3D3A36"/>
-                </a:solidFill>
-                <a:latin typeface="Calibri" pitchFamily="34" charset="0"/>
-                <a:ea typeface="Calibri" pitchFamily="34" charset="-122"/>
-                <a:cs typeface="Calibri" pitchFamily="34" charset="-120"/>
-              </a:rPr>
-              <a:t>Die: P(rolling a 3) = 1/6</a:t>
-            </a:r>
-            <a:endParaRPr lang="en-US" sz="1600" dirty="0"/>
-          </a:p>
-          <a:p>
-            <a:pPr indent="0" marL="0">
-              <a:spcAft>
-                <a:spcPts val="400"/>
-              </a:spcAft>
-              <a:buNone/>
-            </a:pPr>
-            <a:r>
-              <a:rPr lang="en-US" sz="1300" dirty="0">
-                <a:solidFill>
-                  <a:srgbClr val="3D3A36"/>
-                </a:solidFill>
-                <a:latin typeface="Calibri" pitchFamily="34" charset="0"/>
-                <a:ea typeface="Calibri" pitchFamily="34" charset="-122"/>
-                <a:cs typeface="Calibri" pitchFamily="34" charset="-120"/>
-              </a:rPr>
-              <a:t>Die: P(even number) = 3/6 = 1/2</a:t>
-            </a:r>
-            <a:endParaRPr lang="en-US" sz="1600" dirty="0"/>
-          </a:p>
-          <a:p>
-            <a:pPr indent="0" marL="0">
-              <a:spcAft>
-                <a:spcPts val="400"/>
-              </a:spcAft>
-              <a:buNone/>
-            </a:pPr>
-            <a:r>
-              <a:rPr lang="en-US" sz="1300" dirty="0">
-                <a:solidFill>
-                  <a:srgbClr val="3D3A36"/>
-                </a:solidFill>
-                <a:latin typeface="Calibri" pitchFamily="34" charset="0"/>
-                <a:ea typeface="Calibri" pitchFamily="34" charset="-122"/>
-                <a:cs typeface="Calibri" pitchFamily="34" charset="-120"/>
-              </a:rPr>
-              <a:t>Cards: P(heart) = 13/52 = 1/4</a:t>
-            </a:r>
-            <a:endParaRPr lang="en-US" sz="1600" dirty="0"/>
-          </a:p>
-          <a:p>
-            <a:pPr indent="0" marL="0">
-              <a:spcAft>
-                <a:spcPts val="400"/>
-              </a:spcAft>
-              <a:buNone/>
-            </a:pPr>
-            <a:r>
-              <a:rPr lang="en-US" sz="1300" dirty="0">
-                <a:solidFill>
-                  <a:srgbClr val="3D3A36"/>
-                </a:solidFill>
-                <a:latin typeface="Calibri" pitchFamily="34" charset="0"/>
-                <a:ea typeface="Calibri" pitchFamily="34" charset="-122"/>
-                <a:cs typeface="Calibri" pitchFamily="34" charset="-120"/>
-              </a:rPr>
-              <a:t>Spinner with 3 red, 2 blue: P(red) = 3/5</a:t>
-            </a:r>
-            <a:endParaRPr lang="en-US" sz="1600" dirty="0"/>
+              <a:t>Probability can NEVER be less than 0 or greater than 1.</a:t>
+            </a:r>
+            <a:endParaRPr lang="en-US" sz="1200" dirty="0"/>
           </a:p>
         </p:txBody>
       </p:sp>
@@ -2136,7 +2918,47 @@
         <p:spPr>
           <a:xfrm>
             <a:off x="0" y="0"/>
-            <a:ext cx="9144000" cy="54864"/>
+            <a:ext cx="9144000" cy="822960"/>
+          </a:xfrm>
+          <a:prstGeom prst="rect">
+            <a:avLst/>
+          </a:prstGeom>
+          <a:solidFill>
+            <a:srgbClr val="FFFFFF"/>
+          </a:solidFill>
+          <a:ln/>
+        </p:spPr>
+      </p:sp>
+      <p:sp>
+        <p:nvSpPr>
+          <p:cNvPr id="3" name="Shape 1"/>
+          <p:cNvSpPr/>
+          <p:nvPr/>
+        </p:nvSpPr>
+        <p:spPr>
+          <a:xfrm>
+            <a:off x="0" y="804672"/>
+            <a:ext cx="9144000" cy="27432"/>
+          </a:xfrm>
+          <a:prstGeom prst="rect">
+            <a:avLst/>
+          </a:prstGeom>
+          <a:solidFill>
+            <a:srgbClr val="E5E2DC"/>
+          </a:solidFill>
+          <a:ln/>
+        </p:spPr>
+      </p:sp>
+      <p:sp>
+        <p:nvSpPr>
+          <p:cNvPr id="4" name="Shape 2"/>
+          <p:cNvSpPr/>
+          <p:nvPr/>
+        </p:nvSpPr>
+        <p:spPr>
+          <a:xfrm>
+            <a:off x="548640" y="201168"/>
+            <a:ext cx="54864" cy="420624"/>
           </a:xfrm>
           <a:prstGeom prst="rect">
             <a:avLst/>
@@ -2149,14 +2971,14 @@
       </p:sp>
       <p:sp>
         <p:nvSpPr>
-          <p:cNvPr id="3" name="Text 1"/>
-          <p:cNvSpPr/>
-          <p:nvPr/>
-        </p:nvSpPr>
-        <p:spPr>
-          <a:xfrm>
-            <a:off x="7772400" y="4709160"/>
-            <a:ext cx="1097280" cy="320040"/>
+          <p:cNvPr id="5" name="Text 3"/>
+          <p:cNvSpPr/>
+          <p:nvPr/>
+        </p:nvSpPr>
+        <p:spPr>
+          <a:xfrm>
+            <a:off x="777240" y="137160"/>
+            <a:ext cx="7772400" cy="548640"/>
           </a:xfrm>
           <a:prstGeom prst="rect">
             <a:avLst/>
@@ -2165,14 +2987,119 @@
           <a:ln/>
         </p:spPr>
         <p:txBody>
+          <a:bodyPr wrap="square" lIns="0" tIns="0" rIns="0" bIns="0" rtlCol="0" anchor="ctr"/>
+          <a:lstStyle/>
+          <a:p>
+            <a:pPr indent="0" marL="0">
+              <a:buNone/>
+            </a:pPr>
+            <a:r>
+              <a:rPr lang="en-US" sz="2000" b="1" dirty="0">
+                <a:solidFill>
+                  <a:srgbClr val="1B2A4A"/>
+                </a:solidFill>
+                <a:latin typeface="Georgia" pitchFamily="34" charset="0"/>
+                <a:ea typeface="Georgia" pitchFamily="34" charset="-122"/>
+                <a:cs typeface="Georgia" pitchFamily="34" charset="-120"/>
+              </a:rPr>
+              <a:t>Probability of Rolling a Dice</a:t>
+            </a:r>
+            <a:endParaRPr lang="en-US" sz="2000" dirty="0"/>
+          </a:p>
+        </p:txBody>
+      </p:sp>
+      <p:sp>
+        <p:nvSpPr>
+          <p:cNvPr id="6" name="Shape 4"/>
+          <p:cNvSpPr/>
+          <p:nvPr/>
+        </p:nvSpPr>
+        <p:spPr>
+          <a:xfrm>
+            <a:off x="731520" y="1280160"/>
+            <a:ext cx="2377440" cy="2377440"/>
+          </a:xfrm>
+          <a:prstGeom prst="rect">
+            <a:avLst/>
+          </a:prstGeom>
+          <a:solidFill>
+            <a:srgbClr val="FFFFFF"/>
+          </a:solidFill>
+          <a:ln/>
+          <a:effectLst>
+            <a:outerShdw sx="100000" sy="100000" kx="0" ky="0" algn="bl" rotWithShape="0" blurRad="50800" dist="25400" dir="8100000">
+              <a:srgbClr val="000000">
+                <a:alpha val="10000"/>
+              </a:srgbClr>
+            </a:outerShdw>
+          </a:effectLst>
+        </p:spPr>
+      </p:sp>
+      <p:sp>
+        <p:nvSpPr>
+          <p:cNvPr id="7" name="Text 5"/>
+          <p:cNvSpPr/>
+          <p:nvPr/>
+        </p:nvSpPr>
+        <p:spPr>
+          <a:xfrm>
+            <a:off x="731520" y="1463040"/>
+            <a:ext cx="2377440" cy="914400"/>
+          </a:xfrm>
+          <a:prstGeom prst="rect">
+            <a:avLst/>
+          </a:prstGeom>
+          <a:noFill/>
+          <a:ln/>
+        </p:spPr>
+        <p:txBody>
           <a:bodyPr wrap="square" rtlCol="0" anchor="ctr"/>
           <a:lstStyle/>
           <a:p>
-            <a:pPr algn="r" indent="0" marL="0">
+            <a:pPr algn="ctr" indent="0" marL="0">
               <a:buNone/>
             </a:pPr>
             <a:r>
-              <a:rPr lang="en-US" sz="900" dirty="0">
+              <a:rPr lang="en-US" sz="3600" b="1" dirty="0">
+                <a:solidFill>
+                  <a:srgbClr val="2A9D8F"/>
+                </a:solidFill>
+                <a:latin typeface="Georgia" pitchFamily="34" charset="0"/>
+                <a:ea typeface="Georgia" pitchFamily="34" charset="-122"/>
+                <a:cs typeface="Georgia" pitchFamily="34" charset="-120"/>
+              </a:rPr>
+              <a:t>1/6</a:t>
+            </a:r>
+            <a:endParaRPr lang="en-US" sz="3600" dirty="0"/>
+          </a:p>
+        </p:txBody>
+      </p:sp>
+      <p:sp>
+        <p:nvSpPr>
+          <p:cNvPr id="8" name="Text 6"/>
+          <p:cNvSpPr/>
+          <p:nvPr/>
+        </p:nvSpPr>
+        <p:spPr>
+          <a:xfrm>
+            <a:off x="731520" y="2423160"/>
+            <a:ext cx="2377440" cy="365760"/>
+          </a:xfrm>
+          <a:prstGeom prst="rect">
+            <a:avLst/>
+          </a:prstGeom>
+          <a:noFill/>
+          <a:ln/>
+        </p:spPr>
+        <p:txBody>
+          <a:bodyPr wrap="square" rtlCol="0" anchor="ctr"/>
+          <a:lstStyle/>
+          <a:p>
+            <a:pPr algn="ctr" indent="0" marL="0">
+              <a:buNone/>
+            </a:pPr>
+            <a:r>
+              <a:rPr lang="en-US" sz="1200" b="1" dirty="0">
                 <a:solidFill>
                   <a:srgbClr val="6B6660"/>
                 </a:solidFill>
@@ -2180,22 +3107,22 @@
                 <a:ea typeface="Calibri" pitchFamily="34" charset="-122"/>
                 <a:cs typeface="Calibri" pitchFamily="34" charset="-120"/>
               </a:rPr>
-              <a:t>4 / 5</a:t>
-            </a:r>
-            <a:endParaRPr lang="en-US" sz="900" dirty="0"/>
-          </a:p>
-        </p:txBody>
-      </p:sp>
-      <p:sp>
-        <p:nvSpPr>
-          <p:cNvPr id="4" name="Text 2"/>
-          <p:cNvSpPr/>
-          <p:nvPr/>
-        </p:nvSpPr>
-        <p:spPr>
-          <a:xfrm>
-            <a:off x="457200" y="274320"/>
-            <a:ext cx="8229600" cy="640080"/>
+              <a:t>ROLLING A 3</a:t>
+            </a:r>
+            <a:endParaRPr lang="en-US" sz="1200" dirty="0"/>
+          </a:p>
+        </p:txBody>
+      </p:sp>
+      <p:sp>
+        <p:nvSpPr>
+          <p:cNvPr id="9" name="Text 7"/>
+          <p:cNvSpPr/>
+          <p:nvPr/>
+        </p:nvSpPr>
+        <p:spPr>
+          <a:xfrm>
+            <a:off x="822960" y="2834640"/>
+            <a:ext cx="2194560" cy="640080"/>
           </a:xfrm>
           <a:prstGeom prst="rect">
             <a:avLst/>
@@ -2207,34 +3134,100 @@
           <a:bodyPr wrap="square" rtlCol="0" anchor="ctr"/>
           <a:lstStyle/>
           <a:p>
-            <a:pPr indent="0" marL="0">
+            <a:pPr algn="ctr" indent="0" marL="0">
               <a:buNone/>
             </a:pPr>
             <a:r>
-              <a:rPr lang="en-US" sz="2600" b="1" dirty="0">
-                <a:solidFill>
-                  <a:srgbClr val="1B2A4A"/>
+              <a:rPr lang="en-US" sz="1000" dirty="0">
+                <a:solidFill>
+                  <a:srgbClr val="9B9690"/>
+                </a:solidFill>
+                <a:latin typeface="Calibri" pitchFamily="34" charset="0"/>
+                <a:ea typeface="Calibri" pitchFamily="34" charset="-122"/>
+                <a:cs typeface="Calibri" pitchFamily="34" charset="-120"/>
+              </a:rPr>
+              <a:t>One favourable outcome out of six</a:t>
+            </a:r>
+            <a:endParaRPr lang="en-US" sz="1000" dirty="0"/>
+          </a:p>
+        </p:txBody>
+      </p:sp>
+      <p:sp>
+        <p:nvSpPr>
+          <p:cNvPr id="10" name="Shape 8"/>
+          <p:cNvSpPr/>
+          <p:nvPr/>
+        </p:nvSpPr>
+        <p:spPr>
+          <a:xfrm>
+            <a:off x="3383280" y="1280160"/>
+            <a:ext cx="2377440" cy="2377440"/>
+          </a:xfrm>
+          <a:prstGeom prst="rect">
+            <a:avLst/>
+          </a:prstGeom>
+          <a:solidFill>
+            <a:srgbClr val="FFFFFF"/>
+          </a:solidFill>
+          <a:ln/>
+          <a:effectLst>
+            <a:outerShdw sx="100000" sy="100000" kx="0" ky="0" algn="bl" rotWithShape="0" blurRad="50800" dist="25400" dir="8100000">
+              <a:srgbClr val="000000">
+                <a:alpha val="10000"/>
+              </a:srgbClr>
+            </a:outerShdw>
+          </a:effectLst>
+        </p:spPr>
+      </p:sp>
+      <p:sp>
+        <p:nvSpPr>
+          <p:cNvPr id="11" name="Text 9"/>
+          <p:cNvSpPr/>
+          <p:nvPr/>
+        </p:nvSpPr>
+        <p:spPr>
+          <a:xfrm>
+            <a:off x="3383280" y="1463040"/>
+            <a:ext cx="2377440" cy="914400"/>
+          </a:xfrm>
+          <a:prstGeom prst="rect">
+            <a:avLst/>
+          </a:prstGeom>
+          <a:noFill/>
+          <a:ln/>
+        </p:spPr>
+        <p:txBody>
+          <a:bodyPr wrap="square" rtlCol="0" anchor="ctr"/>
+          <a:lstStyle/>
+          <a:p>
+            <a:pPr algn="ctr" indent="0" marL="0">
+              <a:buNone/>
+            </a:pPr>
+            <a:r>
+              <a:rPr lang="en-US" sz="3600" b="1" dirty="0">
+                <a:solidFill>
+                  <a:srgbClr val="2A9D8F"/>
                 </a:solidFill>
                 <a:latin typeface="Georgia" pitchFamily="34" charset="0"/>
                 <a:ea typeface="Georgia" pitchFamily="34" charset="-122"/>
                 <a:cs typeface="Georgia" pitchFamily="34" charset="-120"/>
               </a:rPr>
-              <a:t>Key Vocabulary</a:t>
-            </a:r>
-            <a:endParaRPr lang="en-US" sz="2600" dirty="0"/>
-          </a:p>
-        </p:txBody>
-      </p:sp>
-      <p:sp>
-        <p:nvSpPr>
-          <p:cNvPr id="5" name="Text 3"/>
-          <p:cNvSpPr/>
-          <p:nvPr/>
-        </p:nvSpPr>
-        <p:spPr>
-          <a:xfrm>
-            <a:off x="457200" y="1097280"/>
-            <a:ext cx="8229600" cy="3657600"/>
+              <a:t>3/6</a:t>
+            </a:r>
+            <a:endParaRPr lang="en-US" sz="3600" dirty="0"/>
+          </a:p>
+        </p:txBody>
+      </p:sp>
+      <p:sp>
+        <p:nvSpPr>
+          <p:cNvPr id="12" name="Text 10"/>
+          <p:cNvSpPr/>
+          <p:nvPr/>
+        </p:nvSpPr>
+        <p:spPr>
+          <a:xfrm>
+            <a:off x="3383280" y="2423160"/>
+            <a:ext cx="2377440" cy="365760"/>
           </a:xfrm>
           <a:prstGeom prst="rect">
             <a:avLst/>
@@ -2243,133 +3236,246 @@
           <a:ln/>
         </p:spPr>
         <p:txBody>
-          <a:bodyPr wrap="square" rtlCol="0" anchor="t"/>
-          <a:lstStyle/>
-          <a:p>
-            <a:pPr marL="342900" indent="-342900">
-              <a:spcAft>
-                <a:spcPts val="800"/>
-              </a:spcAft>
-              <a:buSzPct val="100000"/>
-              <a:buChar char="•"/>
-            </a:pPr>
-            <a:r>
-              <a:rPr lang="en-US" sz="1400" dirty="0">
-                <a:solidFill>
-                  <a:srgbClr val="3D3A36"/>
+          <a:bodyPr wrap="square" rtlCol="0" anchor="ctr"/>
+          <a:lstStyle/>
+          <a:p>
+            <a:pPr algn="ctr" indent="0" marL="0">
+              <a:buNone/>
+            </a:pPr>
+            <a:r>
+              <a:rPr lang="en-US" sz="1200" b="1" dirty="0">
+                <a:solidFill>
+                  <a:srgbClr val="6B6660"/>
                 </a:solidFill>
                 <a:latin typeface="Calibri" pitchFamily="34" charset="0"/>
                 <a:ea typeface="Calibri" pitchFamily="34" charset="-122"/>
                 <a:cs typeface="Calibri" pitchFamily="34" charset="-120"/>
               </a:rPr>
-              <a:t>Event: the thing you're measuring (e.g. rolling a 6)</a:t>
-            </a:r>
-            <a:endParaRPr lang="en-US" sz="1400" dirty="0"/>
-          </a:p>
-          <a:p>
-            <a:pPr marL="342900" indent="-342900">
-              <a:spcAft>
-                <a:spcPts val="800"/>
-              </a:spcAft>
-              <a:buSzPct val="100000"/>
-              <a:buChar char="•"/>
-            </a:pPr>
-            <a:r>
-              <a:rPr lang="en-US" sz="1400" dirty="0">
-                <a:solidFill>
-                  <a:srgbClr val="3D3A36"/>
+              <a:t>ROLLING EVEN</a:t>
+            </a:r>
+            <a:endParaRPr lang="en-US" sz="1200" dirty="0"/>
+          </a:p>
+        </p:txBody>
+      </p:sp>
+      <p:sp>
+        <p:nvSpPr>
+          <p:cNvPr id="13" name="Text 11"/>
+          <p:cNvSpPr/>
+          <p:nvPr/>
+        </p:nvSpPr>
+        <p:spPr>
+          <a:xfrm>
+            <a:off x="3474720" y="2834640"/>
+            <a:ext cx="2194560" cy="640080"/>
+          </a:xfrm>
+          <a:prstGeom prst="rect">
+            <a:avLst/>
+          </a:prstGeom>
+          <a:noFill/>
+          <a:ln/>
+        </p:spPr>
+        <p:txBody>
+          <a:bodyPr wrap="square" rtlCol="0" anchor="ctr"/>
+          <a:lstStyle/>
+          <a:p>
+            <a:pPr algn="ctr" indent="0" marL="0">
+              <a:buNone/>
+            </a:pPr>
+            <a:r>
+              <a:rPr lang="en-US" sz="1000" dirty="0">
+                <a:solidFill>
+                  <a:srgbClr val="9B9690"/>
                 </a:solidFill>
                 <a:latin typeface="Calibri" pitchFamily="34" charset="0"/>
                 <a:ea typeface="Calibri" pitchFamily="34" charset="-122"/>
                 <a:cs typeface="Calibri" pitchFamily="34" charset="-120"/>
               </a:rPr>
-              <a:t>Outcome: one possible result (e.g. rolling a 1, 2, 3, 4, 5, or 6)</a:t>
-            </a:r>
-            <a:endParaRPr lang="en-US" sz="1400" dirty="0"/>
-          </a:p>
-          <a:p>
-            <a:pPr marL="342900" indent="-342900">
-              <a:spcAft>
-                <a:spcPts val="800"/>
-              </a:spcAft>
-              <a:buSzPct val="100000"/>
-              <a:buChar char="•"/>
-            </a:pPr>
-            <a:r>
-              <a:rPr lang="en-US" sz="1400" dirty="0">
-                <a:solidFill>
-                  <a:srgbClr val="3D3A36"/>
+              <a:t>Three even numbers: 2, 4, 6</a:t>
+            </a:r>
+            <a:endParaRPr lang="en-US" sz="1000" dirty="0"/>
+          </a:p>
+        </p:txBody>
+      </p:sp>
+      <p:sp>
+        <p:nvSpPr>
+          <p:cNvPr id="14" name="Shape 12"/>
+          <p:cNvSpPr/>
+          <p:nvPr/>
+        </p:nvSpPr>
+        <p:spPr>
+          <a:xfrm>
+            <a:off x="6035040" y="1280160"/>
+            <a:ext cx="2377440" cy="2377440"/>
+          </a:xfrm>
+          <a:prstGeom prst="rect">
+            <a:avLst/>
+          </a:prstGeom>
+          <a:solidFill>
+            <a:srgbClr val="FFFFFF"/>
+          </a:solidFill>
+          <a:ln/>
+          <a:effectLst>
+            <a:outerShdw sx="100000" sy="100000" kx="0" ky="0" algn="bl" rotWithShape="0" blurRad="50800" dist="25400" dir="8100000">
+              <a:srgbClr val="000000">
+                <a:alpha val="10000"/>
+              </a:srgbClr>
+            </a:outerShdw>
+          </a:effectLst>
+        </p:spPr>
+      </p:sp>
+      <p:sp>
+        <p:nvSpPr>
+          <p:cNvPr id="15" name="Text 13"/>
+          <p:cNvSpPr/>
+          <p:nvPr/>
+        </p:nvSpPr>
+        <p:spPr>
+          <a:xfrm>
+            <a:off x="6035040" y="1463040"/>
+            <a:ext cx="2377440" cy="914400"/>
+          </a:xfrm>
+          <a:prstGeom prst="rect">
+            <a:avLst/>
+          </a:prstGeom>
+          <a:noFill/>
+          <a:ln/>
+        </p:spPr>
+        <p:txBody>
+          <a:bodyPr wrap="square" rtlCol="0" anchor="ctr"/>
+          <a:lstStyle/>
+          <a:p>
+            <a:pPr algn="ctr" indent="0" marL="0">
+              <a:buNone/>
+            </a:pPr>
+            <a:r>
+              <a:rPr lang="en-US" sz="3600" b="1" dirty="0">
+                <a:solidFill>
+                  <a:srgbClr val="2A9D8F"/>
+                </a:solidFill>
+                <a:latin typeface="Georgia" pitchFamily="34" charset="0"/>
+                <a:ea typeface="Georgia" pitchFamily="34" charset="-122"/>
+                <a:cs typeface="Georgia" pitchFamily="34" charset="-120"/>
+              </a:rPr>
+              <a:t>6/6</a:t>
+            </a:r>
+            <a:endParaRPr lang="en-US" sz="3600" dirty="0"/>
+          </a:p>
+        </p:txBody>
+      </p:sp>
+      <p:sp>
+        <p:nvSpPr>
+          <p:cNvPr id="16" name="Text 14"/>
+          <p:cNvSpPr/>
+          <p:nvPr/>
+        </p:nvSpPr>
+        <p:spPr>
+          <a:xfrm>
+            <a:off x="6035040" y="2423160"/>
+            <a:ext cx="2377440" cy="365760"/>
+          </a:xfrm>
+          <a:prstGeom prst="rect">
+            <a:avLst/>
+          </a:prstGeom>
+          <a:noFill/>
+          <a:ln/>
+        </p:spPr>
+        <p:txBody>
+          <a:bodyPr wrap="square" rtlCol="0" anchor="ctr"/>
+          <a:lstStyle/>
+          <a:p>
+            <a:pPr algn="ctr" indent="0" marL="0">
+              <a:buNone/>
+            </a:pPr>
+            <a:r>
+              <a:rPr lang="en-US" sz="1200" b="1" dirty="0">
+                <a:solidFill>
+                  <a:srgbClr val="6B6660"/>
                 </a:solidFill>
                 <a:latin typeface="Calibri" pitchFamily="34" charset="0"/>
                 <a:ea typeface="Calibri" pitchFamily="34" charset="-122"/>
                 <a:cs typeface="Calibri" pitchFamily="34" charset="-120"/>
               </a:rPr>
-              <a:t>Sample space: all possible outcomes (e.g. {1, 2, 3, 4, 5, 6})</a:t>
-            </a:r>
-            <a:endParaRPr lang="en-US" sz="1400" dirty="0"/>
-          </a:p>
-          <a:p>
-            <a:pPr marL="342900" indent="-342900">
-              <a:spcAft>
-                <a:spcPts val="800"/>
-              </a:spcAft>
-              <a:buSzPct val="100000"/>
-              <a:buChar char="•"/>
-            </a:pPr>
-            <a:r>
-              <a:rPr lang="en-US" sz="1400" dirty="0">
-                <a:solidFill>
-                  <a:srgbClr val="3D3A36"/>
+              <a:t>ROLLING 1–6</a:t>
+            </a:r>
+            <a:endParaRPr lang="en-US" sz="1200" dirty="0"/>
+          </a:p>
+        </p:txBody>
+      </p:sp>
+      <p:sp>
+        <p:nvSpPr>
+          <p:cNvPr id="17" name="Text 15"/>
+          <p:cNvSpPr/>
+          <p:nvPr/>
+        </p:nvSpPr>
+        <p:spPr>
+          <a:xfrm>
+            <a:off x="6126480" y="2834640"/>
+            <a:ext cx="2194560" cy="640080"/>
+          </a:xfrm>
+          <a:prstGeom prst="rect">
+            <a:avLst/>
+          </a:prstGeom>
+          <a:noFill/>
+          <a:ln/>
+        </p:spPr>
+        <p:txBody>
+          <a:bodyPr wrap="square" rtlCol="0" anchor="ctr"/>
+          <a:lstStyle/>
+          <a:p>
+            <a:pPr algn="ctr" indent="0" marL="0">
+              <a:buNone/>
+            </a:pPr>
+            <a:r>
+              <a:rPr lang="en-US" sz="1000" dirty="0">
+                <a:solidFill>
+                  <a:srgbClr val="9B9690"/>
                 </a:solidFill>
                 <a:latin typeface="Calibri" pitchFamily="34" charset="0"/>
                 <a:ea typeface="Calibri" pitchFamily="34" charset="-122"/>
                 <a:cs typeface="Calibri" pitchFamily="34" charset="-120"/>
               </a:rPr>
-              <a:t>Fair: each outcome is equally likely</a:t>
-            </a:r>
-            <a:endParaRPr lang="en-US" sz="1400" dirty="0"/>
-          </a:p>
-          <a:p>
-            <a:pPr marL="342900" indent="-342900">
-              <a:spcAft>
-                <a:spcPts val="800"/>
-              </a:spcAft>
-              <a:buSzPct val="100000"/>
-              <a:buChar char="•"/>
-            </a:pPr>
-            <a:r>
-              <a:rPr lang="en-US" sz="1400" dirty="0">
-                <a:solidFill>
-                  <a:srgbClr val="3D3A36"/>
+              <a:t>All outcomes covered = certain</a:t>
+            </a:r>
+            <a:endParaRPr lang="en-US" sz="1000" dirty="0"/>
+          </a:p>
+        </p:txBody>
+      </p:sp>
+      <p:sp>
+        <p:nvSpPr>
+          <p:cNvPr id="18" name="Text 16"/>
+          <p:cNvSpPr/>
+          <p:nvPr/>
+        </p:nvSpPr>
+        <p:spPr>
+          <a:xfrm>
+            <a:off x="731520" y="4114800"/>
+            <a:ext cx="7680960" cy="457200"/>
+          </a:xfrm>
+          <a:prstGeom prst="rect">
+            <a:avLst/>
+          </a:prstGeom>
+          <a:noFill/>
+          <a:ln/>
+        </p:spPr>
+        <p:txBody>
+          <a:bodyPr wrap="square" rtlCol="0" anchor="ctr"/>
+          <a:lstStyle/>
+          <a:p>
+            <a:pPr algn="ctr" indent="0" marL="0">
+              <a:buNone/>
+            </a:pPr>
+            <a:r>
+              <a:rPr lang="en-US" sz="1200" i="1" dirty="0">
+                <a:solidFill>
+                  <a:srgbClr val="6B6660"/>
                 </a:solidFill>
                 <a:latin typeface="Calibri" pitchFamily="34" charset="0"/>
                 <a:ea typeface="Calibri" pitchFamily="34" charset="-122"/>
                 <a:cs typeface="Calibri" pitchFamily="34" charset="-120"/>
               </a:rPr>
-              <a:t>Biased: some outcomes are more likely than others</a:t>
-            </a:r>
-            <a:endParaRPr lang="en-US" sz="1400" dirty="0"/>
-          </a:p>
-          <a:p>
-            <a:pPr marL="342900" indent="-342900">
-              <a:spcAft>
-                <a:spcPts val="800"/>
-              </a:spcAft>
-              <a:buSzPct val="100000"/>
-              <a:buChar char="•"/>
-            </a:pPr>
-            <a:r>
-              <a:rPr lang="en-US" sz="1400" dirty="0">
-                <a:solidFill>
-                  <a:srgbClr val="3D3A36"/>
-                </a:solidFill>
-                <a:latin typeface="Calibri" pitchFamily="34" charset="0"/>
-                <a:ea typeface="Calibri" pitchFamily="34" charset="-122"/>
-                <a:cs typeface="Calibri" pitchFamily="34" charset="-120"/>
-              </a:rPr>
-              <a:t>Random: each outcome has an equal chance of occurring</a:t>
-            </a:r>
-            <a:endParaRPr lang="en-US" sz="1400" dirty="0"/>
+              <a:t>P(event) = favourable outcomes ÷ total outcomes</a:t>
+            </a:r>
+            <a:endParaRPr lang="en-US" sz="1200" dirty="0"/>
           </a:p>
         </p:txBody>
       </p:sp>
@@ -2387,7 +3493,7 @@
     <p:bg>
       <p:bgPr>
         <a:solidFill>
-          <a:srgbClr val="1B2A4A"/>
+          <a:srgbClr val="FAF8F5"/>
         </a:solidFill>
       </p:bgPr>
     </p:bg>
@@ -2414,27 +3520,67 @@
         <p:spPr>
           <a:xfrm>
             <a:off x="0" y="0"/>
-            <a:ext cx="109728" cy="5143500"/>
-          </a:xfrm>
-          <a:prstGeom prst="rect">
-            <a:avLst/>
-          </a:prstGeom>
-          <a:solidFill>
-            <a:srgbClr val="E9C46A"/>
-          </a:solidFill>
-          <a:ln/>
-        </p:spPr>
-      </p:sp>
-      <p:sp>
-        <p:nvSpPr>
-          <p:cNvPr id="3" name="Text 1"/>
-          <p:cNvSpPr/>
-          <p:nvPr/>
-        </p:nvSpPr>
-        <p:spPr>
-          <a:xfrm>
-            <a:off x="731520" y="457200"/>
-            <a:ext cx="7772400" cy="731520"/>
+            <a:ext cx="9144000" cy="822960"/>
+          </a:xfrm>
+          <a:prstGeom prst="rect">
+            <a:avLst/>
+          </a:prstGeom>
+          <a:solidFill>
+            <a:srgbClr val="FFFFFF"/>
+          </a:solidFill>
+          <a:ln/>
+        </p:spPr>
+      </p:sp>
+      <p:sp>
+        <p:nvSpPr>
+          <p:cNvPr id="3" name="Shape 1"/>
+          <p:cNvSpPr/>
+          <p:nvPr/>
+        </p:nvSpPr>
+        <p:spPr>
+          <a:xfrm>
+            <a:off x="0" y="804672"/>
+            <a:ext cx="9144000" cy="27432"/>
+          </a:xfrm>
+          <a:prstGeom prst="rect">
+            <a:avLst/>
+          </a:prstGeom>
+          <a:solidFill>
+            <a:srgbClr val="E5E2DC"/>
+          </a:solidFill>
+          <a:ln/>
+        </p:spPr>
+      </p:sp>
+      <p:sp>
+        <p:nvSpPr>
+          <p:cNvPr id="4" name="Shape 2"/>
+          <p:cNvSpPr/>
+          <p:nvPr/>
+        </p:nvSpPr>
+        <p:spPr>
+          <a:xfrm>
+            <a:off x="548640" y="201168"/>
+            <a:ext cx="54864" cy="420624"/>
+          </a:xfrm>
+          <a:prstGeom prst="rect">
+            <a:avLst/>
+          </a:prstGeom>
+          <a:solidFill>
+            <a:srgbClr val="2A9D8F"/>
+          </a:solidFill>
+          <a:ln/>
+        </p:spPr>
+      </p:sp>
+      <p:sp>
+        <p:nvSpPr>
+          <p:cNvPr id="5" name="Text 3"/>
+          <p:cNvSpPr/>
+          <p:nvPr/>
+        </p:nvSpPr>
+        <p:spPr>
+          <a:xfrm>
+            <a:off x="777240" y="137160"/>
+            <a:ext cx="7772400" cy="548640"/>
           </a:xfrm>
           <a:prstGeom prst="rect">
             <a:avLst/>
@@ -2443,37 +3589,37 @@
           <a:ln/>
         </p:spPr>
         <p:txBody>
-          <a:bodyPr wrap="square" rtlCol="0" anchor="ctr"/>
+          <a:bodyPr wrap="square" lIns="0" tIns="0" rIns="0" bIns="0" rtlCol="0" anchor="ctr"/>
           <a:lstStyle/>
           <a:p>
             <a:pPr indent="0" marL="0">
               <a:buNone/>
             </a:pPr>
             <a:r>
-              <a:rPr lang="en-US" sz="3200" b="1" dirty="0">
-                <a:solidFill>
-                  <a:srgbClr val="FFFFFF"/>
+              <a:rPr lang="en-US" sz="2000" b="1" dirty="0">
+                <a:solidFill>
+                  <a:srgbClr val="1B2A4A"/>
                 </a:solidFill>
                 <a:latin typeface="Georgia" pitchFamily="34" charset="0"/>
                 <a:ea typeface="Georgia" pitchFamily="34" charset="-122"/>
                 <a:cs typeface="Georgia" pitchFamily="34" charset="-120"/>
               </a:rPr>
-              <a:t>Key Takeaways</a:t>
-            </a:r>
-            <a:endParaRPr lang="en-US" sz="3200" dirty="0"/>
-          </a:p>
-        </p:txBody>
-      </p:sp>
-      <p:sp>
-        <p:nvSpPr>
-          <p:cNvPr id="4" name="Text 2"/>
-          <p:cNvSpPr/>
-          <p:nvPr/>
-        </p:nvSpPr>
-        <p:spPr>
-          <a:xfrm>
-            <a:off x="731520" y="1463040"/>
-            <a:ext cx="7772400" cy="3200400"/>
+              <a:t>Equally Likely Outcomes</a:t>
+            </a:r>
+            <a:endParaRPr lang="en-US" sz="2000" dirty="0"/>
+          </a:p>
+        </p:txBody>
+      </p:sp>
+      <p:sp>
+        <p:nvSpPr>
+          <p:cNvPr id="6" name="Text 4"/>
+          <p:cNvSpPr/>
+          <p:nvPr/>
+        </p:nvSpPr>
+        <p:spPr>
+          <a:xfrm>
+            <a:off x="731520" y="1051560"/>
+            <a:ext cx="7680960" cy="3108960"/>
           </a:xfrm>
           <a:prstGeom prst="rect">
             <a:avLst/>
@@ -2487,7 +3633,7 @@
           <a:p>
             <a:pPr marL="342900" indent="-342900">
               <a:spcAft>
-                <a:spcPts val="1000"/>
+                <a:spcPts val="800"/>
               </a:spcAft>
               <a:buSzPct val="100000"/>
               <a:buChar char="•"/>
@@ -2495,20 +3641,20 @@
             <a:r>
               <a:rPr lang="en-US" sz="1500" dirty="0">
                 <a:solidFill>
-                  <a:srgbClr val="CADCFC"/>
+                  <a:srgbClr val="3D3A36"/>
                 </a:solidFill>
                 <a:latin typeface="Calibri" pitchFamily="34" charset="0"/>
                 <a:ea typeface="Calibri" pitchFamily="34" charset="-122"/>
                 <a:cs typeface="Calibri" pitchFamily="34" charset="-120"/>
               </a:rPr>
-              <a:t>Probability = favourable outcomes ÷ total outcomes</a:t>
+              <a:t>When all outcomes are EQUALLY LIKELY: P(event) = favourable ÷ total.</a:t>
             </a:r>
             <a:endParaRPr lang="en-US" sz="1500" dirty="0"/>
           </a:p>
           <a:p>
             <a:pPr marL="342900" indent="-342900">
               <a:spcAft>
-                <a:spcPts val="1000"/>
+                <a:spcPts val="800"/>
               </a:spcAft>
               <a:buSzPct val="100000"/>
               <a:buChar char="•"/>
@@ -2516,20 +3662,20 @@
             <a:r>
               <a:rPr lang="en-US" sz="1500" dirty="0">
                 <a:solidFill>
-                  <a:srgbClr val="CADCFC"/>
+                  <a:srgbClr val="3D3A36"/>
                 </a:solidFill>
                 <a:latin typeface="Calibri" pitchFamily="34" charset="0"/>
                 <a:ea typeface="Calibri" pitchFamily="34" charset="-122"/>
                 <a:cs typeface="Calibri" pitchFamily="34" charset="-120"/>
               </a:rPr>
-              <a:t>Scale: 0 (impossible) to 1 (certain)</a:t>
+              <a:t>Fair coin: P(heads) = 1/2. Fair dice: P(even) = 3/6 = 1/2.</a:t>
             </a:r>
             <a:endParaRPr lang="en-US" sz="1500" dirty="0"/>
           </a:p>
           <a:p>
             <a:pPr marL="342900" indent="-342900">
               <a:spcAft>
-                <a:spcPts val="1000"/>
+                <a:spcPts val="800"/>
               </a:spcAft>
               <a:buSzPct val="100000"/>
               <a:buChar char="•"/>
@@ -2537,20 +3683,20 @@
             <a:r>
               <a:rPr lang="en-US" sz="1500" dirty="0">
                 <a:solidFill>
-                  <a:srgbClr val="CADCFC"/>
+                  <a:srgbClr val="3D3A36"/>
                 </a:solidFill>
                 <a:latin typeface="Calibri" pitchFamily="34" charset="0"/>
                 <a:ea typeface="Calibri" pitchFamily="34" charset="-122"/>
                 <a:cs typeface="Calibri" pitchFamily="34" charset="-120"/>
               </a:rPr>
-              <a:t>Express as fraction, decimal, or percentage</a:t>
+              <a:t>Bag of 3 red and 2 blue marbles: P(red) = 3/5, P(blue) = 2/5.</a:t>
             </a:r>
             <a:endParaRPr lang="en-US" sz="1500" dirty="0"/>
           </a:p>
           <a:p>
             <a:pPr marL="342900" indent="-342900">
               <a:spcAft>
-                <a:spcPts val="1000"/>
+                <a:spcPts val="800"/>
               </a:spcAft>
               <a:buSzPct val="100000"/>
               <a:buChar char="•"/>
@@ -2558,20 +3704,20 @@
             <a:r>
               <a:rPr lang="en-US" sz="1500" dirty="0">
                 <a:solidFill>
-                  <a:srgbClr val="CADCFC"/>
+                  <a:srgbClr val="3D3A36"/>
                 </a:solidFill>
                 <a:latin typeface="Calibri" pitchFamily="34" charset="0"/>
                 <a:ea typeface="Calibri" pitchFamily="34" charset="-122"/>
                 <a:cs typeface="Calibri" pitchFamily="34" charset="-120"/>
               </a:rPr>
-              <a:t>All probabilities of outcomes add to 1</a:t>
+              <a:t>The probabilities of ALL outcomes must ADD UP to 1.</a:t>
             </a:r>
             <a:endParaRPr lang="en-US" sz="1500" dirty="0"/>
           </a:p>
           <a:p>
             <a:pPr marL="342900" indent="-342900">
               <a:spcAft>
-                <a:spcPts val="1000"/>
+                <a:spcPts val="800"/>
               </a:spcAft>
               <a:buSzPct val="100000"/>
               <a:buChar char="•"/>
@@ -2579,18 +3725,110 @@
             <a:r>
               <a:rPr lang="en-US" sz="1500" dirty="0">
                 <a:solidFill>
-                  <a:srgbClr val="CADCFC"/>
+                  <a:srgbClr val="3D3A36"/>
                 </a:solidFill>
                 <a:latin typeface="Calibri" pitchFamily="34" charset="0"/>
                 <a:ea typeface="Calibri" pitchFamily="34" charset="-122"/>
                 <a:cs typeface="Calibri" pitchFamily="34" charset="-120"/>
               </a:rPr>
-              <a:t>Fair = equally likely; biased = some more likely</a:t>
+              <a:t>P(event NOT happening) = 1 − P(event happening).</a:t>
             </a:r>
             <a:endParaRPr lang="en-US" sz="1500" dirty="0"/>
           </a:p>
         </p:txBody>
       </p:sp>
+    </p:spTree>
+  </p:cSld>
+  <p:clrMapOvr>
+    <a:masterClrMapping/>
+  </p:clrMapOvr>
+</p:sld>
+</file>
+
+<file path=ppt/slides/slide6.xml><?xml version="1.0" encoding="utf-8"?>
+<p:sld xmlns:a="http://schemas.openxmlformats.org/drawingml/2006/main" xmlns:r="http://schemas.openxmlformats.org/officeDocument/2006/relationships" xmlns:p="http://schemas.openxmlformats.org/presentationml/2006/main">
+  <p:cSld name="Slide 6">
+    <p:bg>
+      <p:bgPr>
+        <a:solidFill>
+          <a:srgbClr val="FAF8F5"/>
+        </a:solidFill>
+      </p:bgPr>
+    </p:bg>
+    <p:spTree>
+      <p:nvGrpSpPr>
+        <p:cNvPr id="1" name=""/>
+        <p:cNvGrpSpPr/>
+        <p:nvPr/>
+      </p:nvGrpSpPr>
+      <p:grpSpPr>
+        <a:xfrm>
+          <a:off x="0" y="0"/>
+          <a:ext cx="0" cy="0"/>
+          <a:chOff x="0" y="0"/>
+          <a:chExt cx="0" cy="0"/>
+        </a:xfrm>
+      </p:grpSpPr>
+      <p:sp>
+        <p:nvSpPr>
+          <p:cNvPr id="2" name="Shape 0"/>
+          <p:cNvSpPr/>
+          <p:nvPr/>
+        </p:nvSpPr>
+        <p:spPr>
+          <a:xfrm>
+            <a:off x="0" y="0"/>
+            <a:ext cx="9144000" cy="822960"/>
+          </a:xfrm>
+          <a:prstGeom prst="rect">
+            <a:avLst/>
+          </a:prstGeom>
+          <a:solidFill>
+            <a:srgbClr val="FFFFFF"/>
+          </a:solidFill>
+          <a:ln/>
+        </p:spPr>
+      </p:sp>
+      <p:sp>
+        <p:nvSpPr>
+          <p:cNvPr id="3" name="Shape 1"/>
+          <p:cNvSpPr/>
+          <p:nvPr/>
+        </p:nvSpPr>
+        <p:spPr>
+          <a:xfrm>
+            <a:off x="0" y="804672"/>
+            <a:ext cx="9144000" cy="27432"/>
+          </a:xfrm>
+          <a:prstGeom prst="rect">
+            <a:avLst/>
+          </a:prstGeom>
+          <a:solidFill>
+            <a:srgbClr val="E5E2DC"/>
+          </a:solidFill>
+          <a:ln/>
+        </p:spPr>
+      </p:sp>
+      <p:sp>
+        <p:nvSpPr>
+          <p:cNvPr id="4" name="Shape 2"/>
+          <p:cNvSpPr/>
+          <p:nvPr/>
+        </p:nvSpPr>
+        <p:spPr>
+          <a:xfrm>
+            <a:off x="548640" y="201168"/>
+            <a:ext cx="54864" cy="420624"/>
+          </a:xfrm>
+          <a:prstGeom prst="rect">
+            <a:avLst/>
+          </a:prstGeom>
+          <a:solidFill>
+            <a:srgbClr val="2A9D8F"/>
+          </a:solidFill>
+          <a:ln/>
+        </p:spPr>
+      </p:sp>
       <p:sp>
         <p:nvSpPr>
           <p:cNvPr id="5" name="Text 3"/>
@@ -2599,8 +3837,8 @@
         </p:nvSpPr>
         <p:spPr>
           <a:xfrm>
-            <a:off x="731520" y="4572000"/>
-            <a:ext cx="7772400" cy="365760"/>
+            <a:off x="777240" y="137160"/>
+            <a:ext cx="7772400" cy="548640"/>
           </a:xfrm>
           <a:prstGeom prst="rect">
             <a:avLst/>
@@ -2609,24 +3847,783 @@
           <a:ln/>
         </p:spPr>
         <p:txBody>
-          <a:bodyPr wrap="square" rtlCol="0" anchor="ctr"/>
+          <a:bodyPr wrap="square" lIns="0" tIns="0" rIns="0" bIns="0" rtlCol="0" anchor="ctr"/>
           <a:lstStyle/>
           <a:p>
             <a:pPr indent="0" marL="0">
               <a:buNone/>
             </a:pPr>
             <a:r>
-              <a:rPr lang="en-US" sz="1100" dirty="0">
-                <a:solidFill>
-                  <a:srgbClr val="E9C46A"/>
+              <a:rPr lang="en-US" sz="2000" b="1" dirty="0">
+                <a:solidFill>
+                  <a:srgbClr val="1B2A4A"/>
+                </a:solidFill>
+                <a:latin typeface="Georgia" pitchFamily="34" charset="0"/>
+                <a:ea typeface="Georgia" pitchFamily="34" charset="-122"/>
+                <a:cs typeface="Georgia" pitchFamily="34" charset="-120"/>
+              </a:rPr>
+              <a:t>Check Your Understanding</a:t>
+            </a:r>
+            <a:endParaRPr lang="en-US" sz="2000" dirty="0"/>
+          </a:p>
+        </p:txBody>
+      </p:sp>
+      <p:sp>
+        <p:nvSpPr>
+          <p:cNvPr id="6" name="Shape 4"/>
+          <p:cNvSpPr/>
+          <p:nvPr/>
+        </p:nvSpPr>
+        <p:spPr>
+          <a:xfrm>
+            <a:off x="731520" y="1051560"/>
+            <a:ext cx="7680960" cy="438912"/>
+          </a:xfrm>
+          <a:prstGeom prst="rect">
+            <a:avLst/>
+          </a:prstGeom>
+          <a:solidFill>
+            <a:srgbClr val="FFFFFF"/>
+          </a:solidFill>
+          <a:ln/>
+        </p:spPr>
+      </p:sp>
+      <p:sp>
+        <p:nvSpPr>
+          <p:cNvPr id="7" name="Text 5"/>
+          <p:cNvSpPr/>
+          <p:nvPr/>
+        </p:nvSpPr>
+        <p:spPr>
+          <a:xfrm>
+            <a:off x="868680" y="1051560"/>
+            <a:ext cx="320040" cy="438912"/>
+          </a:xfrm>
+          <a:prstGeom prst="rect">
+            <a:avLst/>
+          </a:prstGeom>
+          <a:noFill/>
+          <a:ln/>
+        </p:spPr>
+        <p:txBody>
+          <a:bodyPr wrap="square" rtlCol="0" anchor="ctr"/>
+          <a:lstStyle/>
+          <a:p>
+            <a:pPr indent="0" marL="0">
+              <a:buNone/>
+            </a:pPr>
+            <a:r>
+              <a:rPr lang="en-US" sz="1400" dirty="0">
+                <a:solidFill>
+                  <a:srgbClr val="2A9D8F"/>
+                </a:solidFill>
+              </a:rPr>
+              <a:t>☐</a:t>
+            </a:r>
+            <a:endParaRPr lang="en-US" sz="1400" dirty="0"/>
+          </a:p>
+        </p:txBody>
+      </p:sp>
+      <p:sp>
+        <p:nvSpPr>
+          <p:cNvPr id="8" name="Text 6"/>
+          <p:cNvSpPr/>
+          <p:nvPr/>
+        </p:nvSpPr>
+        <p:spPr>
+          <a:xfrm>
+            <a:off x="1234440" y="1051560"/>
+            <a:ext cx="6949440" cy="438912"/>
+          </a:xfrm>
+          <a:prstGeom prst="rect">
+            <a:avLst/>
+          </a:prstGeom>
+          <a:noFill/>
+          <a:ln/>
+        </p:spPr>
+        <p:txBody>
+          <a:bodyPr wrap="square" rtlCol="0" anchor="ctr"/>
+          <a:lstStyle/>
+          <a:p>
+            <a:pPr indent="0" marL="0">
+              <a:buNone/>
+            </a:pPr>
+            <a:r>
+              <a:rPr lang="en-US" sz="1300" dirty="0">
+                <a:solidFill>
+                  <a:srgbClr val="3D3A36"/>
                 </a:solidFill>
                 <a:latin typeface="Calibri" pitchFamily="34" charset="0"/>
                 <a:ea typeface="Calibri" pitchFamily="34" charset="-122"/>
                 <a:cs typeface="Calibri" pitchFamily="34" charset="-120"/>
               </a:rPr>
+              <a:t>I can use the probability scale (0 to 1)</a:t>
+            </a:r>
+            <a:endParaRPr lang="en-US" sz="1300" dirty="0"/>
+          </a:p>
+        </p:txBody>
+      </p:sp>
+      <p:sp>
+        <p:nvSpPr>
+          <p:cNvPr id="9" name="Shape 7"/>
+          <p:cNvSpPr/>
+          <p:nvPr/>
+        </p:nvSpPr>
+        <p:spPr>
+          <a:xfrm>
+            <a:off x="731520" y="1554480"/>
+            <a:ext cx="7680960" cy="438912"/>
+          </a:xfrm>
+          <a:prstGeom prst="rect">
+            <a:avLst/>
+          </a:prstGeom>
+          <a:solidFill>
+            <a:srgbClr val="F8F6F3"/>
+          </a:solidFill>
+          <a:ln/>
+        </p:spPr>
+      </p:sp>
+      <p:sp>
+        <p:nvSpPr>
+          <p:cNvPr id="10" name="Text 8"/>
+          <p:cNvSpPr/>
+          <p:nvPr/>
+        </p:nvSpPr>
+        <p:spPr>
+          <a:xfrm>
+            <a:off x="868680" y="1554480"/>
+            <a:ext cx="320040" cy="438912"/>
+          </a:xfrm>
+          <a:prstGeom prst="rect">
+            <a:avLst/>
+          </a:prstGeom>
+          <a:noFill/>
+          <a:ln/>
+        </p:spPr>
+        <p:txBody>
+          <a:bodyPr wrap="square" rtlCol="0" anchor="ctr"/>
+          <a:lstStyle/>
+          <a:p>
+            <a:pPr indent="0" marL="0">
+              <a:buNone/>
+            </a:pPr>
+            <a:r>
+              <a:rPr lang="en-US" sz="1400" dirty="0">
+                <a:solidFill>
+                  <a:srgbClr val="2A9D8F"/>
+                </a:solidFill>
+              </a:rPr>
+              <a:t>☐</a:t>
+            </a:r>
+            <a:endParaRPr lang="en-US" sz="1400" dirty="0"/>
+          </a:p>
+        </p:txBody>
+      </p:sp>
+      <p:sp>
+        <p:nvSpPr>
+          <p:cNvPr id="11" name="Text 9"/>
+          <p:cNvSpPr/>
+          <p:nvPr/>
+        </p:nvSpPr>
+        <p:spPr>
+          <a:xfrm>
+            <a:off x="1234440" y="1554480"/>
+            <a:ext cx="6949440" cy="438912"/>
+          </a:xfrm>
+          <a:prstGeom prst="rect">
+            <a:avLst/>
+          </a:prstGeom>
+          <a:noFill/>
+          <a:ln/>
+        </p:spPr>
+        <p:txBody>
+          <a:bodyPr wrap="square" rtlCol="0" anchor="ctr"/>
+          <a:lstStyle/>
+          <a:p>
+            <a:pPr indent="0" marL="0">
+              <a:buNone/>
+            </a:pPr>
+            <a:r>
+              <a:rPr lang="en-US" sz="1300" dirty="0">
+                <a:solidFill>
+                  <a:srgbClr val="3D3A36"/>
+                </a:solidFill>
+                <a:latin typeface="Calibri" pitchFamily="34" charset="0"/>
+                <a:ea typeface="Calibri" pitchFamily="34" charset="-122"/>
+                <a:cs typeface="Calibri" pitchFamily="34" charset="-120"/>
+              </a:rPr>
+              <a:t>I can calculate theoretical probability</a:t>
+            </a:r>
+            <a:endParaRPr lang="en-US" sz="1300" dirty="0"/>
+          </a:p>
+        </p:txBody>
+      </p:sp>
+      <p:sp>
+        <p:nvSpPr>
+          <p:cNvPr id="12" name="Shape 10"/>
+          <p:cNvSpPr/>
+          <p:nvPr/>
+        </p:nvSpPr>
+        <p:spPr>
+          <a:xfrm>
+            <a:off x="731520" y="2057400"/>
+            <a:ext cx="7680960" cy="438912"/>
+          </a:xfrm>
+          <a:prstGeom prst="rect">
+            <a:avLst/>
+          </a:prstGeom>
+          <a:solidFill>
+            <a:srgbClr val="FFFFFF"/>
+          </a:solidFill>
+          <a:ln/>
+        </p:spPr>
+      </p:sp>
+      <p:sp>
+        <p:nvSpPr>
+          <p:cNvPr id="13" name="Text 11"/>
+          <p:cNvSpPr/>
+          <p:nvPr/>
+        </p:nvSpPr>
+        <p:spPr>
+          <a:xfrm>
+            <a:off x="868680" y="2057400"/>
+            <a:ext cx="320040" cy="438912"/>
+          </a:xfrm>
+          <a:prstGeom prst="rect">
+            <a:avLst/>
+          </a:prstGeom>
+          <a:noFill/>
+          <a:ln/>
+        </p:spPr>
+        <p:txBody>
+          <a:bodyPr wrap="square" rtlCol="0" anchor="ctr"/>
+          <a:lstStyle/>
+          <a:p>
+            <a:pPr indent="0" marL="0">
+              <a:buNone/>
+            </a:pPr>
+            <a:r>
+              <a:rPr lang="en-US" sz="1400" dirty="0">
+                <a:solidFill>
+                  <a:srgbClr val="2A9D8F"/>
+                </a:solidFill>
+              </a:rPr>
+              <a:t>☐</a:t>
+            </a:r>
+            <a:endParaRPr lang="en-US" sz="1400" dirty="0"/>
+          </a:p>
+        </p:txBody>
+      </p:sp>
+      <p:sp>
+        <p:nvSpPr>
+          <p:cNvPr id="14" name="Text 12"/>
+          <p:cNvSpPr/>
+          <p:nvPr/>
+        </p:nvSpPr>
+        <p:spPr>
+          <a:xfrm>
+            <a:off x="1234440" y="2057400"/>
+            <a:ext cx="6949440" cy="438912"/>
+          </a:xfrm>
+          <a:prstGeom prst="rect">
+            <a:avLst/>
+          </a:prstGeom>
+          <a:noFill/>
+          <a:ln/>
+        </p:spPr>
+        <p:txBody>
+          <a:bodyPr wrap="square" rtlCol="0" anchor="ctr"/>
+          <a:lstStyle/>
+          <a:p>
+            <a:pPr indent="0" marL="0">
+              <a:buNone/>
+            </a:pPr>
+            <a:r>
+              <a:rPr lang="en-US" sz="1300" dirty="0">
+                <a:solidFill>
+                  <a:srgbClr val="3D3A36"/>
+                </a:solidFill>
+                <a:latin typeface="Calibri" pitchFamily="34" charset="0"/>
+                <a:ea typeface="Calibri" pitchFamily="34" charset="-122"/>
+                <a:cs typeface="Calibri" pitchFamily="34" charset="-120"/>
+              </a:rPr>
+              <a:t>I can express probability as a fraction, decimal, or percentage</a:t>
+            </a:r>
+            <a:endParaRPr lang="en-US" sz="1300" dirty="0"/>
+          </a:p>
+        </p:txBody>
+      </p:sp>
+      <p:sp>
+        <p:nvSpPr>
+          <p:cNvPr id="15" name="Shape 13"/>
+          <p:cNvSpPr/>
+          <p:nvPr/>
+        </p:nvSpPr>
+        <p:spPr>
+          <a:xfrm>
+            <a:off x="731520" y="2560320"/>
+            <a:ext cx="7680960" cy="438912"/>
+          </a:xfrm>
+          <a:prstGeom prst="rect">
+            <a:avLst/>
+          </a:prstGeom>
+          <a:solidFill>
+            <a:srgbClr val="F8F6F3"/>
+          </a:solidFill>
+          <a:ln/>
+        </p:spPr>
+      </p:sp>
+      <p:sp>
+        <p:nvSpPr>
+          <p:cNvPr id="16" name="Text 14"/>
+          <p:cNvSpPr/>
+          <p:nvPr/>
+        </p:nvSpPr>
+        <p:spPr>
+          <a:xfrm>
+            <a:off x="868680" y="2560320"/>
+            <a:ext cx="320040" cy="438912"/>
+          </a:xfrm>
+          <a:prstGeom prst="rect">
+            <a:avLst/>
+          </a:prstGeom>
+          <a:noFill/>
+          <a:ln/>
+        </p:spPr>
+        <p:txBody>
+          <a:bodyPr wrap="square" rtlCol="0" anchor="ctr"/>
+          <a:lstStyle/>
+          <a:p>
+            <a:pPr indent="0" marL="0">
+              <a:buNone/>
+            </a:pPr>
+            <a:r>
+              <a:rPr lang="en-US" sz="1400" dirty="0">
+                <a:solidFill>
+                  <a:srgbClr val="2A9D8F"/>
+                </a:solidFill>
+              </a:rPr>
+              <a:t>☐</a:t>
+            </a:r>
+            <a:endParaRPr lang="en-US" sz="1400" dirty="0"/>
+          </a:p>
+        </p:txBody>
+      </p:sp>
+      <p:sp>
+        <p:nvSpPr>
+          <p:cNvPr id="17" name="Text 15"/>
+          <p:cNvSpPr/>
+          <p:nvPr/>
+        </p:nvSpPr>
+        <p:spPr>
+          <a:xfrm>
+            <a:off x="1234440" y="2560320"/>
+            <a:ext cx="6949440" cy="438912"/>
+          </a:xfrm>
+          <a:prstGeom prst="rect">
+            <a:avLst/>
+          </a:prstGeom>
+          <a:noFill/>
+          <a:ln/>
+        </p:spPr>
+        <p:txBody>
+          <a:bodyPr wrap="square" rtlCol="0" anchor="ctr"/>
+          <a:lstStyle/>
+          <a:p>
+            <a:pPr indent="0" marL="0">
+              <a:buNone/>
+            </a:pPr>
+            <a:r>
+              <a:rPr lang="en-US" sz="1300" dirty="0">
+                <a:solidFill>
+                  <a:srgbClr val="3D3A36"/>
+                </a:solidFill>
+                <a:latin typeface="Calibri" pitchFamily="34" charset="0"/>
+                <a:ea typeface="Calibri" pitchFamily="34" charset="-122"/>
+                <a:cs typeface="Calibri" pitchFamily="34" charset="-120"/>
+              </a:rPr>
+              <a:t>I know that all probabilities add up to 1</a:t>
+            </a:r>
+            <a:endParaRPr lang="en-US" sz="1300" dirty="0"/>
+          </a:p>
+        </p:txBody>
+      </p:sp>
+      <p:sp>
+        <p:nvSpPr>
+          <p:cNvPr id="18" name="Shape 16"/>
+          <p:cNvSpPr/>
+          <p:nvPr/>
+        </p:nvSpPr>
+        <p:spPr>
+          <a:xfrm>
+            <a:off x="731520" y="3063240"/>
+            <a:ext cx="7680960" cy="438912"/>
+          </a:xfrm>
+          <a:prstGeom prst="rect">
+            <a:avLst/>
+          </a:prstGeom>
+          <a:solidFill>
+            <a:srgbClr val="FFFFFF"/>
+          </a:solidFill>
+          <a:ln/>
+        </p:spPr>
+      </p:sp>
+      <p:sp>
+        <p:nvSpPr>
+          <p:cNvPr id="19" name="Text 17"/>
+          <p:cNvSpPr/>
+          <p:nvPr/>
+        </p:nvSpPr>
+        <p:spPr>
+          <a:xfrm>
+            <a:off x="868680" y="3063240"/>
+            <a:ext cx="320040" cy="438912"/>
+          </a:xfrm>
+          <a:prstGeom prst="rect">
+            <a:avLst/>
+          </a:prstGeom>
+          <a:noFill/>
+          <a:ln/>
+        </p:spPr>
+        <p:txBody>
+          <a:bodyPr wrap="square" rtlCol="0" anchor="ctr"/>
+          <a:lstStyle/>
+          <a:p>
+            <a:pPr indent="0" marL="0">
+              <a:buNone/>
+            </a:pPr>
+            <a:r>
+              <a:rPr lang="en-US" sz="1400" dirty="0">
+                <a:solidFill>
+                  <a:srgbClr val="2A9D8F"/>
+                </a:solidFill>
+              </a:rPr>
+              <a:t>☐</a:t>
+            </a:r>
+            <a:endParaRPr lang="en-US" sz="1400" dirty="0"/>
+          </a:p>
+        </p:txBody>
+      </p:sp>
+      <p:sp>
+        <p:nvSpPr>
+          <p:cNvPr id="20" name="Text 18"/>
+          <p:cNvSpPr/>
+          <p:nvPr/>
+        </p:nvSpPr>
+        <p:spPr>
+          <a:xfrm>
+            <a:off x="1234440" y="3063240"/>
+            <a:ext cx="6949440" cy="438912"/>
+          </a:xfrm>
+          <a:prstGeom prst="rect">
+            <a:avLst/>
+          </a:prstGeom>
+          <a:noFill/>
+          <a:ln/>
+        </p:spPr>
+        <p:txBody>
+          <a:bodyPr wrap="square" rtlCol="0" anchor="ctr"/>
+          <a:lstStyle/>
+          <a:p>
+            <a:pPr indent="0" marL="0">
+              <a:buNone/>
+            </a:pPr>
+            <a:r>
+              <a:rPr lang="en-US" sz="1300" dirty="0">
+                <a:solidFill>
+                  <a:srgbClr val="3D3A36"/>
+                </a:solidFill>
+                <a:latin typeface="Calibri" pitchFamily="34" charset="0"/>
+                <a:ea typeface="Calibri" pitchFamily="34" charset="-122"/>
+                <a:cs typeface="Calibri" pitchFamily="34" charset="-120"/>
+              </a:rPr>
+              <a:t>I can find P(not happening) = 1 − P(happening)</a:t>
+            </a:r>
+            <a:endParaRPr lang="en-US" sz="1300" dirty="0"/>
+          </a:p>
+        </p:txBody>
+      </p:sp>
+      <p:sp>
+        <p:nvSpPr>
+          <p:cNvPr id="21" name="Shape 19"/>
+          <p:cNvSpPr/>
+          <p:nvPr/>
+        </p:nvSpPr>
+        <p:spPr>
+          <a:xfrm>
+            <a:off x="731520" y="3749040"/>
+            <a:ext cx="7680960" cy="594360"/>
+          </a:xfrm>
+          <a:prstGeom prst="rect">
+            <a:avLst/>
+          </a:prstGeom>
+          <a:solidFill>
+            <a:srgbClr val="E8F5F3"/>
+          </a:solidFill>
+          <a:ln/>
+          <a:effectLst>
+            <a:outerShdw sx="100000" sy="100000" kx="0" ky="0" algn="bl" rotWithShape="0" blurRad="50800" dist="25400" dir="8100000">
+              <a:srgbClr val="000000">
+                <a:alpha val="10000"/>
+              </a:srgbClr>
+            </a:outerShdw>
+          </a:effectLst>
+        </p:spPr>
+      </p:sp>
+      <p:sp>
+        <p:nvSpPr>
+          <p:cNvPr id="22" name="Text 20"/>
+          <p:cNvSpPr/>
+          <p:nvPr/>
+        </p:nvSpPr>
+        <p:spPr>
+          <a:xfrm>
+            <a:off x="914400" y="3749040"/>
+            <a:ext cx="7315200" cy="594360"/>
+          </a:xfrm>
+          <a:prstGeom prst="rect">
+            <a:avLst/>
+          </a:prstGeom>
+          <a:noFill/>
+          <a:ln/>
+        </p:spPr>
+        <p:txBody>
+          <a:bodyPr wrap="square" rtlCol="0" anchor="ctr"/>
+          <a:lstStyle/>
+          <a:p>
+            <a:pPr indent="0" marL="0">
+              <a:buNone/>
+            </a:pPr>
+            <a:r>
+              <a:rPr lang="en-US" sz="1200" b="1" dirty="0">
+                <a:solidFill>
+                  <a:srgbClr val="2A9D8F"/>
+                </a:solidFill>
+                <a:latin typeface="Calibri" pitchFamily="34" charset="0"/>
+                <a:ea typeface="Calibri" pitchFamily="34" charset="-122"/>
+                <a:cs typeface="Calibri" pitchFamily="34" charset="-120"/>
+              </a:rPr>
+              <a:t>Key Idea: </a:t>
+            </a:r>
+            <a:pPr indent="0" marL="0">
+              <a:buNone/>
+            </a:pPr>
+            <a:r>
+              <a:rPr lang="en-US" sz="1200" i="1" dirty="0">
+                <a:solidFill>
+                  <a:srgbClr val="3D3A36"/>
+                </a:solidFill>
+                <a:latin typeface="Calibri" pitchFamily="34" charset="0"/>
+                <a:ea typeface="Calibri" pitchFamily="34" charset="-122"/>
+                <a:cs typeface="Calibri" pitchFamily="34" charset="-120"/>
+              </a:rPr>
+              <a:t>Probability tells us how likely something is — always between 0 and 1.</a:t>
+            </a:r>
+            <a:endParaRPr lang="en-US" sz="1200" dirty="0"/>
+          </a:p>
+        </p:txBody>
+      </p:sp>
+    </p:spTree>
+  </p:cSld>
+  <p:clrMapOvr>
+    <a:masterClrMapping/>
+  </p:clrMapOvr>
+</p:sld>
+</file>
+
+<file path=ppt/slides/slide7.xml><?xml version="1.0" encoding="utf-8"?>
+<p:sld xmlns:a="http://schemas.openxmlformats.org/drawingml/2006/main" xmlns:r="http://schemas.openxmlformats.org/officeDocument/2006/relationships" xmlns:p="http://schemas.openxmlformats.org/presentationml/2006/main">
+  <p:cSld name="Slide 7">
+    <p:spTree>
+      <p:nvGrpSpPr>
+        <p:cNvPr id="1" name=""/>
+        <p:cNvGrpSpPr/>
+        <p:nvPr/>
+      </p:nvGrpSpPr>
+      <p:grpSpPr>
+        <a:xfrm>
+          <a:off x="0" y="0"/>
+          <a:ext cx="0" cy="0"/>
+          <a:chOff x="0" y="0"/>
+          <a:chExt cx="0" cy="0"/>
+        </a:xfrm>
+      </p:grpSpPr>
+      <p:sp>
+        <p:nvSpPr>
+          <p:cNvPr id="2" name="Shape 0"/>
+          <p:cNvSpPr/>
+          <p:nvPr/>
+        </p:nvSpPr>
+        <p:spPr>
+          <a:xfrm>
+            <a:off x="0" y="0"/>
+            <a:ext cx="9144000" cy="5143500"/>
+          </a:xfrm>
+          <a:prstGeom prst="rect">
+            <a:avLst/>
+          </a:prstGeom>
+          <a:solidFill>
+            <a:srgbClr val="1B2A4A"/>
+          </a:solidFill>
+          <a:ln/>
+        </p:spPr>
+      </p:sp>
+      <p:sp>
+        <p:nvSpPr>
+          <p:cNvPr id="3" name="Shape 1"/>
+          <p:cNvSpPr/>
+          <p:nvPr/>
+        </p:nvSpPr>
+        <p:spPr>
+          <a:xfrm>
+            <a:off x="0" y="4777740"/>
+            <a:ext cx="9144000" cy="365760"/>
+          </a:xfrm>
+          <a:prstGeom prst="rect">
+            <a:avLst/>
+          </a:prstGeom>
+          <a:solidFill>
+            <a:srgbClr val="2A9D8F"/>
+          </a:solidFill>
+          <a:ln/>
+        </p:spPr>
+      </p:sp>
+      <p:sp>
+        <p:nvSpPr>
+          <p:cNvPr id="4" name="Shape 2"/>
+          <p:cNvSpPr/>
+          <p:nvPr/>
+        </p:nvSpPr>
+        <p:spPr>
+          <a:xfrm>
+            <a:off x="-914400" y="-914400"/>
+            <a:ext cx="3657600" cy="3657600"/>
+          </a:xfrm>
+          <a:prstGeom prst="ellipse">
+            <a:avLst/>
+          </a:prstGeom>
+          <a:solidFill>
+            <a:srgbClr val="2A9D8F">
+              <a:alpha val="10000"/>
+            </a:srgbClr>
+          </a:solidFill>
+          <a:ln/>
+        </p:spPr>
+      </p:sp>
+      <p:sp>
+        <p:nvSpPr>
+          <p:cNvPr id="5" name="Text 3"/>
+          <p:cNvSpPr/>
+          <p:nvPr/>
+        </p:nvSpPr>
+        <p:spPr>
+          <a:xfrm>
+            <a:off x="731520" y="1463040"/>
+            <a:ext cx="7680960" cy="822960"/>
+          </a:xfrm>
+          <a:prstGeom prst="rect">
+            <a:avLst/>
+          </a:prstGeom>
+          <a:noFill/>
+          <a:ln/>
+        </p:spPr>
+        <p:txBody>
+          <a:bodyPr wrap="square" rtlCol="0" anchor="ctr"/>
+          <a:lstStyle/>
+          <a:p>
+            <a:pPr algn="ctr" indent="0" marL="0">
+              <a:buNone/>
+            </a:pPr>
+            <a:r>
+              <a:rPr lang="en-US" sz="3400" b="1" dirty="0">
+                <a:solidFill>
+                  <a:srgbClr val="FFFFFF"/>
+                </a:solidFill>
+                <a:latin typeface="Georgia" pitchFamily="34" charset="0"/>
+                <a:ea typeface="Georgia" pitchFamily="34" charset="-122"/>
+                <a:cs typeface="Georgia" pitchFamily="34" charset="-120"/>
+              </a:rPr>
+              <a:t>Review &amp; Practise</a:t>
+            </a:r>
+            <a:endParaRPr lang="en-US" sz="3400" dirty="0"/>
+          </a:p>
+        </p:txBody>
+      </p:sp>
+      <p:sp>
+        <p:nvSpPr>
+          <p:cNvPr id="6" name="Text 4"/>
+          <p:cNvSpPr/>
+          <p:nvPr/>
+        </p:nvSpPr>
+        <p:spPr>
+          <a:xfrm>
+            <a:off x="731520" y="2468880"/>
+            <a:ext cx="7680960" cy="457200"/>
+          </a:xfrm>
+          <a:prstGeom prst="rect">
+            <a:avLst/>
+          </a:prstGeom>
+          <a:noFill/>
+          <a:ln/>
+        </p:spPr>
+        <p:txBody>
+          <a:bodyPr wrap="square" rtlCol="0" anchor="ctr"/>
+          <a:lstStyle/>
+          <a:p>
+            <a:pPr algn="ctr" indent="0" marL="0">
+              <a:buNone/>
+            </a:pPr>
+            <a:r>
+              <a:rPr lang="en-US" sz="1800" dirty="0">
+                <a:solidFill>
+                  <a:srgbClr val="2A9D8F"/>
+                </a:solidFill>
+                <a:latin typeface="Calibri" pitchFamily="34" charset="0"/>
+                <a:ea typeface="Calibri" pitchFamily="34" charset="-122"/>
+                <a:cs typeface="Calibri" pitchFamily="34" charset="-120"/>
+              </a:rPr>
               <a:t>mrzocchi.com</a:t>
             </a:r>
-            <a:endParaRPr lang="en-US" sz="1100" dirty="0"/>
+            <a:endParaRPr lang="en-US" sz="1800" dirty="0"/>
+          </a:p>
+        </p:txBody>
+      </p:sp>
+      <p:sp>
+        <p:nvSpPr>
+          <p:cNvPr id="7" name="Text 5"/>
+          <p:cNvSpPr/>
+          <p:nvPr/>
+        </p:nvSpPr>
+        <p:spPr>
+          <a:xfrm>
+            <a:off x="731520" y="3108960"/>
+            <a:ext cx="7680960" cy="457200"/>
+          </a:xfrm>
+          <a:prstGeom prst="rect">
+            <a:avLst/>
+          </a:prstGeom>
+          <a:noFill/>
+          <a:ln/>
+        </p:spPr>
+        <p:txBody>
+          <a:bodyPr wrap="square" rtlCol="0" anchor="ctr"/>
+          <a:lstStyle/>
+          <a:p>
+            <a:pPr algn="ctr" indent="0" marL="0">
+              <a:buNone/>
+            </a:pPr>
+            <a:r>
+              <a:rPr lang="en-US" sz="1300" dirty="0">
+                <a:solidFill>
+                  <a:srgbClr val="9B9690"/>
+                </a:solidFill>
+                <a:latin typeface="Calibri" pitchFamily="34" charset="0"/>
+                <a:ea typeface="Calibri" pitchFamily="34" charset="-122"/>
+                <a:cs typeface="Calibri" pitchFamily="34" charset="-120"/>
+              </a:rPr>
+              <a:t>Use the Self-Quiz, Review Games, and Practice Builder to test yourself.</a:t>
+            </a:r>
+            <a:endParaRPr lang="en-US" sz="1300" dirty="0"/>
           </a:p>
         </p:txBody>
       </p:sp>

--- a/static/ppts/G6_Math_T5_Probability_Basics.pptx
+++ b/static/ppts/G6_Math_T5_Probability_Basics.pptx
@@ -16,8 +16,8 @@
   <p:notesMasterIdLst>
     <p:notesMasterId r:id="rId9"/>
   </p:notesMasterIdLst>
-  <p:sldSz cx="9144000" cy="5143500"/>
-  <p:notesSz cx="5143500" cy="9144000"/>
+  <p:sldSz cx="12192000" cy="6858000"/>
+  <p:notesSz cx="6858000" cy="12192000"/>
   <p:defaultTextStyle>
     <a:lvl1pPr marL="0" algn="l" defTabSz="914400" rtl="0" eaLnBrk="1" latinLnBrk="0" hangingPunct="1">
       <a:defRPr sz="1800" kern="1200">
@@ -1388,6 +1388,13 @@
 <file path=ppt/slides/slide1.xml><?xml version="1.0" encoding="utf-8"?>
 <p:sld xmlns:a="http://schemas.openxmlformats.org/drawingml/2006/main" xmlns:r="http://schemas.openxmlformats.org/officeDocument/2006/relationships" xmlns:p="http://schemas.openxmlformats.org/presentationml/2006/main">
   <p:cSld name="Slide 1">
+    <p:bg>
+      <p:bgPr>
+        <a:solidFill>
+          <a:srgbClr val="2A9D8F"/>
+        </a:solidFill>
+      </p:bgPr>
+    </p:bg>
     <p:spTree>
       <p:nvGrpSpPr>
         <p:cNvPr id="1" name=""/>
@@ -1410,55 +1417,15 @@
         </p:nvSpPr>
         <p:spPr>
           <a:xfrm>
-            <a:off x="0" y="0"/>
-            <a:ext cx="9144000" cy="5143500"/>
-          </a:xfrm>
-          <a:prstGeom prst="rect">
+            <a:off x="7772400" y="-914400"/>
+            <a:ext cx="3657600" cy="3657600"/>
+          </a:xfrm>
+          <a:prstGeom prst="ellipse">
             <a:avLst/>
           </a:prstGeom>
           <a:solidFill>
-            <a:srgbClr val="1B2A4A"/>
-          </a:solidFill>
-          <a:ln/>
-        </p:spPr>
-      </p:sp>
-      <p:sp>
-        <p:nvSpPr>
-          <p:cNvPr id="3" name="Shape 1"/>
-          <p:cNvSpPr/>
-          <p:nvPr/>
-        </p:nvSpPr>
-        <p:spPr>
-          <a:xfrm>
-            <a:off x="0" y="4777740"/>
-            <a:ext cx="9144000" cy="365760"/>
-          </a:xfrm>
-          <a:prstGeom prst="rect">
-            <a:avLst/>
-          </a:prstGeom>
-          <a:solidFill>
-            <a:srgbClr val="2A9D8F"/>
-          </a:solidFill>
-          <a:ln/>
-        </p:spPr>
-      </p:sp>
-      <p:sp>
-        <p:nvSpPr>
-          <p:cNvPr id="4" name="Shape 2"/>
-          <p:cNvSpPr/>
-          <p:nvPr/>
-        </p:nvSpPr>
-        <p:spPr>
-          <a:xfrm>
-            <a:off x="6858000" y="-1371600"/>
-            <a:ext cx="4572000" cy="4572000"/>
-          </a:xfrm>
-          <a:prstGeom prst="ellipse">
-            <a:avLst/>
-          </a:prstGeom>
-          <a:solidFill>
-            <a:srgbClr val="2A9D8F">
-              <a:alpha val="12000"/>
+            <a:srgbClr val="FFFFFF">
+              <a:alpha val="8000"/>
             </a:srgbClr>
           </a:solidFill>
           <a:ln/>
@@ -1466,14 +1433,14 @@
       </p:sp>
       <p:sp>
         <p:nvSpPr>
-          <p:cNvPr id="5" name="Text 3"/>
-          <p:cNvSpPr/>
-          <p:nvPr/>
-        </p:nvSpPr>
-        <p:spPr>
-          <a:xfrm>
-            <a:off x="731520" y="914400"/>
-            <a:ext cx="7680960" cy="457200"/>
+          <p:cNvPr id="3" name="Text 1"/>
+          <p:cNvSpPr/>
+          <p:nvPr/>
+        </p:nvSpPr>
+        <p:spPr>
+          <a:xfrm>
+            <a:off x="731520" y="548640"/>
+            <a:ext cx="7315200" cy="365760"/>
           </a:xfrm>
           <a:prstGeom prst="rect">
             <a:avLst/>
@@ -1489,46 +1456,49 @@
               <a:buNone/>
             </a:pPr>
             <a:r>
-              <a:rPr lang="en-US" sz="1300" b="1" spc="500" kern="0" dirty="0">
-                <a:solidFill>
-                  <a:srgbClr val="2A9D8F"/>
-                </a:solidFill>
-                <a:latin typeface="Calibri" pitchFamily="34" charset="0"/>
-                <a:ea typeface="Calibri" pitchFamily="34" charset="-122"/>
-                <a:cs typeface="Calibri" pitchFamily="34" charset="-120"/>
+              <a:rPr lang="en-US" sz="1100" b="1" dirty="0">
+                <a:solidFill>
+                  <a:srgbClr val="F2D68A"/>
+                </a:solidFill>
+                <a:latin typeface="Arial" pitchFamily="34" charset="0"/>
+                <a:ea typeface="Arial" pitchFamily="34" charset="-122"/>
+                <a:cs typeface="Arial" pitchFamily="34" charset="-120"/>
               </a:rPr>
               <a:t>GRADE 6 MATHEMATICS</a:t>
             </a:r>
-            <a:endParaRPr lang="en-US" sz="1300" dirty="0"/>
-          </a:p>
-        </p:txBody>
-      </p:sp>
-      <p:sp>
-        <p:nvSpPr>
-          <p:cNvPr id="6" name="Text 4"/>
-          <p:cNvSpPr/>
-          <p:nvPr/>
-        </p:nvSpPr>
-        <p:spPr>
-          <a:xfrm>
-            <a:off x="731520" y="1463040"/>
-            <a:ext cx="6858000" cy="1645920"/>
-          </a:xfrm>
-          <a:prstGeom prst="rect">
-            <a:avLst/>
-          </a:prstGeom>
-          <a:noFill/>
-          <a:ln/>
-        </p:spPr>
-        <p:txBody>
-          <a:bodyPr wrap="square" rtlCol="0" anchor="t"/>
+            <a:endParaRPr lang="en-US" sz="1100" dirty="0"/>
+          </a:p>
+        </p:txBody>
+      </p:sp>
+      <p:sp>
+        <p:nvSpPr>
+          <p:cNvPr id="4" name="Text 2"/>
+          <p:cNvSpPr/>
+          <p:nvPr/>
+        </p:nvSpPr>
+        <p:spPr>
+          <a:xfrm>
+            <a:off x="731520" y="1371600"/>
+            <a:ext cx="9144000" cy="1645920"/>
+          </a:xfrm>
+          <a:prstGeom prst="rect">
+            <a:avLst/>
+          </a:prstGeom>
+          <a:noFill/>
+          <a:ln/>
+        </p:spPr>
+        <p:txBody>
+          <a:bodyPr wrap="square" rtlCol="0" anchor="ctr"/>
           <a:lstStyle/>
           <a:p>
             <a:pPr indent="0" marL="0">
+              <a:lnSpc>
+                <a:spcPct val="110000"/>
+              </a:lnSpc>
               <a:buNone/>
             </a:pPr>
             <a:r>
-              <a:rPr lang="en-US" sz="3800" b="1" dirty="0">
+              <a:rPr lang="en-US" sz="3600" b="1" dirty="0">
                 <a:solidFill>
                   <a:srgbClr val="FFFFFF"/>
                 </a:solidFill>
@@ -1536,39 +1506,63 @@
                 <a:ea typeface="Georgia" pitchFamily="34" charset="-122"/>
                 <a:cs typeface="Georgia" pitchFamily="34" charset="-120"/>
               </a:rPr>
-              <a:t>Introduction to</a:t>
-            </a:r>
-            <a:endParaRPr lang="en-US" sz="3800" dirty="0"/>
-          </a:p>
+              <a:t>Introduction to Probability</a:t>
+            </a:r>
+            <a:endParaRPr lang="en-US" sz="3600" dirty="0"/>
+          </a:p>
+        </p:txBody>
+      </p:sp>
+      <p:sp>
+        <p:nvSpPr>
+          <p:cNvPr id="5" name="Text 3"/>
+          <p:cNvSpPr/>
+          <p:nvPr/>
+        </p:nvSpPr>
+        <p:spPr>
+          <a:xfrm>
+            <a:off x="731520" y="3200400"/>
+            <a:ext cx="7315200" cy="548640"/>
+          </a:xfrm>
+          <a:prstGeom prst="rect">
+            <a:avLst/>
+          </a:prstGeom>
+          <a:noFill/>
+          <a:ln/>
+        </p:spPr>
+        <p:txBody>
+          <a:bodyPr wrap="square" rtlCol="0" anchor="ctr"/>
+          <a:lstStyle/>
           <a:p>
             <a:pPr indent="0" marL="0">
               <a:buNone/>
             </a:pPr>
             <a:r>
-              <a:rPr lang="en-US" sz="3800" b="1" dirty="0">
-                <a:solidFill>
-                  <a:srgbClr val="FFFFFF"/>
-                </a:solidFill>
-                <a:latin typeface="Georgia" pitchFamily="34" charset="0"/>
-                <a:ea typeface="Georgia" pitchFamily="34" charset="-122"/>
-                <a:cs typeface="Georgia" pitchFamily="34" charset="-120"/>
-              </a:rPr>
-              <a:t>Probability</a:t>
-            </a:r>
-            <a:endParaRPr lang="en-US" sz="3800" dirty="0"/>
-          </a:p>
-        </p:txBody>
-      </p:sp>
-      <p:sp>
-        <p:nvSpPr>
-          <p:cNvPr id="7" name="Text 5"/>
-          <p:cNvSpPr/>
-          <p:nvPr/>
-        </p:nvSpPr>
-        <p:spPr>
-          <a:xfrm>
-            <a:off x="731520" y="3200400"/>
-            <a:ext cx="6400800" cy="548640"/>
+              <a:rPr lang="en-US" sz="1600" dirty="0">
+                <a:solidFill>
+                  <a:srgbClr val="FFFFFF">
+                    <a:alpha val="65000"/>
+                  </a:srgbClr>
+                </a:solidFill>
+                <a:latin typeface="Arial" pitchFamily="34" charset="0"/>
+                <a:ea typeface="Arial" pitchFamily="34" charset="-122"/>
+                <a:cs typeface="Arial" pitchFamily="34" charset="-120"/>
+              </a:rPr>
+              <a:t>How likely is something to happen?</a:t>
+            </a:r>
+            <a:endParaRPr lang="en-US" sz="1600" dirty="0"/>
+          </a:p>
+        </p:txBody>
+      </p:sp>
+      <p:sp>
+        <p:nvSpPr>
+          <p:cNvPr id="6" name="Text 4"/>
+          <p:cNvSpPr/>
+          <p:nvPr/>
+        </p:nvSpPr>
+        <p:spPr>
+          <a:xfrm>
+            <a:off x="731520" y="4389120"/>
+            <a:ext cx="2743200" cy="320040"/>
           </a:xfrm>
           <a:prstGeom prst="rect">
             <a:avLst/>
@@ -1584,56 +1578,19 @@
               <a:buNone/>
             </a:pPr>
             <a:r>
-              <a:rPr lang="en-US" sz="1600" i="1" dirty="0">
-                <a:solidFill>
-                  <a:srgbClr val="9B9690"/>
-                </a:solidFill>
-                <a:latin typeface="Calibri" pitchFamily="34" charset="0"/>
-                <a:ea typeface="Calibri" pitchFamily="34" charset="-122"/>
-                <a:cs typeface="Calibri" pitchFamily="34" charset="-120"/>
-              </a:rPr>
-              <a:t>How likely is it to happen?</a:t>
-            </a:r>
-            <a:endParaRPr lang="en-US" sz="1600" dirty="0"/>
-          </a:p>
-        </p:txBody>
-      </p:sp>
-      <p:sp>
-        <p:nvSpPr>
-          <p:cNvPr id="8" name="Text 6"/>
-          <p:cNvSpPr/>
-          <p:nvPr/>
-        </p:nvSpPr>
-        <p:spPr>
-          <a:xfrm>
-            <a:off x="731520" y="4297680"/>
-            <a:ext cx="2743200" cy="365760"/>
-          </a:xfrm>
-          <a:prstGeom prst="rect">
-            <a:avLst/>
-          </a:prstGeom>
-          <a:noFill/>
-          <a:ln/>
-        </p:spPr>
-        <p:txBody>
-          <a:bodyPr wrap="square" rtlCol="0" anchor="ctr"/>
-          <a:lstStyle/>
-          <a:p>
-            <a:pPr indent="0" marL="0">
-              <a:buNone/>
-            </a:pPr>
-            <a:r>
-              <a:rPr lang="en-US" sz="1100" dirty="0">
-                <a:solidFill>
-                  <a:srgbClr val="9B9690"/>
-                </a:solidFill>
-                <a:latin typeface="Calibri" pitchFamily="34" charset="0"/>
-                <a:ea typeface="Calibri" pitchFamily="34" charset="-122"/>
-                <a:cs typeface="Calibri" pitchFamily="34" charset="-120"/>
+              <a:rPr lang="en-US" sz="1000" dirty="0">
+                <a:solidFill>
+                  <a:srgbClr val="FFFFFF">
+                    <a:alpha val="40000"/>
+                  </a:srgbClr>
+                </a:solidFill>
+                <a:latin typeface="Arial" pitchFamily="34" charset="0"/>
+                <a:ea typeface="Arial" pitchFamily="34" charset="-122"/>
+                <a:cs typeface="Arial" pitchFamily="34" charset="-120"/>
               </a:rPr>
               <a:t>mrzocchi.com</a:t>
             </a:r>
-            <a:endParaRPr lang="en-US" sz="1100" dirty="0"/>
+            <a:endParaRPr lang="en-US" sz="1000" dirty="0"/>
           </a:p>
         </p:txBody>
       </p:sp>
@@ -1678,204 +1635,275 @@
         <p:spPr>
           <a:xfrm>
             <a:off x="0" y="0"/>
-            <a:ext cx="9144000" cy="822960"/>
-          </a:xfrm>
-          <a:prstGeom prst="rect">
-            <a:avLst/>
+            <a:ext cx="73152" cy="5148072"/>
+          </a:xfrm>
+          <a:prstGeom prst="rect">
+            <a:avLst/>
+          </a:prstGeom>
+          <a:solidFill>
+            <a:srgbClr val="2A9D8F"/>
+          </a:solidFill>
+          <a:ln/>
+        </p:spPr>
+      </p:sp>
+      <p:sp>
+        <p:nvSpPr>
+          <p:cNvPr id="3" name="Text 1"/>
+          <p:cNvSpPr/>
+          <p:nvPr/>
+        </p:nvSpPr>
+        <p:spPr>
+          <a:xfrm>
+            <a:off x="548640" y="274320"/>
+            <a:ext cx="9144000" cy="640080"/>
+          </a:xfrm>
+          <a:prstGeom prst="rect">
+            <a:avLst/>
+          </a:prstGeom>
+          <a:noFill/>
+          <a:ln/>
+        </p:spPr>
+        <p:txBody>
+          <a:bodyPr wrap="square" rtlCol="0" anchor="ctr"/>
+          <a:lstStyle/>
+          <a:p>
+            <a:pPr indent="0" marL="0">
+              <a:buNone/>
+            </a:pPr>
+            <a:r>
+              <a:rPr lang="en-US" sz="2400" b="1" dirty="0">
+                <a:solidFill>
+                  <a:srgbClr val="1B2A4A"/>
+                </a:solidFill>
+                <a:latin typeface="Georgia" pitchFamily="34" charset="0"/>
+                <a:ea typeface="Georgia" pitchFamily="34" charset="-122"/>
+                <a:cs typeface="Georgia" pitchFamily="34" charset="-120"/>
+              </a:rPr>
+              <a:t>Key Vocabulary</a:t>
+            </a:r>
+            <a:endParaRPr lang="en-US" sz="2400" dirty="0"/>
+          </a:p>
+        </p:txBody>
+      </p:sp>
+      <p:sp>
+        <p:nvSpPr>
+          <p:cNvPr id="4" name="Shape 2"/>
+          <p:cNvSpPr/>
+          <p:nvPr/>
+        </p:nvSpPr>
+        <p:spPr>
+          <a:xfrm>
+            <a:off x="548640" y="960120"/>
+            <a:ext cx="2286000" cy="36576"/>
+          </a:xfrm>
+          <a:prstGeom prst="rect">
+            <a:avLst/>
+          </a:prstGeom>
+          <a:solidFill>
+            <a:srgbClr val="2A9D8F"/>
+          </a:solidFill>
+          <a:ln/>
+        </p:spPr>
+      </p:sp>
+      <p:sp>
+        <p:nvSpPr>
+          <p:cNvPr id="5" name="Shape 3"/>
+          <p:cNvSpPr/>
+          <p:nvPr/>
+        </p:nvSpPr>
+        <p:spPr>
+          <a:xfrm>
+            <a:off x="548640" y="1234440"/>
+            <a:ext cx="3200400" cy="914400"/>
+          </a:xfrm>
+          <a:prstGeom prst="roundRect">
+            <a:avLst>
+              <a:gd name="adj" fmla="val 10000"/>
+            </a:avLst>
           </a:prstGeom>
           <a:solidFill>
             <a:srgbClr val="FFFFFF"/>
           </a:solidFill>
-          <a:ln/>
-        </p:spPr>
-      </p:sp>
-      <p:sp>
-        <p:nvSpPr>
-          <p:cNvPr id="3" name="Shape 1"/>
-          <p:cNvSpPr/>
-          <p:nvPr/>
-        </p:nvSpPr>
-        <p:spPr>
-          <a:xfrm>
-            <a:off x="0" y="804672"/>
-            <a:ext cx="9144000" cy="27432"/>
-          </a:xfrm>
-          <a:prstGeom prst="rect">
-            <a:avLst/>
-          </a:prstGeom>
-          <a:solidFill>
-            <a:srgbClr val="E5E2DC"/>
-          </a:solidFill>
-          <a:ln/>
-        </p:spPr>
-      </p:sp>
-      <p:sp>
-        <p:nvSpPr>
-          <p:cNvPr id="4" name="Shape 2"/>
-          <p:cNvSpPr/>
-          <p:nvPr/>
-        </p:nvSpPr>
-        <p:spPr>
-          <a:xfrm>
-            <a:off x="548640" y="201168"/>
-            <a:ext cx="54864" cy="420624"/>
-          </a:xfrm>
-          <a:prstGeom prst="rect">
-            <a:avLst/>
-          </a:prstGeom>
-          <a:solidFill>
-            <a:srgbClr val="2A9D8F"/>
-          </a:solidFill>
-          <a:ln/>
-        </p:spPr>
-      </p:sp>
-      <p:sp>
-        <p:nvSpPr>
-          <p:cNvPr id="5" name="Text 3"/>
-          <p:cNvSpPr/>
-          <p:nvPr/>
-        </p:nvSpPr>
-        <p:spPr>
-          <a:xfrm>
-            <a:off x="777240" y="137160"/>
-            <a:ext cx="7772400" cy="548640"/>
-          </a:xfrm>
-          <a:prstGeom prst="rect">
-            <a:avLst/>
-          </a:prstGeom>
-          <a:noFill/>
-          <a:ln/>
-        </p:spPr>
-        <p:txBody>
-          <a:bodyPr wrap="square" lIns="0" tIns="0" rIns="0" bIns="0" rtlCol="0" anchor="ctr"/>
+          <a:ln w="9525">
+            <a:solidFill>
+              <a:srgbClr val="E5E2DC"/>
+            </a:solidFill>
+            <a:prstDash val="solid"/>
+          </a:ln>
+        </p:spPr>
+      </p:sp>
+      <p:sp>
+        <p:nvSpPr>
+          <p:cNvPr id="6" name="Text 4"/>
+          <p:cNvSpPr/>
+          <p:nvPr/>
+        </p:nvSpPr>
+        <p:spPr>
+          <a:xfrm>
+            <a:off x="685800" y="1307592"/>
+            <a:ext cx="2926080" cy="320040"/>
+          </a:xfrm>
+          <a:prstGeom prst="rect">
+            <a:avLst/>
+          </a:prstGeom>
+          <a:noFill/>
+          <a:ln/>
+        </p:spPr>
+        <p:txBody>
+          <a:bodyPr wrap="square" rtlCol="0" anchor="ctr"/>
           <a:lstStyle/>
           <a:p>
             <a:pPr indent="0" marL="0">
               <a:buNone/>
             </a:pPr>
             <a:r>
-              <a:rPr lang="en-US" sz="2000" b="1" dirty="0">
-                <a:solidFill>
-                  <a:srgbClr val="1B2A4A"/>
+              <a:rPr lang="en-US" sz="1400" b="1" dirty="0">
+                <a:solidFill>
+                  <a:srgbClr val="2A9D8F"/>
                 </a:solidFill>
                 <a:latin typeface="Georgia" pitchFamily="34" charset="0"/>
                 <a:ea typeface="Georgia" pitchFamily="34" charset="-122"/>
                 <a:cs typeface="Georgia" pitchFamily="34" charset="-120"/>
               </a:rPr>
-              <a:t>Key Vocabulary</a:t>
-            </a:r>
-            <a:endParaRPr lang="en-US" sz="2000" dirty="0"/>
-          </a:p>
-        </p:txBody>
-      </p:sp>
-      <p:sp>
-        <p:nvSpPr>
-          <p:cNvPr id="6" name="Shape 4"/>
-          <p:cNvSpPr/>
-          <p:nvPr/>
-        </p:nvSpPr>
-        <p:spPr>
-          <a:xfrm>
-            <a:off x="731520" y="1051560"/>
-            <a:ext cx="3657600" cy="658368"/>
-          </a:xfrm>
-          <a:prstGeom prst="rect">
-            <a:avLst/>
+              <a:t>Probability</a:t>
+            </a:r>
+            <a:endParaRPr lang="en-US" sz="1400" dirty="0"/>
+          </a:p>
+        </p:txBody>
+      </p:sp>
+      <p:sp>
+        <p:nvSpPr>
+          <p:cNvPr id="7" name="Text 5"/>
+          <p:cNvSpPr/>
+          <p:nvPr/>
+        </p:nvSpPr>
+        <p:spPr>
+          <a:xfrm>
+            <a:off x="685800" y="1645920"/>
+            <a:ext cx="2926080" cy="457200"/>
+          </a:xfrm>
+          <a:prstGeom prst="rect">
+            <a:avLst/>
+          </a:prstGeom>
+          <a:noFill/>
+          <a:ln/>
+        </p:spPr>
+        <p:txBody>
+          <a:bodyPr wrap="square" rtlCol="0" anchor="ctr"/>
+          <a:lstStyle/>
+          <a:p>
+            <a:pPr indent="0" marL="0">
+              <a:lnSpc>
+                <a:spcPct val="130000"/>
+              </a:lnSpc>
+              <a:buNone/>
+            </a:pPr>
+            <a:r>
+              <a:rPr lang="en-US" sz="1100" dirty="0">
+                <a:solidFill>
+                  <a:srgbClr val="6B6660"/>
+                </a:solidFill>
+                <a:latin typeface="Arial" pitchFamily="34" charset="0"/>
+                <a:ea typeface="Arial" pitchFamily="34" charset="-122"/>
+                <a:cs typeface="Arial" pitchFamily="34" charset="-120"/>
+              </a:rPr>
+              <a:t>The chance of an event happening — between 0 and 1.</a:t>
+            </a:r>
+            <a:endParaRPr lang="en-US" sz="1100" dirty="0"/>
+          </a:p>
+        </p:txBody>
+      </p:sp>
+      <p:sp>
+        <p:nvSpPr>
+          <p:cNvPr id="8" name="Shape 6"/>
+          <p:cNvSpPr/>
+          <p:nvPr/>
+        </p:nvSpPr>
+        <p:spPr>
+          <a:xfrm>
+            <a:off x="4023360" y="1234440"/>
+            <a:ext cx="3200400" cy="914400"/>
+          </a:xfrm>
+          <a:prstGeom prst="roundRect">
+            <a:avLst>
+              <a:gd name="adj" fmla="val 10000"/>
+            </a:avLst>
           </a:prstGeom>
           <a:solidFill>
             <a:srgbClr val="FFFFFF"/>
           </a:solidFill>
-          <a:ln/>
-          <a:effectLst>
-            <a:outerShdw sx="100000" sy="100000" kx="0" ky="0" algn="bl" rotWithShape="0" blurRad="50800" dist="25400" dir="8100000">
-              <a:srgbClr val="000000">
-                <a:alpha val="10000"/>
-              </a:srgbClr>
-            </a:outerShdw>
-          </a:effectLst>
-        </p:spPr>
-      </p:sp>
-      <p:sp>
-        <p:nvSpPr>
-          <p:cNvPr id="7" name="Shape 5"/>
-          <p:cNvSpPr/>
-          <p:nvPr/>
-        </p:nvSpPr>
-        <p:spPr>
-          <a:xfrm>
-            <a:off x="731520" y="1051560"/>
-            <a:ext cx="54864" cy="658368"/>
-          </a:xfrm>
-          <a:prstGeom prst="rect">
-            <a:avLst/>
-          </a:prstGeom>
-          <a:solidFill>
-            <a:srgbClr val="2A9D8F"/>
-          </a:solidFill>
-          <a:ln/>
-        </p:spPr>
-      </p:sp>
-      <p:sp>
-        <p:nvSpPr>
-          <p:cNvPr id="8" name="Text 6"/>
-          <p:cNvSpPr/>
-          <p:nvPr/>
-        </p:nvSpPr>
-        <p:spPr>
-          <a:xfrm>
-            <a:off x="914400" y="1051560"/>
-            <a:ext cx="1463040" cy="658368"/>
-          </a:xfrm>
-          <a:prstGeom prst="rect">
-            <a:avLst/>
-          </a:prstGeom>
-          <a:noFill/>
-          <a:ln/>
-        </p:spPr>
-        <p:txBody>
-          <a:bodyPr wrap="square" lIns="0" tIns="0" rIns="0" bIns="0" rtlCol="0" anchor="ctr"/>
+          <a:ln w="9525">
+            <a:solidFill>
+              <a:srgbClr val="E5E2DC"/>
+            </a:solidFill>
+            <a:prstDash val="solid"/>
+          </a:ln>
+        </p:spPr>
+      </p:sp>
+      <p:sp>
+        <p:nvSpPr>
+          <p:cNvPr id="9" name="Text 7"/>
+          <p:cNvSpPr/>
+          <p:nvPr/>
+        </p:nvSpPr>
+        <p:spPr>
+          <a:xfrm>
+            <a:off x="4160520" y="1307592"/>
+            <a:ext cx="2926080" cy="320040"/>
+          </a:xfrm>
+          <a:prstGeom prst="rect">
+            <a:avLst/>
+          </a:prstGeom>
+          <a:noFill/>
+          <a:ln/>
+        </p:spPr>
+        <p:txBody>
+          <a:bodyPr wrap="square" rtlCol="0" anchor="ctr"/>
           <a:lstStyle/>
           <a:p>
             <a:pPr indent="0" marL="0">
               <a:buNone/>
             </a:pPr>
             <a:r>
-              <a:rPr lang="en-US" sz="1300" b="1" dirty="0">
-                <a:solidFill>
-                  <a:srgbClr val="1B2A4A"/>
+              <a:rPr lang="en-US" sz="1400" b="1" dirty="0">
+                <a:solidFill>
+                  <a:srgbClr val="2A9D8F"/>
                 </a:solidFill>
                 <a:latin typeface="Georgia" pitchFamily="34" charset="0"/>
                 <a:ea typeface="Georgia" pitchFamily="34" charset="-122"/>
                 <a:cs typeface="Georgia" pitchFamily="34" charset="-120"/>
               </a:rPr>
-              <a:t>Probability</a:t>
-            </a:r>
-            <a:endParaRPr lang="en-US" sz="1300" dirty="0"/>
-          </a:p>
-        </p:txBody>
-      </p:sp>
-      <p:sp>
-        <p:nvSpPr>
-          <p:cNvPr id="9" name="Text 7"/>
-          <p:cNvSpPr/>
-          <p:nvPr/>
-        </p:nvSpPr>
-        <p:spPr>
-          <a:xfrm>
-            <a:off x="2377440" y="1051560"/>
-            <a:ext cx="1920240" cy="658368"/>
-          </a:xfrm>
-          <a:prstGeom prst="rect">
-            <a:avLst/>
-          </a:prstGeom>
-          <a:noFill/>
-          <a:ln/>
-        </p:spPr>
-        <p:txBody>
-          <a:bodyPr wrap="square" lIns="0" tIns="0" rIns="0" bIns="0" rtlCol="0" anchor="ctr"/>
+              <a:t>Event</a:t>
+            </a:r>
+            <a:endParaRPr lang="en-US" sz="1400" dirty="0"/>
+          </a:p>
+        </p:txBody>
+      </p:sp>
+      <p:sp>
+        <p:nvSpPr>
+          <p:cNvPr id="10" name="Text 8"/>
+          <p:cNvSpPr/>
+          <p:nvPr/>
+        </p:nvSpPr>
+        <p:spPr>
+          <a:xfrm>
+            <a:off x="4160520" y="1645920"/>
+            <a:ext cx="2926080" cy="457200"/>
+          </a:xfrm>
+          <a:prstGeom prst="rect">
+            <a:avLst/>
+          </a:prstGeom>
+          <a:noFill/>
+          <a:ln/>
+        </p:spPr>
+        <p:txBody>
+          <a:bodyPr wrap="square" rtlCol="0" anchor="ctr"/>
           <a:lstStyle/>
           <a:p>
             <a:pPr indent="0" marL="0">
+              <a:lnSpc>
+                <a:spcPct val="130000"/>
+              </a:lnSpc>
               <a:buNone/>
             </a:pPr>
             <a:r>
@@ -1883,11 +1911,11 @@
                 <a:solidFill>
                   <a:srgbClr val="6B6660"/>
                 </a:solidFill>
-                <a:latin typeface="Calibri" pitchFamily="34" charset="0"/>
-                <a:ea typeface="Calibri" pitchFamily="34" charset="-122"/>
-                <a:cs typeface="Calibri" pitchFamily="34" charset="-120"/>
-              </a:rPr>
-              <a:t>How likely an event is to happen</a:t>
+                <a:latin typeface="Arial" pitchFamily="34" charset="0"/>
+                <a:ea typeface="Arial" pitchFamily="34" charset="-122"/>
+                <a:cs typeface="Arial" pitchFamily="34" charset="-120"/>
+              </a:rPr>
+              <a:t>A specific outcome or set of outcomes.</a:t>
             </a:r>
             <a:endParaRPr lang="en-US" sz="1100" dirty="0"/>
           </a:p>
@@ -1895,49 +1923,29 @@
       </p:sp>
       <p:sp>
         <p:nvSpPr>
-          <p:cNvPr id="10" name="Shape 8"/>
-          <p:cNvSpPr/>
-          <p:nvPr/>
-        </p:nvSpPr>
-        <p:spPr>
-          <a:xfrm>
-            <a:off x="4754880" y="1051560"/>
-            <a:ext cx="3657600" cy="658368"/>
-          </a:xfrm>
-          <a:prstGeom prst="rect">
-            <a:avLst/>
+          <p:cNvPr id="11" name="Shape 9"/>
+          <p:cNvSpPr/>
+          <p:nvPr/>
+        </p:nvSpPr>
+        <p:spPr>
+          <a:xfrm>
+            <a:off x="7498080" y="1234440"/>
+            <a:ext cx="3200400" cy="914400"/>
+          </a:xfrm>
+          <a:prstGeom prst="roundRect">
+            <a:avLst>
+              <a:gd name="adj" fmla="val 10000"/>
+            </a:avLst>
           </a:prstGeom>
           <a:solidFill>
             <a:srgbClr val="FFFFFF"/>
           </a:solidFill>
-          <a:ln/>
-          <a:effectLst>
-            <a:outerShdw sx="100000" sy="100000" kx="0" ky="0" algn="bl" rotWithShape="0" blurRad="50800" dist="25400" dir="8100000">
-              <a:srgbClr val="000000">
-                <a:alpha val="10000"/>
-              </a:srgbClr>
-            </a:outerShdw>
-          </a:effectLst>
-        </p:spPr>
-      </p:sp>
-      <p:sp>
-        <p:nvSpPr>
-          <p:cNvPr id="11" name="Shape 9"/>
-          <p:cNvSpPr/>
-          <p:nvPr/>
-        </p:nvSpPr>
-        <p:spPr>
-          <a:xfrm>
-            <a:off x="4754880" y="1051560"/>
-            <a:ext cx="54864" cy="658368"/>
-          </a:xfrm>
-          <a:prstGeom prst="rect">
-            <a:avLst/>
-          </a:prstGeom>
-          <a:solidFill>
-            <a:srgbClr val="2A9D8F"/>
-          </a:solidFill>
-          <a:ln/>
+          <a:ln w="9525">
+            <a:solidFill>
+              <a:srgbClr val="E5E2DC"/>
+            </a:solidFill>
+            <a:prstDash val="solid"/>
+          </a:ln>
         </p:spPr>
       </p:sp>
       <p:sp>
@@ -1948,34 +1956,34 @@
         </p:nvSpPr>
         <p:spPr>
           <a:xfrm>
-            <a:off x="4937760" y="1051560"/>
-            <a:ext cx="1463040" cy="658368"/>
-          </a:xfrm>
-          <a:prstGeom prst="rect">
-            <a:avLst/>
-          </a:prstGeom>
-          <a:noFill/>
-          <a:ln/>
-        </p:spPr>
-        <p:txBody>
-          <a:bodyPr wrap="square" lIns="0" tIns="0" rIns="0" bIns="0" rtlCol="0" anchor="ctr"/>
+            <a:off x="7635240" y="1307592"/>
+            <a:ext cx="2926080" cy="320040"/>
+          </a:xfrm>
+          <a:prstGeom prst="rect">
+            <a:avLst/>
+          </a:prstGeom>
+          <a:noFill/>
+          <a:ln/>
+        </p:spPr>
+        <p:txBody>
+          <a:bodyPr wrap="square" rtlCol="0" anchor="ctr"/>
           <a:lstStyle/>
           <a:p>
             <a:pPr indent="0" marL="0">
               <a:buNone/>
             </a:pPr>
             <a:r>
-              <a:rPr lang="en-US" sz="1300" b="1" dirty="0">
-                <a:solidFill>
-                  <a:srgbClr val="1B2A4A"/>
+              <a:rPr lang="en-US" sz="1400" b="1" dirty="0">
+                <a:solidFill>
+                  <a:srgbClr val="2A9D8F"/>
                 </a:solidFill>
                 <a:latin typeface="Georgia" pitchFamily="34" charset="0"/>
                 <a:ea typeface="Georgia" pitchFamily="34" charset="-122"/>
                 <a:cs typeface="Georgia" pitchFamily="34" charset="-120"/>
               </a:rPr>
-              <a:t>Event</a:t>
-            </a:r>
-            <a:endParaRPr lang="en-US" sz="1300" dirty="0"/>
+              <a:t>Outcome</a:t>
+            </a:r>
+            <a:endParaRPr lang="en-US" sz="1400" dirty="0"/>
           </a:p>
         </p:txBody>
       </p:sp>
@@ -1987,20 +1995,23 @@
         </p:nvSpPr>
         <p:spPr>
           <a:xfrm>
-            <a:off x="6400800" y="1051560"/>
-            <a:ext cx="1920240" cy="658368"/>
-          </a:xfrm>
-          <a:prstGeom prst="rect">
-            <a:avLst/>
-          </a:prstGeom>
-          <a:noFill/>
-          <a:ln/>
-        </p:spPr>
-        <p:txBody>
-          <a:bodyPr wrap="square" lIns="0" tIns="0" rIns="0" bIns="0" rtlCol="0" anchor="ctr"/>
+            <a:off x="7635240" y="1645920"/>
+            <a:ext cx="2926080" cy="457200"/>
+          </a:xfrm>
+          <a:prstGeom prst="rect">
+            <a:avLst/>
+          </a:prstGeom>
+          <a:noFill/>
+          <a:ln/>
+        </p:spPr>
+        <p:txBody>
+          <a:bodyPr wrap="square" rtlCol="0" anchor="ctr"/>
           <a:lstStyle/>
           <a:p>
             <a:pPr indent="0" marL="0">
+              <a:lnSpc>
+                <a:spcPct val="130000"/>
+              </a:lnSpc>
               <a:buNone/>
             </a:pPr>
             <a:r>
@@ -2008,11 +2019,11 @@
                 <a:solidFill>
                   <a:srgbClr val="6B6660"/>
                 </a:solidFill>
-                <a:latin typeface="Calibri" pitchFamily="34" charset="0"/>
-                <a:ea typeface="Calibri" pitchFamily="34" charset="-122"/>
-                <a:cs typeface="Calibri" pitchFamily="34" charset="-120"/>
-              </a:rPr>
-              <a:t>Something that might happen</a:t>
+                <a:latin typeface="Arial" pitchFamily="34" charset="0"/>
+                <a:ea typeface="Arial" pitchFamily="34" charset="-122"/>
+                <a:cs typeface="Arial" pitchFamily="34" charset="-120"/>
+              </a:rPr>
+              <a:t>A possible result (e.g. rolling a 4 on a die).</a:t>
             </a:r>
             <a:endParaRPr lang="en-US" sz="1100" dirty="0"/>
           </a:p>
@@ -2026,106 +2037,89 @@
         </p:nvSpPr>
         <p:spPr>
           <a:xfrm>
-            <a:off x="731520" y="1819656"/>
-            <a:ext cx="3657600" cy="658368"/>
-          </a:xfrm>
-          <a:prstGeom prst="rect">
-            <a:avLst/>
+            <a:off x="548640" y="2286000"/>
+            <a:ext cx="3200400" cy="914400"/>
+          </a:xfrm>
+          <a:prstGeom prst="roundRect">
+            <a:avLst>
+              <a:gd name="adj" fmla="val 10000"/>
+            </a:avLst>
           </a:prstGeom>
           <a:solidFill>
             <a:srgbClr val="FFFFFF"/>
           </a:solidFill>
-          <a:ln/>
-          <a:effectLst>
-            <a:outerShdw sx="100000" sy="100000" kx="0" ky="0" algn="bl" rotWithShape="0" blurRad="50800" dist="25400" dir="8100000">
-              <a:srgbClr val="000000">
-                <a:alpha val="10000"/>
-              </a:srgbClr>
-            </a:outerShdw>
-          </a:effectLst>
-        </p:spPr>
-      </p:sp>
-      <p:sp>
-        <p:nvSpPr>
-          <p:cNvPr id="15" name="Shape 13"/>
-          <p:cNvSpPr/>
-          <p:nvPr/>
-        </p:nvSpPr>
-        <p:spPr>
-          <a:xfrm>
-            <a:off x="731520" y="1819656"/>
-            <a:ext cx="54864" cy="658368"/>
-          </a:xfrm>
-          <a:prstGeom prst="rect">
-            <a:avLst/>
-          </a:prstGeom>
-          <a:solidFill>
-            <a:srgbClr val="2A9D8F"/>
-          </a:solidFill>
-          <a:ln/>
-        </p:spPr>
-      </p:sp>
-      <p:sp>
-        <p:nvSpPr>
-          <p:cNvPr id="16" name="Text 14"/>
-          <p:cNvSpPr/>
-          <p:nvPr/>
-        </p:nvSpPr>
-        <p:spPr>
-          <a:xfrm>
-            <a:off x="914400" y="1819656"/>
-            <a:ext cx="1463040" cy="658368"/>
-          </a:xfrm>
-          <a:prstGeom prst="rect">
-            <a:avLst/>
-          </a:prstGeom>
-          <a:noFill/>
-          <a:ln/>
-        </p:spPr>
-        <p:txBody>
-          <a:bodyPr wrap="square" lIns="0" tIns="0" rIns="0" bIns="0" rtlCol="0" anchor="ctr"/>
+          <a:ln w="9525">
+            <a:solidFill>
+              <a:srgbClr val="E5E2DC"/>
+            </a:solidFill>
+            <a:prstDash val="solid"/>
+          </a:ln>
+        </p:spPr>
+      </p:sp>
+      <p:sp>
+        <p:nvSpPr>
+          <p:cNvPr id="15" name="Text 13"/>
+          <p:cNvSpPr/>
+          <p:nvPr/>
+        </p:nvSpPr>
+        <p:spPr>
+          <a:xfrm>
+            <a:off x="685800" y="2359152"/>
+            <a:ext cx="2926080" cy="320040"/>
+          </a:xfrm>
+          <a:prstGeom prst="rect">
+            <a:avLst/>
+          </a:prstGeom>
+          <a:noFill/>
+          <a:ln/>
+        </p:spPr>
+        <p:txBody>
+          <a:bodyPr wrap="square" rtlCol="0" anchor="ctr"/>
           <a:lstStyle/>
           <a:p>
             <a:pPr indent="0" marL="0">
               <a:buNone/>
             </a:pPr>
             <a:r>
-              <a:rPr lang="en-US" sz="1300" b="1" dirty="0">
-                <a:solidFill>
-                  <a:srgbClr val="1B2A4A"/>
+              <a:rPr lang="en-US" sz="1400" b="1" dirty="0">
+                <a:solidFill>
+                  <a:srgbClr val="2A9D8F"/>
                 </a:solidFill>
                 <a:latin typeface="Georgia" pitchFamily="34" charset="0"/>
                 <a:ea typeface="Georgia" pitchFamily="34" charset="-122"/>
                 <a:cs typeface="Georgia" pitchFamily="34" charset="-120"/>
               </a:rPr>
-              <a:t>Outcome</a:t>
-            </a:r>
-            <a:endParaRPr lang="en-US" sz="1300" dirty="0"/>
-          </a:p>
-        </p:txBody>
-      </p:sp>
-      <p:sp>
-        <p:nvSpPr>
-          <p:cNvPr id="17" name="Text 15"/>
-          <p:cNvSpPr/>
-          <p:nvPr/>
-        </p:nvSpPr>
-        <p:spPr>
-          <a:xfrm>
-            <a:off x="2377440" y="1819656"/>
-            <a:ext cx="1920240" cy="658368"/>
-          </a:xfrm>
-          <a:prstGeom prst="rect">
-            <a:avLst/>
-          </a:prstGeom>
-          <a:noFill/>
-          <a:ln/>
-        </p:spPr>
-        <p:txBody>
-          <a:bodyPr wrap="square" lIns="0" tIns="0" rIns="0" bIns="0" rtlCol="0" anchor="ctr"/>
+              <a:t>Impossible</a:t>
+            </a:r>
+            <a:endParaRPr lang="en-US" sz="1400" dirty="0"/>
+          </a:p>
+        </p:txBody>
+      </p:sp>
+      <p:sp>
+        <p:nvSpPr>
+          <p:cNvPr id="16" name="Text 14"/>
+          <p:cNvSpPr/>
+          <p:nvPr/>
+        </p:nvSpPr>
+        <p:spPr>
+          <a:xfrm>
+            <a:off x="685800" y="2697480"/>
+            <a:ext cx="2926080" cy="457200"/>
+          </a:xfrm>
+          <a:prstGeom prst="rect">
+            <a:avLst/>
+          </a:prstGeom>
+          <a:noFill/>
+          <a:ln/>
+        </p:spPr>
+        <p:txBody>
+          <a:bodyPr wrap="square" rtlCol="0" anchor="ctr"/>
           <a:lstStyle/>
           <a:p>
             <a:pPr indent="0" marL="0">
+              <a:lnSpc>
+                <a:spcPct val="130000"/>
+              </a:lnSpc>
               <a:buNone/>
             </a:pPr>
             <a:r>
@@ -2133,11 +2127,11 @@
                 <a:solidFill>
                   <a:srgbClr val="6B6660"/>
                 </a:solidFill>
-                <a:latin typeface="Calibri" pitchFamily="34" charset="0"/>
-                <a:ea typeface="Calibri" pitchFamily="34" charset="-122"/>
-                <a:cs typeface="Calibri" pitchFamily="34" charset="-120"/>
-              </a:rPr>
-              <a:t>A possible result</a:t>
+                <a:latin typeface="Arial" pitchFamily="34" charset="0"/>
+                <a:ea typeface="Arial" pitchFamily="34" charset="-122"/>
+                <a:cs typeface="Arial" pitchFamily="34" charset="-120"/>
+              </a:rPr>
+              <a:t>Probability = 0. Will never happen.</a:t>
             </a:r>
             <a:endParaRPr lang="en-US" sz="1100" dirty="0"/>
           </a:p>
@@ -2145,112 +2139,95 @@
       </p:sp>
       <p:sp>
         <p:nvSpPr>
-          <p:cNvPr id="18" name="Shape 16"/>
-          <p:cNvSpPr/>
-          <p:nvPr/>
-        </p:nvSpPr>
-        <p:spPr>
-          <a:xfrm>
-            <a:off x="4754880" y="1819656"/>
-            <a:ext cx="3657600" cy="658368"/>
-          </a:xfrm>
-          <a:prstGeom prst="rect">
-            <a:avLst/>
+          <p:cNvPr id="17" name="Shape 15"/>
+          <p:cNvSpPr/>
+          <p:nvPr/>
+        </p:nvSpPr>
+        <p:spPr>
+          <a:xfrm>
+            <a:off x="4023360" y="2286000"/>
+            <a:ext cx="3200400" cy="914400"/>
+          </a:xfrm>
+          <a:prstGeom prst="roundRect">
+            <a:avLst>
+              <a:gd name="adj" fmla="val 10000"/>
+            </a:avLst>
           </a:prstGeom>
           <a:solidFill>
             <a:srgbClr val="FFFFFF"/>
           </a:solidFill>
-          <a:ln/>
-          <a:effectLst>
-            <a:outerShdw sx="100000" sy="100000" kx="0" ky="0" algn="bl" rotWithShape="0" blurRad="50800" dist="25400" dir="8100000">
-              <a:srgbClr val="000000">
-                <a:alpha val="10000"/>
-              </a:srgbClr>
-            </a:outerShdw>
-          </a:effectLst>
-        </p:spPr>
-      </p:sp>
-      <p:sp>
-        <p:nvSpPr>
-          <p:cNvPr id="19" name="Shape 17"/>
-          <p:cNvSpPr/>
-          <p:nvPr/>
-        </p:nvSpPr>
-        <p:spPr>
-          <a:xfrm>
-            <a:off x="4754880" y="1819656"/>
-            <a:ext cx="54864" cy="658368"/>
-          </a:xfrm>
-          <a:prstGeom prst="rect">
-            <a:avLst/>
-          </a:prstGeom>
-          <a:solidFill>
-            <a:srgbClr val="2A9D8F"/>
-          </a:solidFill>
-          <a:ln/>
-        </p:spPr>
-      </p:sp>
-      <p:sp>
-        <p:nvSpPr>
-          <p:cNvPr id="20" name="Text 18"/>
-          <p:cNvSpPr/>
-          <p:nvPr/>
-        </p:nvSpPr>
-        <p:spPr>
-          <a:xfrm>
-            <a:off x="4937760" y="1819656"/>
-            <a:ext cx="1463040" cy="658368"/>
-          </a:xfrm>
-          <a:prstGeom prst="rect">
-            <a:avLst/>
-          </a:prstGeom>
-          <a:noFill/>
-          <a:ln/>
-        </p:spPr>
-        <p:txBody>
-          <a:bodyPr wrap="square" lIns="0" tIns="0" rIns="0" bIns="0" rtlCol="0" anchor="ctr"/>
+          <a:ln w="9525">
+            <a:solidFill>
+              <a:srgbClr val="E5E2DC"/>
+            </a:solidFill>
+            <a:prstDash val="solid"/>
+          </a:ln>
+        </p:spPr>
+      </p:sp>
+      <p:sp>
+        <p:nvSpPr>
+          <p:cNvPr id="18" name="Text 16"/>
+          <p:cNvSpPr/>
+          <p:nvPr/>
+        </p:nvSpPr>
+        <p:spPr>
+          <a:xfrm>
+            <a:off x="4160520" y="2359152"/>
+            <a:ext cx="2926080" cy="320040"/>
+          </a:xfrm>
+          <a:prstGeom prst="rect">
+            <a:avLst/>
+          </a:prstGeom>
+          <a:noFill/>
+          <a:ln/>
+        </p:spPr>
+        <p:txBody>
+          <a:bodyPr wrap="square" rtlCol="0" anchor="ctr"/>
           <a:lstStyle/>
           <a:p>
             <a:pPr indent="0" marL="0">
               <a:buNone/>
             </a:pPr>
             <a:r>
-              <a:rPr lang="en-US" sz="1300" b="1" dirty="0">
-                <a:solidFill>
-                  <a:srgbClr val="1B2A4A"/>
+              <a:rPr lang="en-US" sz="1400" b="1" dirty="0">
+                <a:solidFill>
+                  <a:srgbClr val="2A9D8F"/>
                 </a:solidFill>
                 <a:latin typeface="Georgia" pitchFamily="34" charset="0"/>
                 <a:ea typeface="Georgia" pitchFamily="34" charset="-122"/>
                 <a:cs typeface="Georgia" pitchFamily="34" charset="-120"/>
               </a:rPr>
-              <a:t>Impossible</a:t>
-            </a:r>
-            <a:endParaRPr lang="en-US" sz="1300" dirty="0"/>
-          </a:p>
-        </p:txBody>
-      </p:sp>
-      <p:sp>
-        <p:nvSpPr>
-          <p:cNvPr id="21" name="Text 19"/>
-          <p:cNvSpPr/>
-          <p:nvPr/>
-        </p:nvSpPr>
-        <p:spPr>
-          <a:xfrm>
-            <a:off x="6400800" y="1819656"/>
-            <a:ext cx="1920240" cy="658368"/>
-          </a:xfrm>
-          <a:prstGeom prst="rect">
-            <a:avLst/>
-          </a:prstGeom>
-          <a:noFill/>
-          <a:ln/>
-        </p:spPr>
-        <p:txBody>
-          <a:bodyPr wrap="square" lIns="0" tIns="0" rIns="0" bIns="0" rtlCol="0" anchor="ctr"/>
+              <a:t>Certain</a:t>
+            </a:r>
+            <a:endParaRPr lang="en-US" sz="1400" dirty="0"/>
+          </a:p>
+        </p:txBody>
+      </p:sp>
+      <p:sp>
+        <p:nvSpPr>
+          <p:cNvPr id="19" name="Text 17"/>
+          <p:cNvSpPr/>
+          <p:nvPr/>
+        </p:nvSpPr>
+        <p:spPr>
+          <a:xfrm>
+            <a:off x="4160520" y="2697480"/>
+            <a:ext cx="2926080" cy="457200"/>
+          </a:xfrm>
+          <a:prstGeom prst="rect">
+            <a:avLst/>
+          </a:prstGeom>
+          <a:noFill/>
+          <a:ln/>
+        </p:spPr>
+        <p:txBody>
+          <a:bodyPr wrap="square" rtlCol="0" anchor="ctr"/>
           <a:lstStyle/>
           <a:p>
             <a:pPr indent="0" marL="0">
+              <a:lnSpc>
+                <a:spcPct val="130000"/>
+              </a:lnSpc>
               <a:buNone/>
             </a:pPr>
             <a:r>
@@ -2258,11 +2235,11 @@
                 <a:solidFill>
                   <a:srgbClr val="6B6660"/>
                 </a:solidFill>
-                <a:latin typeface="Calibri" pitchFamily="34" charset="0"/>
-                <a:ea typeface="Calibri" pitchFamily="34" charset="-122"/>
-                <a:cs typeface="Calibri" pitchFamily="34" charset="-120"/>
-              </a:rPr>
-              <a:t>Probability = 0 (cannot happen)</a:t>
+                <a:latin typeface="Arial" pitchFamily="34" charset="0"/>
+                <a:ea typeface="Arial" pitchFamily="34" charset="-122"/>
+                <a:cs typeface="Arial" pitchFamily="34" charset="-120"/>
+              </a:rPr>
+              <a:t>Probability = 1. Will definitely happen.</a:t>
             </a:r>
             <a:endParaRPr lang="en-US" sz="1100" dirty="0"/>
           </a:p>
@@ -2270,112 +2247,95 @@
       </p:sp>
       <p:sp>
         <p:nvSpPr>
-          <p:cNvPr id="22" name="Shape 20"/>
-          <p:cNvSpPr/>
-          <p:nvPr/>
-        </p:nvSpPr>
-        <p:spPr>
-          <a:xfrm>
-            <a:off x="731520" y="2587752"/>
-            <a:ext cx="3657600" cy="658368"/>
-          </a:xfrm>
-          <a:prstGeom prst="rect">
-            <a:avLst/>
+          <p:cNvPr id="20" name="Shape 18"/>
+          <p:cNvSpPr/>
+          <p:nvPr/>
+        </p:nvSpPr>
+        <p:spPr>
+          <a:xfrm>
+            <a:off x="7498080" y="2286000"/>
+            <a:ext cx="3200400" cy="914400"/>
+          </a:xfrm>
+          <a:prstGeom prst="roundRect">
+            <a:avLst>
+              <a:gd name="adj" fmla="val 10000"/>
+            </a:avLst>
           </a:prstGeom>
           <a:solidFill>
             <a:srgbClr val="FFFFFF"/>
           </a:solidFill>
-          <a:ln/>
-          <a:effectLst>
-            <a:outerShdw sx="100000" sy="100000" kx="0" ky="0" algn="bl" rotWithShape="0" blurRad="50800" dist="25400" dir="8100000">
-              <a:srgbClr val="000000">
-                <a:alpha val="10000"/>
-              </a:srgbClr>
-            </a:outerShdw>
-          </a:effectLst>
-        </p:spPr>
-      </p:sp>
-      <p:sp>
-        <p:nvSpPr>
-          <p:cNvPr id="23" name="Shape 21"/>
-          <p:cNvSpPr/>
-          <p:nvPr/>
-        </p:nvSpPr>
-        <p:spPr>
-          <a:xfrm>
-            <a:off x="731520" y="2587752"/>
-            <a:ext cx="54864" cy="658368"/>
-          </a:xfrm>
-          <a:prstGeom prst="rect">
-            <a:avLst/>
-          </a:prstGeom>
-          <a:solidFill>
-            <a:srgbClr val="2A9D8F"/>
-          </a:solidFill>
-          <a:ln/>
-        </p:spPr>
-      </p:sp>
-      <p:sp>
-        <p:nvSpPr>
-          <p:cNvPr id="24" name="Text 22"/>
-          <p:cNvSpPr/>
-          <p:nvPr/>
-        </p:nvSpPr>
-        <p:spPr>
-          <a:xfrm>
-            <a:off x="914400" y="2587752"/>
-            <a:ext cx="1463040" cy="658368"/>
-          </a:xfrm>
-          <a:prstGeom prst="rect">
-            <a:avLst/>
-          </a:prstGeom>
-          <a:noFill/>
-          <a:ln/>
-        </p:spPr>
-        <p:txBody>
-          <a:bodyPr wrap="square" lIns="0" tIns="0" rIns="0" bIns="0" rtlCol="0" anchor="ctr"/>
+          <a:ln w="9525">
+            <a:solidFill>
+              <a:srgbClr val="E5E2DC"/>
+            </a:solidFill>
+            <a:prstDash val="solid"/>
+          </a:ln>
+        </p:spPr>
+      </p:sp>
+      <p:sp>
+        <p:nvSpPr>
+          <p:cNvPr id="21" name="Text 19"/>
+          <p:cNvSpPr/>
+          <p:nvPr/>
+        </p:nvSpPr>
+        <p:spPr>
+          <a:xfrm>
+            <a:off x="7635240" y="2359152"/>
+            <a:ext cx="2926080" cy="320040"/>
+          </a:xfrm>
+          <a:prstGeom prst="rect">
+            <a:avLst/>
+          </a:prstGeom>
+          <a:noFill/>
+          <a:ln/>
+        </p:spPr>
+        <p:txBody>
+          <a:bodyPr wrap="square" rtlCol="0" anchor="ctr"/>
           <a:lstStyle/>
           <a:p>
             <a:pPr indent="0" marL="0">
               <a:buNone/>
             </a:pPr>
             <a:r>
-              <a:rPr lang="en-US" sz="1300" b="1" dirty="0">
-                <a:solidFill>
-                  <a:srgbClr val="1B2A4A"/>
+              <a:rPr lang="en-US" sz="1400" b="1" dirty="0">
+                <a:solidFill>
+                  <a:srgbClr val="2A9D8F"/>
                 </a:solidFill>
                 <a:latin typeface="Georgia" pitchFamily="34" charset="0"/>
                 <a:ea typeface="Georgia" pitchFamily="34" charset="-122"/>
                 <a:cs typeface="Georgia" pitchFamily="34" charset="-120"/>
               </a:rPr>
-              <a:t>Certain</a:t>
-            </a:r>
-            <a:endParaRPr lang="en-US" sz="1300" dirty="0"/>
-          </a:p>
-        </p:txBody>
-      </p:sp>
-      <p:sp>
-        <p:nvSpPr>
-          <p:cNvPr id="25" name="Text 23"/>
-          <p:cNvSpPr/>
-          <p:nvPr/>
-        </p:nvSpPr>
-        <p:spPr>
-          <a:xfrm>
-            <a:off x="2377440" y="2587752"/>
-            <a:ext cx="1920240" cy="658368"/>
-          </a:xfrm>
-          <a:prstGeom prst="rect">
-            <a:avLst/>
-          </a:prstGeom>
-          <a:noFill/>
-          <a:ln/>
-        </p:spPr>
-        <p:txBody>
-          <a:bodyPr wrap="square" lIns="0" tIns="0" rIns="0" bIns="0" rtlCol="0" anchor="ctr"/>
+              <a:t>Even Chance</a:t>
+            </a:r>
+            <a:endParaRPr lang="en-US" sz="1400" dirty="0"/>
+          </a:p>
+        </p:txBody>
+      </p:sp>
+      <p:sp>
+        <p:nvSpPr>
+          <p:cNvPr id="22" name="Text 20"/>
+          <p:cNvSpPr/>
+          <p:nvPr/>
+        </p:nvSpPr>
+        <p:spPr>
+          <a:xfrm>
+            <a:off x="7635240" y="2697480"/>
+            <a:ext cx="2926080" cy="457200"/>
+          </a:xfrm>
+          <a:prstGeom prst="rect">
+            <a:avLst/>
+          </a:prstGeom>
+          <a:noFill/>
+          <a:ln/>
+        </p:spPr>
+        <p:txBody>
+          <a:bodyPr wrap="square" rtlCol="0" anchor="ctr"/>
           <a:lstStyle/>
           <a:p>
             <a:pPr indent="0" marL="0">
+              <a:lnSpc>
+                <a:spcPct val="130000"/>
+              </a:lnSpc>
               <a:buNone/>
             </a:pPr>
             <a:r>
@@ -2383,136 +2343,11 @@
                 <a:solidFill>
                   <a:srgbClr val="6B6660"/>
                 </a:solidFill>
-                <a:latin typeface="Calibri" pitchFamily="34" charset="0"/>
-                <a:ea typeface="Calibri" pitchFamily="34" charset="-122"/>
-                <a:cs typeface="Calibri" pitchFamily="34" charset="-120"/>
-              </a:rPr>
-              <a:t>Probability = 1 (must happen)</a:t>
-            </a:r>
-            <a:endParaRPr lang="en-US" sz="1100" dirty="0"/>
-          </a:p>
-        </p:txBody>
-      </p:sp>
-      <p:sp>
-        <p:nvSpPr>
-          <p:cNvPr id="26" name="Shape 24"/>
-          <p:cNvSpPr/>
-          <p:nvPr/>
-        </p:nvSpPr>
-        <p:spPr>
-          <a:xfrm>
-            <a:off x="4754880" y="2587752"/>
-            <a:ext cx="3657600" cy="658368"/>
-          </a:xfrm>
-          <a:prstGeom prst="rect">
-            <a:avLst/>
-          </a:prstGeom>
-          <a:solidFill>
-            <a:srgbClr val="FFFFFF"/>
-          </a:solidFill>
-          <a:ln/>
-          <a:effectLst>
-            <a:outerShdw sx="100000" sy="100000" kx="0" ky="0" algn="bl" rotWithShape="0" blurRad="50800" dist="25400" dir="8100000">
-              <a:srgbClr val="000000">
-                <a:alpha val="10000"/>
-              </a:srgbClr>
-            </a:outerShdw>
-          </a:effectLst>
-        </p:spPr>
-      </p:sp>
-      <p:sp>
-        <p:nvSpPr>
-          <p:cNvPr id="27" name="Shape 25"/>
-          <p:cNvSpPr/>
-          <p:nvPr/>
-        </p:nvSpPr>
-        <p:spPr>
-          <a:xfrm>
-            <a:off x="4754880" y="2587752"/>
-            <a:ext cx="54864" cy="658368"/>
-          </a:xfrm>
-          <a:prstGeom prst="rect">
-            <a:avLst/>
-          </a:prstGeom>
-          <a:solidFill>
-            <a:srgbClr val="2A9D8F"/>
-          </a:solidFill>
-          <a:ln/>
-        </p:spPr>
-      </p:sp>
-      <p:sp>
-        <p:nvSpPr>
-          <p:cNvPr id="28" name="Text 26"/>
-          <p:cNvSpPr/>
-          <p:nvPr/>
-        </p:nvSpPr>
-        <p:spPr>
-          <a:xfrm>
-            <a:off x="4937760" y="2587752"/>
-            <a:ext cx="1463040" cy="658368"/>
-          </a:xfrm>
-          <a:prstGeom prst="rect">
-            <a:avLst/>
-          </a:prstGeom>
-          <a:noFill/>
-          <a:ln/>
-        </p:spPr>
-        <p:txBody>
-          <a:bodyPr wrap="square" lIns="0" tIns="0" rIns="0" bIns="0" rtlCol="0" anchor="ctr"/>
-          <a:lstStyle/>
-          <a:p>
-            <a:pPr indent="0" marL="0">
-              <a:buNone/>
-            </a:pPr>
-            <a:r>
-              <a:rPr lang="en-US" sz="1300" b="1" dirty="0">
-                <a:solidFill>
-                  <a:srgbClr val="1B2A4A"/>
-                </a:solidFill>
-                <a:latin typeface="Georgia" pitchFamily="34" charset="0"/>
-                <a:ea typeface="Georgia" pitchFamily="34" charset="-122"/>
-                <a:cs typeface="Georgia" pitchFamily="34" charset="-120"/>
-              </a:rPr>
-              <a:t>Even chance</a:t>
-            </a:r>
-            <a:endParaRPr lang="en-US" sz="1300" dirty="0"/>
-          </a:p>
-        </p:txBody>
-      </p:sp>
-      <p:sp>
-        <p:nvSpPr>
-          <p:cNvPr id="29" name="Text 27"/>
-          <p:cNvSpPr/>
-          <p:nvPr/>
-        </p:nvSpPr>
-        <p:spPr>
-          <a:xfrm>
-            <a:off x="6400800" y="2587752"/>
-            <a:ext cx="1920240" cy="658368"/>
-          </a:xfrm>
-          <a:prstGeom prst="rect">
-            <a:avLst/>
-          </a:prstGeom>
-          <a:noFill/>
-          <a:ln/>
-        </p:spPr>
-        <p:txBody>
-          <a:bodyPr wrap="square" lIns="0" tIns="0" rIns="0" bIns="0" rtlCol="0" anchor="ctr"/>
-          <a:lstStyle/>
-          <a:p>
-            <a:pPr indent="0" marL="0">
-              <a:buNone/>
-            </a:pPr>
-            <a:r>
-              <a:rPr lang="en-US" sz="1100" dirty="0">
-                <a:solidFill>
-                  <a:srgbClr val="6B6660"/>
-                </a:solidFill>
-                <a:latin typeface="Calibri" pitchFamily="34" charset="0"/>
-                <a:ea typeface="Calibri" pitchFamily="34" charset="-122"/>
-                <a:cs typeface="Calibri" pitchFamily="34" charset="-120"/>
-              </a:rPr>
-              <a:t>Probability = ½ (equally likely)</a:t>
+                <a:latin typeface="Arial" pitchFamily="34" charset="0"/>
+                <a:ea typeface="Arial" pitchFamily="34" charset="-122"/>
+                <a:cs typeface="Arial" pitchFamily="34" charset="-120"/>
+              </a:rPr>
+              <a:t>Probability = 0.5 or ½. Equally likely to happen or not.</a:t>
             </a:r>
             <a:endParaRPr lang="en-US" sz="1100" dirty="0"/>
           </a:p>
@@ -2559,47 +2394,7 @@
         <p:spPr>
           <a:xfrm>
             <a:off x="0" y="0"/>
-            <a:ext cx="9144000" cy="822960"/>
-          </a:xfrm>
-          <a:prstGeom prst="rect">
-            <a:avLst/>
-          </a:prstGeom>
-          <a:solidFill>
-            <a:srgbClr val="FFFFFF"/>
-          </a:solidFill>
-          <a:ln/>
-        </p:spPr>
-      </p:sp>
-      <p:sp>
-        <p:nvSpPr>
-          <p:cNvPr id="3" name="Shape 1"/>
-          <p:cNvSpPr/>
-          <p:nvPr/>
-        </p:nvSpPr>
-        <p:spPr>
-          <a:xfrm>
-            <a:off x="0" y="804672"/>
-            <a:ext cx="9144000" cy="27432"/>
-          </a:xfrm>
-          <a:prstGeom prst="rect">
-            <a:avLst/>
-          </a:prstGeom>
-          <a:solidFill>
-            <a:srgbClr val="E5E2DC"/>
-          </a:solidFill>
-          <a:ln/>
-        </p:spPr>
-      </p:sp>
-      <p:sp>
-        <p:nvSpPr>
-          <p:cNvPr id="4" name="Shape 2"/>
-          <p:cNvSpPr/>
-          <p:nvPr/>
-        </p:nvSpPr>
-        <p:spPr>
-          <a:xfrm>
-            <a:off x="548640" y="201168"/>
-            <a:ext cx="54864" cy="420624"/>
+            <a:ext cx="73152" cy="5148072"/>
           </a:xfrm>
           <a:prstGeom prst="rect">
             <a:avLst/>
@@ -2612,30 +2407,30 @@
       </p:sp>
       <p:sp>
         <p:nvSpPr>
-          <p:cNvPr id="5" name="Text 3"/>
-          <p:cNvSpPr/>
-          <p:nvPr/>
-        </p:nvSpPr>
-        <p:spPr>
-          <a:xfrm>
-            <a:off x="777240" y="137160"/>
-            <a:ext cx="7772400" cy="548640"/>
-          </a:xfrm>
-          <a:prstGeom prst="rect">
-            <a:avLst/>
-          </a:prstGeom>
-          <a:noFill/>
-          <a:ln/>
-        </p:spPr>
-        <p:txBody>
-          <a:bodyPr wrap="square" lIns="0" tIns="0" rIns="0" bIns="0" rtlCol="0" anchor="ctr"/>
+          <p:cNvPr id="3" name="Text 1"/>
+          <p:cNvSpPr/>
+          <p:nvPr/>
+        </p:nvSpPr>
+        <p:spPr>
+          <a:xfrm>
+            <a:off x="548640" y="274320"/>
+            <a:ext cx="9144000" cy="640080"/>
+          </a:xfrm>
+          <a:prstGeom prst="rect">
+            <a:avLst/>
+          </a:prstGeom>
+          <a:noFill/>
+          <a:ln/>
+        </p:spPr>
+        <p:txBody>
+          <a:bodyPr wrap="square" rtlCol="0" anchor="ctr"/>
           <a:lstStyle/>
           <a:p>
             <a:pPr indent="0" marL="0">
               <a:buNone/>
             </a:pPr>
             <a:r>
-              <a:rPr lang="en-US" sz="2000" b="1" dirty="0">
+              <a:rPr lang="en-US" sz="2400" b="1" dirty="0">
                 <a:solidFill>
                   <a:srgbClr val="1B2A4A"/>
                 </a:solidFill>
@@ -2645,20 +2440,40 @@
               </a:rPr>
               <a:t>The Probability Scale</a:t>
             </a:r>
-            <a:endParaRPr lang="en-US" sz="2000" dirty="0"/>
-          </a:p>
-        </p:txBody>
-      </p:sp>
-      <p:sp>
-        <p:nvSpPr>
-          <p:cNvPr id="6" name="Text 4"/>
-          <p:cNvSpPr/>
-          <p:nvPr/>
-        </p:nvSpPr>
-        <p:spPr>
-          <a:xfrm>
-            <a:off x="731520" y="1051560"/>
-            <a:ext cx="7680960" cy="3108960"/>
+            <a:endParaRPr lang="en-US" sz="2400" dirty="0"/>
+          </a:p>
+        </p:txBody>
+      </p:sp>
+      <p:sp>
+        <p:nvSpPr>
+          <p:cNvPr id="4" name="Shape 2"/>
+          <p:cNvSpPr/>
+          <p:nvPr/>
+        </p:nvSpPr>
+        <p:spPr>
+          <a:xfrm>
+            <a:off x="548640" y="960120"/>
+            <a:ext cx="2286000" cy="36576"/>
+          </a:xfrm>
+          <a:prstGeom prst="rect">
+            <a:avLst/>
+          </a:prstGeom>
+          <a:solidFill>
+            <a:srgbClr val="2A9D8F"/>
+          </a:solidFill>
+          <a:ln/>
+        </p:spPr>
+      </p:sp>
+      <p:sp>
+        <p:nvSpPr>
+          <p:cNvPr id="5" name="Text 3"/>
+          <p:cNvSpPr/>
+          <p:nvPr/>
+        </p:nvSpPr>
+        <p:spPr>
+          <a:xfrm>
+            <a:off x="548640" y="1188720"/>
+            <a:ext cx="10058400" cy="3474720"/>
           </a:xfrm>
           <a:prstGeom prst="rect">
             <a:avLst/>
@@ -2670,210 +2485,114 @@
           <a:bodyPr wrap="square" rtlCol="0" anchor="t"/>
           <a:lstStyle/>
           <a:p>
-            <a:pPr marL="342900" indent="-342900">
+            <a:pPr>
+              <a:lnSpc>
+                <a:spcPct val="150000"/>
+              </a:lnSpc>
               <a:spcAft>
-                <a:spcPts val="800"/>
+                <a:spcPts val="600"/>
               </a:spcAft>
-              <a:buSzPct val="100000"/>
-              <a:buChar char="•"/>
             </a:pPr>
             <a:r>
               <a:rPr lang="en-US" sz="1500" dirty="0">
                 <a:solidFill>
                   <a:srgbClr val="3D3A36"/>
                 </a:solidFill>
-                <a:latin typeface="Calibri" pitchFamily="34" charset="0"/>
-                <a:ea typeface="Calibri" pitchFamily="34" charset="-122"/>
-                <a:cs typeface="Calibri" pitchFamily="34" charset="-120"/>
-              </a:rPr>
-              <a:t>Probability is measured on a scale from 0 to 1.</a:t>
+                <a:latin typeface="Arial" pitchFamily="34" charset="0"/>
+                <a:ea typeface="Arial" pitchFamily="34" charset="-122"/>
+                <a:cs typeface="Arial" pitchFamily="34" charset="-120"/>
+              </a:rPr>
+              <a:t>0 ————————— 0.5 ————————— 1</a:t>
             </a:r>
             <a:endParaRPr lang="en-US" sz="1500" dirty="0"/>
           </a:p>
           <a:p>
-            <a:pPr marL="342900" indent="-342900">
+            <a:pPr>
+              <a:lnSpc>
+                <a:spcPct val="150000"/>
+              </a:lnSpc>
               <a:spcAft>
-                <a:spcPts val="800"/>
+                <a:spcPts val="600"/>
               </a:spcAft>
-              <a:buSzPct val="100000"/>
-              <a:buChar char="•"/>
             </a:pPr>
             <a:r>
               <a:rPr lang="en-US" sz="1500" dirty="0">
                 <a:solidFill>
                   <a:srgbClr val="3D3A36"/>
                 </a:solidFill>
-                <a:latin typeface="Calibri" pitchFamily="34" charset="0"/>
-                <a:ea typeface="Calibri" pitchFamily="34" charset="-122"/>
-                <a:cs typeface="Calibri" pitchFamily="34" charset="-120"/>
-              </a:rPr>
-              <a:t>0 = impossible (rolling a 7 on a normal dice).</a:t>
+                <a:latin typeface="Arial" pitchFamily="34" charset="0"/>
+                <a:ea typeface="Arial" pitchFamily="34" charset="-122"/>
+                <a:cs typeface="Arial" pitchFamily="34" charset="-120"/>
+              </a:rPr>
+              <a:t>Impossible — Unlikely — Even — Likely — Certain</a:t>
             </a:r>
             <a:endParaRPr lang="en-US" sz="1500" dirty="0"/>
           </a:p>
           <a:p>
-            <a:pPr marL="342900" indent="-342900">
+            <a:pPr>
+              <a:lnSpc>
+                <a:spcPct val="150000"/>
+              </a:lnSpc>
               <a:spcAft>
-                <a:spcPts val="800"/>
+                <a:spcPts val="600"/>
               </a:spcAft>
-              <a:buSzPct val="100000"/>
-              <a:buChar char="•"/>
             </a:pPr>
             <a:r>
               <a:rPr lang="en-US" sz="1500" dirty="0">
                 <a:solidFill>
                   <a:srgbClr val="3D3A36"/>
                 </a:solidFill>
-                <a:latin typeface="Calibri" pitchFamily="34" charset="0"/>
-                <a:ea typeface="Calibri" pitchFamily="34" charset="-122"/>
-                <a:cs typeface="Calibri" pitchFamily="34" charset="-120"/>
-              </a:rPr>
-              <a:t>½ = even chance (flipping heads on a fair coin).</a:t>
+                <a:latin typeface="Arial" pitchFamily="34" charset="0"/>
+                <a:ea typeface="Arial" pitchFamily="34" charset="-122"/>
+                <a:cs typeface="Arial" pitchFamily="34" charset="-120"/>
+              </a:rPr>
+              <a:t>P(impossible event) = 0. Example: rolling a 7 on a normal die.</a:t>
             </a:r>
             <a:endParaRPr lang="en-US" sz="1500" dirty="0"/>
           </a:p>
           <a:p>
-            <a:pPr marL="342900" indent="-342900">
+            <a:pPr>
+              <a:lnSpc>
+                <a:spcPct val="150000"/>
+              </a:lnSpc>
               <a:spcAft>
-                <a:spcPts val="800"/>
+                <a:spcPts val="600"/>
               </a:spcAft>
-              <a:buSzPct val="100000"/>
-              <a:buChar char="•"/>
             </a:pPr>
             <a:r>
               <a:rPr lang="en-US" sz="1500" dirty="0">
                 <a:solidFill>
                   <a:srgbClr val="3D3A36"/>
                 </a:solidFill>
-                <a:latin typeface="Calibri" pitchFamily="34" charset="0"/>
-                <a:ea typeface="Calibri" pitchFamily="34" charset="-122"/>
-                <a:cs typeface="Calibri" pitchFamily="34" charset="-120"/>
-              </a:rPr>
-              <a:t>1 = certain (the sun rising tomorrow).</a:t>
+                <a:latin typeface="Arial" pitchFamily="34" charset="0"/>
+                <a:ea typeface="Arial" pitchFamily="34" charset="-122"/>
+                <a:cs typeface="Arial" pitchFamily="34" charset="-120"/>
+              </a:rPr>
+              <a:t>P(certain event) = 1. Example: the sun will rise tomorrow.</a:t>
             </a:r>
             <a:endParaRPr lang="en-US" sz="1500" dirty="0"/>
           </a:p>
           <a:p>
-            <a:pPr marL="342900" indent="-342900">
+            <a:pPr>
+              <a:lnSpc>
+                <a:spcPct val="150000"/>
+              </a:lnSpc>
               <a:spcAft>
-                <a:spcPts val="800"/>
+                <a:spcPts val="600"/>
               </a:spcAft>
-              <a:buSzPct val="100000"/>
-              <a:buChar char="•"/>
             </a:pPr>
             <a:r>
               <a:rPr lang="en-US" sz="1500" dirty="0">
                 <a:solidFill>
                   <a:srgbClr val="3D3A36"/>
                 </a:solidFill>
-                <a:latin typeface="Calibri" pitchFamily="34" charset="0"/>
-                <a:ea typeface="Calibri" pitchFamily="34" charset="-122"/>
-                <a:cs typeface="Calibri" pitchFamily="34" charset="-120"/>
-              </a:rPr>
-              <a:t>Probability = number of favourable outcomes ÷ total number of outcomes.</a:t>
+                <a:latin typeface="Arial" pitchFamily="34" charset="0"/>
+                <a:ea typeface="Arial" pitchFamily="34" charset="-122"/>
+                <a:cs typeface="Arial" pitchFamily="34" charset="-120"/>
+              </a:rPr>
+              <a:t>P(even chance) = 0.5. Example: flipping heads on a fair coin.</a:t>
             </a:r>
             <a:endParaRPr lang="en-US" sz="1500" dirty="0"/>
-          </a:p>
-          <a:p>
-            <a:pPr marL="342900" indent="-342900">
-              <a:spcAft>
-                <a:spcPts val="800"/>
-              </a:spcAft>
-              <a:buSzPct val="100000"/>
-              <a:buChar char="•"/>
-            </a:pPr>
-            <a:r>
-              <a:rPr lang="en-US" sz="1500" dirty="0">
-                <a:solidFill>
-                  <a:srgbClr val="3D3A36"/>
-                </a:solidFill>
-                <a:latin typeface="Calibri" pitchFamily="34" charset="0"/>
-                <a:ea typeface="Calibri" pitchFamily="34" charset="-122"/>
-                <a:cs typeface="Calibri" pitchFamily="34" charset="-120"/>
-              </a:rPr>
-              <a:t>Can be written as a fraction, decimal, or percentage.</a:t>
-            </a:r>
-            <a:endParaRPr lang="en-US" sz="1500" dirty="0"/>
-          </a:p>
-        </p:txBody>
-      </p:sp>
-      <p:sp>
-        <p:nvSpPr>
-          <p:cNvPr id="7" name="Shape 5"/>
-          <p:cNvSpPr/>
-          <p:nvPr/>
-        </p:nvSpPr>
-        <p:spPr>
-          <a:xfrm>
-            <a:off x="731520" y="4206240"/>
-            <a:ext cx="7680960" cy="640080"/>
-          </a:xfrm>
-          <a:prstGeom prst="rect">
-            <a:avLst/>
-          </a:prstGeom>
-          <a:solidFill>
-            <a:srgbClr val="E8F5F3"/>
-          </a:solidFill>
-          <a:ln/>
-          <a:effectLst>
-            <a:outerShdw sx="100000" sy="100000" kx="0" ky="0" algn="bl" rotWithShape="0" blurRad="50800" dist="25400" dir="8100000">
-              <a:srgbClr val="000000">
-                <a:alpha val="10000"/>
-              </a:srgbClr>
-            </a:outerShdw>
-          </a:effectLst>
-        </p:spPr>
-      </p:sp>
-      <p:sp>
-        <p:nvSpPr>
-          <p:cNvPr id="8" name="Text 6"/>
-          <p:cNvSpPr/>
-          <p:nvPr/>
-        </p:nvSpPr>
-        <p:spPr>
-          <a:xfrm>
-            <a:off x="914400" y="4251960"/>
-            <a:ext cx="7315200" cy="548640"/>
-          </a:xfrm>
-          <a:prstGeom prst="rect">
-            <a:avLst/>
-          </a:prstGeom>
-          <a:noFill/>
-          <a:ln/>
-        </p:spPr>
-        <p:txBody>
-          <a:bodyPr wrap="square" rtlCol="0" anchor="ctr"/>
-          <a:lstStyle/>
-          <a:p>
-            <a:pPr indent="0" marL="0">
-              <a:buNone/>
-            </a:pPr>
-            <a:r>
-              <a:rPr lang="en-US" sz="1200" b="1" dirty="0">
-                <a:solidFill>
-                  <a:srgbClr val="2A9D8F"/>
-                </a:solidFill>
-                <a:latin typeface="Calibri" pitchFamily="34" charset="0"/>
-                <a:ea typeface="Calibri" pitchFamily="34" charset="-122"/>
-                <a:cs typeface="Calibri" pitchFamily="34" charset="-120"/>
-              </a:rPr>
-              <a:t>Key Idea: </a:t>
-            </a:r>
-            <a:pPr indent="0" marL="0">
-              <a:buNone/>
-            </a:pPr>
-            <a:r>
-              <a:rPr lang="en-US" sz="1200" i="1" dirty="0">
-                <a:solidFill>
-                  <a:srgbClr val="3D3A36"/>
-                </a:solidFill>
-                <a:latin typeface="Calibri" pitchFamily="34" charset="0"/>
-                <a:ea typeface="Calibri" pitchFamily="34" charset="-122"/>
-                <a:cs typeface="Calibri" pitchFamily="34" charset="-120"/>
-              </a:rPr>
-              <a:t>Probability can NEVER be less than 0 or greater than 1.</a:t>
-            </a:r>
-            <a:endParaRPr lang="en-US" sz="1200" dirty="0"/>
           </a:p>
         </p:txBody>
       </p:sp>
@@ -2918,47 +2637,7 @@
         <p:spPr>
           <a:xfrm>
             <a:off x="0" y="0"/>
-            <a:ext cx="9144000" cy="822960"/>
-          </a:xfrm>
-          <a:prstGeom prst="rect">
-            <a:avLst/>
-          </a:prstGeom>
-          <a:solidFill>
-            <a:srgbClr val="FFFFFF"/>
-          </a:solidFill>
-          <a:ln/>
-        </p:spPr>
-      </p:sp>
-      <p:sp>
-        <p:nvSpPr>
-          <p:cNvPr id="3" name="Shape 1"/>
-          <p:cNvSpPr/>
-          <p:nvPr/>
-        </p:nvSpPr>
-        <p:spPr>
-          <a:xfrm>
-            <a:off x="0" y="804672"/>
-            <a:ext cx="9144000" cy="27432"/>
-          </a:xfrm>
-          <a:prstGeom prst="rect">
-            <a:avLst/>
-          </a:prstGeom>
-          <a:solidFill>
-            <a:srgbClr val="E5E2DC"/>
-          </a:solidFill>
-          <a:ln/>
-        </p:spPr>
-      </p:sp>
-      <p:sp>
-        <p:nvSpPr>
-          <p:cNvPr id="4" name="Shape 2"/>
-          <p:cNvSpPr/>
-          <p:nvPr/>
-        </p:nvSpPr>
-        <p:spPr>
-          <a:xfrm>
-            <a:off x="548640" y="201168"/>
-            <a:ext cx="54864" cy="420624"/>
+            <a:ext cx="73152" cy="5148072"/>
           </a:xfrm>
           <a:prstGeom prst="rect">
             <a:avLst/>
@@ -2971,30 +2650,30 @@
       </p:sp>
       <p:sp>
         <p:nvSpPr>
-          <p:cNvPr id="5" name="Text 3"/>
-          <p:cNvSpPr/>
-          <p:nvPr/>
-        </p:nvSpPr>
-        <p:spPr>
-          <a:xfrm>
-            <a:off x="777240" y="137160"/>
-            <a:ext cx="7772400" cy="548640"/>
-          </a:xfrm>
-          <a:prstGeom prst="rect">
-            <a:avLst/>
-          </a:prstGeom>
-          <a:noFill/>
-          <a:ln/>
-        </p:spPr>
-        <p:txBody>
-          <a:bodyPr wrap="square" lIns="0" tIns="0" rIns="0" bIns="0" rtlCol="0" anchor="ctr"/>
+          <p:cNvPr id="3" name="Text 1"/>
+          <p:cNvSpPr/>
+          <p:nvPr/>
+        </p:nvSpPr>
+        <p:spPr>
+          <a:xfrm>
+            <a:off x="548640" y="274320"/>
+            <a:ext cx="9144000" cy="640080"/>
+          </a:xfrm>
+          <a:prstGeom prst="rect">
+            <a:avLst/>
+          </a:prstGeom>
+          <a:noFill/>
+          <a:ln/>
+        </p:spPr>
+        <p:txBody>
+          <a:bodyPr wrap="square" rtlCol="0" anchor="ctr"/>
           <a:lstStyle/>
           <a:p>
             <a:pPr indent="0" marL="0">
               <a:buNone/>
             </a:pPr>
             <a:r>
-              <a:rPr lang="en-US" sz="2000" b="1" dirty="0">
+              <a:rPr lang="en-US" sz="2400" b="1" dirty="0">
                 <a:solidFill>
                   <a:srgbClr val="1B2A4A"/>
                 </a:solidFill>
@@ -3002,480 +2681,161 @@
                 <a:ea typeface="Georgia" pitchFamily="34" charset="-122"/>
                 <a:cs typeface="Georgia" pitchFamily="34" charset="-120"/>
               </a:rPr>
-              <a:t>Probability of Rolling a Dice</a:t>
-            </a:r>
-            <a:endParaRPr lang="en-US" sz="2000" dirty="0"/>
-          </a:p>
-        </p:txBody>
-      </p:sp>
-      <p:sp>
-        <p:nvSpPr>
-          <p:cNvPr id="6" name="Shape 4"/>
-          <p:cNvSpPr/>
-          <p:nvPr/>
-        </p:nvSpPr>
-        <p:spPr>
-          <a:xfrm>
-            <a:off x="731520" y="1280160"/>
-            <a:ext cx="2377440" cy="2377440"/>
+              <a:t>Calculating Probability</a:t>
+            </a:r>
+            <a:endParaRPr lang="en-US" sz="2400" dirty="0"/>
+          </a:p>
+        </p:txBody>
+      </p:sp>
+      <p:sp>
+        <p:nvSpPr>
+          <p:cNvPr id="4" name="Shape 2"/>
+          <p:cNvSpPr/>
+          <p:nvPr/>
+        </p:nvSpPr>
+        <p:spPr>
+          <a:xfrm>
+            <a:off x="548640" y="960120"/>
+            <a:ext cx="2286000" cy="36576"/>
           </a:xfrm>
           <a:prstGeom prst="rect">
             <a:avLst/>
           </a:prstGeom>
           <a:solidFill>
-            <a:srgbClr val="FFFFFF"/>
+            <a:srgbClr val="2A9D8F"/>
           </a:solidFill>
           <a:ln/>
-          <a:effectLst>
-            <a:outerShdw sx="100000" sy="100000" kx="0" ky="0" algn="bl" rotWithShape="0" blurRad="50800" dist="25400" dir="8100000">
-              <a:srgbClr val="000000">
-                <a:alpha val="10000"/>
-              </a:srgbClr>
-            </a:outerShdw>
-          </a:effectLst>
-        </p:spPr>
-      </p:sp>
-      <p:sp>
-        <p:nvSpPr>
-          <p:cNvPr id="7" name="Text 5"/>
-          <p:cNvSpPr/>
-          <p:nvPr/>
-        </p:nvSpPr>
-        <p:spPr>
-          <a:xfrm>
-            <a:off x="731520" y="1463040"/>
-            <a:ext cx="2377440" cy="914400"/>
-          </a:xfrm>
-          <a:prstGeom prst="rect">
-            <a:avLst/>
-          </a:prstGeom>
-          <a:noFill/>
-          <a:ln/>
-        </p:spPr>
-        <p:txBody>
-          <a:bodyPr wrap="square" rtlCol="0" anchor="ctr"/>
-          <a:lstStyle/>
-          <a:p>
-            <a:pPr algn="ctr" indent="0" marL="0">
-              <a:buNone/>
-            </a:pPr>
-            <a:r>
-              <a:rPr lang="en-US" sz="3600" b="1" dirty="0">
-                <a:solidFill>
-                  <a:srgbClr val="2A9D8F"/>
-                </a:solidFill>
-                <a:latin typeface="Georgia" pitchFamily="34" charset="0"/>
-                <a:ea typeface="Georgia" pitchFamily="34" charset="-122"/>
-                <a:cs typeface="Georgia" pitchFamily="34" charset="-120"/>
-              </a:rPr>
-              <a:t>1/6</a:t>
-            </a:r>
-            <a:endParaRPr lang="en-US" sz="3600" dirty="0"/>
-          </a:p>
-        </p:txBody>
-      </p:sp>
-      <p:sp>
-        <p:nvSpPr>
-          <p:cNvPr id="8" name="Text 6"/>
-          <p:cNvSpPr/>
-          <p:nvPr/>
-        </p:nvSpPr>
-        <p:spPr>
-          <a:xfrm>
-            <a:off x="731520" y="2423160"/>
-            <a:ext cx="2377440" cy="365760"/>
-          </a:xfrm>
-          <a:prstGeom prst="rect">
-            <a:avLst/>
-          </a:prstGeom>
-          <a:noFill/>
-          <a:ln/>
-        </p:spPr>
-        <p:txBody>
-          <a:bodyPr wrap="square" rtlCol="0" anchor="ctr"/>
-          <a:lstStyle/>
-          <a:p>
-            <a:pPr algn="ctr" indent="0" marL="0">
-              <a:buNone/>
-            </a:pPr>
-            <a:r>
-              <a:rPr lang="en-US" sz="1200" b="1" dirty="0">
-                <a:solidFill>
-                  <a:srgbClr val="6B6660"/>
-                </a:solidFill>
-                <a:latin typeface="Calibri" pitchFamily="34" charset="0"/>
-                <a:ea typeface="Calibri" pitchFamily="34" charset="-122"/>
-                <a:cs typeface="Calibri" pitchFamily="34" charset="-120"/>
-              </a:rPr>
-              <a:t>ROLLING A 3</a:t>
-            </a:r>
-            <a:endParaRPr lang="en-US" sz="1200" dirty="0"/>
-          </a:p>
-        </p:txBody>
-      </p:sp>
-      <p:sp>
-        <p:nvSpPr>
-          <p:cNvPr id="9" name="Text 7"/>
-          <p:cNvSpPr/>
-          <p:nvPr/>
-        </p:nvSpPr>
-        <p:spPr>
-          <a:xfrm>
-            <a:off x="822960" y="2834640"/>
-            <a:ext cx="2194560" cy="640080"/>
-          </a:xfrm>
-          <a:prstGeom prst="rect">
-            <a:avLst/>
-          </a:prstGeom>
-          <a:noFill/>
-          <a:ln/>
-        </p:spPr>
-        <p:txBody>
-          <a:bodyPr wrap="square" rtlCol="0" anchor="ctr"/>
-          <a:lstStyle/>
-          <a:p>
-            <a:pPr algn="ctr" indent="0" marL="0">
-              <a:buNone/>
-            </a:pPr>
-            <a:r>
-              <a:rPr lang="en-US" sz="1000" dirty="0">
-                <a:solidFill>
-                  <a:srgbClr val="9B9690"/>
-                </a:solidFill>
-                <a:latin typeface="Calibri" pitchFamily="34" charset="0"/>
-                <a:ea typeface="Calibri" pitchFamily="34" charset="-122"/>
-                <a:cs typeface="Calibri" pitchFamily="34" charset="-120"/>
-              </a:rPr>
-              <a:t>One favourable outcome out of six</a:t>
-            </a:r>
-            <a:endParaRPr lang="en-US" sz="1000" dirty="0"/>
-          </a:p>
-        </p:txBody>
-      </p:sp>
-      <p:sp>
-        <p:nvSpPr>
-          <p:cNvPr id="10" name="Shape 8"/>
-          <p:cNvSpPr/>
-          <p:nvPr/>
-        </p:nvSpPr>
-        <p:spPr>
-          <a:xfrm>
-            <a:off x="3383280" y="1280160"/>
-            <a:ext cx="2377440" cy="2377440"/>
-          </a:xfrm>
-          <a:prstGeom prst="rect">
-            <a:avLst/>
-          </a:prstGeom>
-          <a:solidFill>
-            <a:srgbClr val="FFFFFF"/>
-          </a:solidFill>
-          <a:ln/>
-          <a:effectLst>
-            <a:outerShdw sx="100000" sy="100000" kx="0" ky="0" algn="bl" rotWithShape="0" blurRad="50800" dist="25400" dir="8100000">
-              <a:srgbClr val="000000">
-                <a:alpha val="10000"/>
-              </a:srgbClr>
-            </a:outerShdw>
-          </a:effectLst>
-        </p:spPr>
-      </p:sp>
-      <p:sp>
-        <p:nvSpPr>
-          <p:cNvPr id="11" name="Text 9"/>
-          <p:cNvSpPr/>
-          <p:nvPr/>
-        </p:nvSpPr>
-        <p:spPr>
-          <a:xfrm>
-            <a:off x="3383280" y="1463040"/>
-            <a:ext cx="2377440" cy="914400"/>
-          </a:xfrm>
-          <a:prstGeom prst="rect">
-            <a:avLst/>
-          </a:prstGeom>
-          <a:noFill/>
-          <a:ln/>
-        </p:spPr>
-        <p:txBody>
-          <a:bodyPr wrap="square" rtlCol="0" anchor="ctr"/>
-          <a:lstStyle/>
-          <a:p>
-            <a:pPr algn="ctr" indent="0" marL="0">
-              <a:buNone/>
-            </a:pPr>
-            <a:r>
-              <a:rPr lang="en-US" sz="3600" b="1" dirty="0">
-                <a:solidFill>
-                  <a:srgbClr val="2A9D8F"/>
-                </a:solidFill>
-                <a:latin typeface="Georgia" pitchFamily="34" charset="0"/>
-                <a:ea typeface="Georgia" pitchFamily="34" charset="-122"/>
-                <a:cs typeface="Georgia" pitchFamily="34" charset="-120"/>
-              </a:rPr>
-              <a:t>3/6</a:t>
-            </a:r>
-            <a:endParaRPr lang="en-US" sz="3600" dirty="0"/>
-          </a:p>
-        </p:txBody>
-      </p:sp>
-      <p:sp>
-        <p:nvSpPr>
-          <p:cNvPr id="12" name="Text 10"/>
-          <p:cNvSpPr/>
-          <p:nvPr/>
-        </p:nvSpPr>
-        <p:spPr>
-          <a:xfrm>
-            <a:off x="3383280" y="2423160"/>
-            <a:ext cx="2377440" cy="365760"/>
-          </a:xfrm>
-          <a:prstGeom prst="rect">
-            <a:avLst/>
-          </a:prstGeom>
-          <a:noFill/>
-          <a:ln/>
-        </p:spPr>
-        <p:txBody>
-          <a:bodyPr wrap="square" rtlCol="0" anchor="ctr"/>
-          <a:lstStyle/>
-          <a:p>
-            <a:pPr algn="ctr" indent="0" marL="0">
-              <a:buNone/>
-            </a:pPr>
-            <a:r>
-              <a:rPr lang="en-US" sz="1200" b="1" dirty="0">
-                <a:solidFill>
-                  <a:srgbClr val="6B6660"/>
-                </a:solidFill>
-                <a:latin typeface="Calibri" pitchFamily="34" charset="0"/>
-                <a:ea typeface="Calibri" pitchFamily="34" charset="-122"/>
-                <a:cs typeface="Calibri" pitchFamily="34" charset="-120"/>
-              </a:rPr>
-              <a:t>ROLLING EVEN</a:t>
-            </a:r>
-            <a:endParaRPr lang="en-US" sz="1200" dirty="0"/>
-          </a:p>
-        </p:txBody>
-      </p:sp>
-      <p:sp>
-        <p:nvSpPr>
-          <p:cNvPr id="13" name="Text 11"/>
-          <p:cNvSpPr/>
-          <p:nvPr/>
-        </p:nvSpPr>
-        <p:spPr>
-          <a:xfrm>
-            <a:off x="3474720" y="2834640"/>
-            <a:ext cx="2194560" cy="640080"/>
-          </a:xfrm>
-          <a:prstGeom prst="rect">
-            <a:avLst/>
-          </a:prstGeom>
-          <a:noFill/>
-          <a:ln/>
-        </p:spPr>
-        <p:txBody>
-          <a:bodyPr wrap="square" rtlCol="0" anchor="ctr"/>
-          <a:lstStyle/>
-          <a:p>
-            <a:pPr algn="ctr" indent="0" marL="0">
-              <a:buNone/>
-            </a:pPr>
-            <a:r>
-              <a:rPr lang="en-US" sz="1000" dirty="0">
-                <a:solidFill>
-                  <a:srgbClr val="9B9690"/>
-                </a:solidFill>
-                <a:latin typeface="Calibri" pitchFamily="34" charset="0"/>
-                <a:ea typeface="Calibri" pitchFamily="34" charset="-122"/>
-                <a:cs typeface="Calibri" pitchFamily="34" charset="-120"/>
-              </a:rPr>
-              <a:t>Three even numbers: 2, 4, 6</a:t>
-            </a:r>
-            <a:endParaRPr lang="en-US" sz="1000" dirty="0"/>
-          </a:p>
-        </p:txBody>
-      </p:sp>
-      <p:sp>
-        <p:nvSpPr>
-          <p:cNvPr id="14" name="Shape 12"/>
-          <p:cNvSpPr/>
-          <p:nvPr/>
-        </p:nvSpPr>
-        <p:spPr>
-          <a:xfrm>
-            <a:off x="6035040" y="1280160"/>
-            <a:ext cx="2377440" cy="2377440"/>
-          </a:xfrm>
-          <a:prstGeom prst="rect">
-            <a:avLst/>
-          </a:prstGeom>
-          <a:solidFill>
-            <a:srgbClr val="FFFFFF"/>
-          </a:solidFill>
-          <a:ln/>
-          <a:effectLst>
-            <a:outerShdw sx="100000" sy="100000" kx="0" ky="0" algn="bl" rotWithShape="0" blurRad="50800" dist="25400" dir="8100000">
-              <a:srgbClr val="000000">
-                <a:alpha val="10000"/>
-              </a:srgbClr>
-            </a:outerShdw>
-          </a:effectLst>
-        </p:spPr>
-      </p:sp>
-      <p:sp>
-        <p:nvSpPr>
-          <p:cNvPr id="15" name="Text 13"/>
-          <p:cNvSpPr/>
-          <p:nvPr/>
-        </p:nvSpPr>
-        <p:spPr>
-          <a:xfrm>
-            <a:off x="6035040" y="1463040"/>
-            <a:ext cx="2377440" cy="914400"/>
-          </a:xfrm>
-          <a:prstGeom prst="rect">
-            <a:avLst/>
-          </a:prstGeom>
-          <a:noFill/>
-          <a:ln/>
-        </p:spPr>
-        <p:txBody>
-          <a:bodyPr wrap="square" rtlCol="0" anchor="ctr"/>
-          <a:lstStyle/>
-          <a:p>
-            <a:pPr algn="ctr" indent="0" marL="0">
-              <a:buNone/>
-            </a:pPr>
-            <a:r>
-              <a:rPr lang="en-US" sz="3600" b="1" dirty="0">
-                <a:solidFill>
-                  <a:srgbClr val="2A9D8F"/>
-                </a:solidFill>
-                <a:latin typeface="Georgia" pitchFamily="34" charset="0"/>
-                <a:ea typeface="Georgia" pitchFamily="34" charset="-122"/>
-                <a:cs typeface="Georgia" pitchFamily="34" charset="-120"/>
-              </a:rPr>
-              <a:t>6/6</a:t>
-            </a:r>
-            <a:endParaRPr lang="en-US" sz="3600" dirty="0"/>
-          </a:p>
-        </p:txBody>
-      </p:sp>
-      <p:sp>
-        <p:nvSpPr>
-          <p:cNvPr id="16" name="Text 14"/>
-          <p:cNvSpPr/>
-          <p:nvPr/>
-        </p:nvSpPr>
-        <p:spPr>
-          <a:xfrm>
-            <a:off x="6035040" y="2423160"/>
-            <a:ext cx="2377440" cy="365760"/>
-          </a:xfrm>
-          <a:prstGeom prst="rect">
-            <a:avLst/>
-          </a:prstGeom>
-          <a:noFill/>
-          <a:ln/>
-        </p:spPr>
-        <p:txBody>
-          <a:bodyPr wrap="square" rtlCol="0" anchor="ctr"/>
-          <a:lstStyle/>
-          <a:p>
-            <a:pPr algn="ctr" indent="0" marL="0">
-              <a:buNone/>
-            </a:pPr>
-            <a:r>
-              <a:rPr lang="en-US" sz="1200" b="1" dirty="0">
-                <a:solidFill>
-                  <a:srgbClr val="6B6660"/>
-                </a:solidFill>
-                <a:latin typeface="Calibri" pitchFamily="34" charset="0"/>
-                <a:ea typeface="Calibri" pitchFamily="34" charset="-122"/>
-                <a:cs typeface="Calibri" pitchFamily="34" charset="-120"/>
-              </a:rPr>
-              <a:t>ROLLING 1–6</a:t>
-            </a:r>
-            <a:endParaRPr lang="en-US" sz="1200" dirty="0"/>
-          </a:p>
-        </p:txBody>
-      </p:sp>
-      <p:sp>
-        <p:nvSpPr>
-          <p:cNvPr id="17" name="Text 15"/>
-          <p:cNvSpPr/>
-          <p:nvPr/>
-        </p:nvSpPr>
-        <p:spPr>
-          <a:xfrm>
-            <a:off x="6126480" y="2834640"/>
-            <a:ext cx="2194560" cy="640080"/>
-          </a:xfrm>
-          <a:prstGeom prst="rect">
-            <a:avLst/>
-          </a:prstGeom>
-          <a:noFill/>
-          <a:ln/>
-        </p:spPr>
-        <p:txBody>
-          <a:bodyPr wrap="square" rtlCol="0" anchor="ctr"/>
-          <a:lstStyle/>
-          <a:p>
-            <a:pPr algn="ctr" indent="0" marL="0">
-              <a:buNone/>
-            </a:pPr>
-            <a:r>
-              <a:rPr lang="en-US" sz="1000" dirty="0">
-                <a:solidFill>
-                  <a:srgbClr val="9B9690"/>
-                </a:solidFill>
-                <a:latin typeface="Calibri" pitchFamily="34" charset="0"/>
-                <a:ea typeface="Calibri" pitchFamily="34" charset="-122"/>
-                <a:cs typeface="Calibri" pitchFamily="34" charset="-120"/>
-              </a:rPr>
-              <a:t>All outcomes covered = certain</a:t>
-            </a:r>
-            <a:endParaRPr lang="en-US" sz="1000" dirty="0"/>
-          </a:p>
-        </p:txBody>
-      </p:sp>
-      <p:sp>
-        <p:nvSpPr>
-          <p:cNvPr id="18" name="Text 16"/>
-          <p:cNvSpPr/>
-          <p:nvPr/>
-        </p:nvSpPr>
-        <p:spPr>
-          <a:xfrm>
-            <a:off x="731520" y="4114800"/>
-            <a:ext cx="7680960" cy="457200"/>
-          </a:xfrm>
-          <a:prstGeom prst="rect">
-            <a:avLst/>
-          </a:prstGeom>
-          <a:noFill/>
-          <a:ln/>
-        </p:spPr>
-        <p:txBody>
-          <a:bodyPr wrap="square" rtlCol="0" anchor="ctr"/>
-          <a:lstStyle/>
-          <a:p>
-            <a:pPr algn="ctr" indent="0" marL="0">
-              <a:buNone/>
-            </a:pPr>
-            <a:r>
-              <a:rPr lang="en-US" sz="1200" i="1" dirty="0">
-                <a:solidFill>
-                  <a:srgbClr val="6B6660"/>
-                </a:solidFill>
-                <a:latin typeface="Calibri" pitchFamily="34" charset="0"/>
-                <a:ea typeface="Calibri" pitchFamily="34" charset="-122"/>
-                <a:cs typeface="Calibri" pitchFamily="34" charset="-120"/>
-              </a:rPr>
-              <a:t>P(event) = favourable outcomes ÷ total outcomes</a:t>
-            </a:r>
-            <a:endParaRPr lang="en-US" sz="1200" dirty="0"/>
+        </p:spPr>
+      </p:sp>
+      <p:sp>
+        <p:nvSpPr>
+          <p:cNvPr id="5" name="Text 3"/>
+          <p:cNvSpPr/>
+          <p:nvPr/>
+        </p:nvSpPr>
+        <p:spPr>
+          <a:xfrm>
+            <a:off x="548640" y="1188720"/>
+            <a:ext cx="10058400" cy="3474720"/>
+          </a:xfrm>
+          <a:prstGeom prst="rect">
+            <a:avLst/>
+          </a:prstGeom>
+          <a:noFill/>
+          <a:ln/>
+        </p:spPr>
+        <p:txBody>
+          <a:bodyPr wrap="square" rtlCol="0" anchor="t"/>
+          <a:lstStyle/>
+          <a:p>
+            <a:pPr>
+              <a:lnSpc>
+                <a:spcPct val="150000"/>
+              </a:lnSpc>
+              <a:spcAft>
+                <a:spcPts val="600"/>
+              </a:spcAft>
+            </a:pPr>
+            <a:r>
+              <a:rPr lang="en-US" sz="1500" dirty="0">
+                <a:solidFill>
+                  <a:srgbClr val="3D3A36"/>
+                </a:solidFill>
+                <a:latin typeface="Arial" pitchFamily="34" charset="0"/>
+                <a:ea typeface="Arial" pitchFamily="34" charset="-122"/>
+                <a:cs typeface="Arial" pitchFamily="34" charset="-120"/>
+              </a:rPr>
+              <a:t>P(event) = number of favourable outcomes ÷ total number of outcomes.</a:t>
+            </a:r>
+            <a:endParaRPr lang="en-US" sz="1500" dirty="0"/>
+          </a:p>
+          <a:p>
+            <a:pPr>
+              <a:lnSpc>
+                <a:spcPct val="150000"/>
+              </a:lnSpc>
+              <a:spcAft>
+                <a:spcPts val="600"/>
+              </a:spcAft>
+            </a:pPr>
+            <a:r>
+              <a:rPr lang="en-US" sz="1500" dirty="0">
+                <a:solidFill>
+                  <a:srgbClr val="3D3A36"/>
+                </a:solidFill>
+                <a:latin typeface="Arial" pitchFamily="34" charset="0"/>
+                <a:ea typeface="Arial" pitchFamily="34" charset="-122"/>
+                <a:cs typeface="Arial" pitchFamily="34" charset="-120"/>
+              </a:rPr>
+              <a:t>Example: P(rolling a 3 on a die) = 1/6 (one 3, six possible outcomes).</a:t>
+            </a:r>
+            <a:endParaRPr lang="en-US" sz="1500" dirty="0"/>
+          </a:p>
+          <a:p>
+            <a:pPr>
+              <a:lnSpc>
+                <a:spcPct val="150000"/>
+              </a:lnSpc>
+              <a:spcAft>
+                <a:spcPts val="600"/>
+              </a:spcAft>
+            </a:pPr>
+            <a:r>
+              <a:rPr lang="en-US" sz="1500" dirty="0">
+                <a:solidFill>
+                  <a:srgbClr val="3D3A36"/>
+                </a:solidFill>
+                <a:latin typeface="Arial" pitchFamily="34" charset="0"/>
+                <a:ea typeface="Arial" pitchFamily="34" charset="-122"/>
+                <a:cs typeface="Arial" pitchFamily="34" charset="-120"/>
+              </a:rPr>
+              <a:t>Example: P(picking a red ball from 3 red + 5 blue) = 3/8.</a:t>
+            </a:r>
+            <a:endParaRPr lang="en-US" sz="1500" dirty="0"/>
+          </a:p>
+          <a:p>
+            <a:pPr>
+              <a:lnSpc>
+                <a:spcPct val="150000"/>
+              </a:lnSpc>
+              <a:spcAft>
+                <a:spcPts val="600"/>
+              </a:spcAft>
+            </a:pPr>
+            <a:r>
+              <a:rPr lang="en-US" sz="1500" dirty="0">
+                <a:solidFill>
+                  <a:srgbClr val="3D3A36"/>
+                </a:solidFill>
+                <a:latin typeface="Arial" pitchFamily="34" charset="0"/>
+                <a:ea typeface="Arial" pitchFamily="34" charset="-122"/>
+                <a:cs typeface="Arial" pitchFamily="34" charset="-120"/>
+              </a:rPr>
+              <a:t>Probabilities can be written as fractions, decimals, or percentages.</a:t>
+            </a:r>
+            <a:endParaRPr lang="en-US" sz="1500" dirty="0"/>
+          </a:p>
+          <a:p>
+            <a:pPr>
+              <a:lnSpc>
+                <a:spcPct val="150000"/>
+              </a:lnSpc>
+              <a:spcAft>
+                <a:spcPts val="600"/>
+              </a:spcAft>
+            </a:pPr>
+            <a:r>
+              <a:rPr lang="en-US" sz="1500" dirty="0">
+                <a:solidFill>
+                  <a:srgbClr val="3D3A36"/>
+                </a:solidFill>
+                <a:latin typeface="Arial" pitchFamily="34" charset="0"/>
+                <a:ea typeface="Arial" pitchFamily="34" charset="-122"/>
+                <a:cs typeface="Arial" pitchFamily="34" charset="-120"/>
+              </a:rPr>
+              <a:t>All probabilities of all outcomes must ADD UP TO 1.</a:t>
+            </a:r>
+            <a:endParaRPr lang="en-US" sz="1500" dirty="0"/>
           </a:p>
         </p:txBody>
       </p:sp>
@@ -3520,47 +2880,7 @@
         <p:spPr>
           <a:xfrm>
             <a:off x="0" y="0"/>
-            <a:ext cx="9144000" cy="822960"/>
-          </a:xfrm>
-          <a:prstGeom prst="rect">
-            <a:avLst/>
-          </a:prstGeom>
-          <a:solidFill>
-            <a:srgbClr val="FFFFFF"/>
-          </a:solidFill>
-          <a:ln/>
-        </p:spPr>
-      </p:sp>
-      <p:sp>
-        <p:nvSpPr>
-          <p:cNvPr id="3" name="Shape 1"/>
-          <p:cNvSpPr/>
-          <p:nvPr/>
-        </p:nvSpPr>
-        <p:spPr>
-          <a:xfrm>
-            <a:off x="0" y="804672"/>
-            <a:ext cx="9144000" cy="27432"/>
-          </a:xfrm>
-          <a:prstGeom prst="rect">
-            <a:avLst/>
-          </a:prstGeom>
-          <a:solidFill>
-            <a:srgbClr val="E5E2DC"/>
-          </a:solidFill>
-          <a:ln/>
-        </p:spPr>
-      </p:sp>
-      <p:sp>
-        <p:nvSpPr>
-          <p:cNvPr id="4" name="Shape 2"/>
-          <p:cNvSpPr/>
-          <p:nvPr/>
-        </p:nvSpPr>
-        <p:spPr>
-          <a:xfrm>
-            <a:off x="548640" y="201168"/>
-            <a:ext cx="54864" cy="420624"/>
+            <a:ext cx="73152" cy="5148072"/>
           </a:xfrm>
           <a:prstGeom prst="rect">
             <a:avLst/>
@@ -3573,23 +2893,84 @@
       </p:sp>
       <p:sp>
         <p:nvSpPr>
+          <p:cNvPr id="3" name="Shape 1"/>
+          <p:cNvSpPr/>
+          <p:nvPr/>
+        </p:nvSpPr>
+        <p:spPr>
+          <a:xfrm>
+            <a:off x="548640" y="274320"/>
+            <a:ext cx="2011680" cy="320040"/>
+          </a:xfrm>
+          <a:prstGeom prst="roundRect">
+            <a:avLst>
+              <a:gd name="adj" fmla="val 17143"/>
+            </a:avLst>
+          </a:prstGeom>
+          <a:solidFill>
+            <a:srgbClr val="2A9D8F"/>
+          </a:solidFill>
+          <a:ln/>
+        </p:spPr>
+      </p:sp>
+      <p:sp>
+        <p:nvSpPr>
+          <p:cNvPr id="4" name="Text 2"/>
+          <p:cNvSpPr/>
+          <p:nvPr/>
+        </p:nvSpPr>
+        <p:spPr>
+          <a:xfrm>
+            <a:off x="548640" y="274320"/>
+            <a:ext cx="2011680" cy="320040"/>
+          </a:xfrm>
+          <a:prstGeom prst="rect">
+            <a:avLst/>
+          </a:prstGeom>
+          <a:noFill/>
+          <a:ln/>
+        </p:spPr>
+        <p:txBody>
+          <a:bodyPr wrap="square" rtlCol="0" anchor="ctr"/>
+          <a:lstStyle/>
+          <a:p>
+            <a:pPr algn="ctr" indent="0" marL="0">
+              <a:buNone/>
+            </a:pPr>
+            <a:r>
+              <a:rPr lang="en-US" sz="1000" b="1" dirty="0">
+                <a:solidFill>
+                  <a:srgbClr val="FFFFFF"/>
+                </a:solidFill>
+                <a:latin typeface="Arial" pitchFamily="34" charset="0"/>
+                <a:ea typeface="Arial" pitchFamily="34" charset="-122"/>
+                <a:cs typeface="Arial" pitchFamily="34" charset="-120"/>
+              </a:rPr>
+              <a:t>WORKED EXAMPLE</a:t>
+            </a:r>
+            <a:endParaRPr lang="en-US" sz="1000" dirty="0"/>
+          </a:p>
+        </p:txBody>
+      </p:sp>
+      <p:sp>
+        <p:nvSpPr>
           <p:cNvPr id="5" name="Text 3"/>
           <p:cNvSpPr/>
           <p:nvPr/>
         </p:nvSpPr>
         <p:spPr>
           <a:xfrm>
-            <a:off x="777240" y="137160"/>
-            <a:ext cx="7772400" cy="548640"/>
-          </a:xfrm>
-          <a:prstGeom prst="rect">
-            <a:avLst/>
-          </a:prstGeom>
-          <a:noFill/>
-          <a:ln/>
-        </p:spPr>
-        <p:txBody>
-          <a:bodyPr wrap="square" lIns="0" tIns="0" rIns="0" bIns="0" rtlCol="0" anchor="ctr"/>
+            <a:off x="2743200" y="274320"/>
+            <a:ext cx="7315200" cy="457200"/>
+          </a:xfrm>
+          <a:prstGeom prst="rect">
+            <a:avLst/>
+          </a:prstGeom>
+          <a:noFill/>
+          <a:ln/>
+        </p:spPr>
+        <p:txBody>
+          <a:bodyPr wrap="square" rtlCol="0" anchor="ctr"/>
           <a:lstStyle/>
           <a:p>
             <a:pPr indent="0" marL="0">
@@ -3604,7 +2985,7 @@
                 <a:ea typeface="Georgia" pitchFamily="34" charset="-122"/>
                 <a:cs typeface="Georgia" pitchFamily="34" charset="-120"/>
               </a:rPr>
-              <a:t>Equally Likely Outcomes</a:t>
+              <a:t>Bag of sweets: 4 red, 3 green, 5 yellow</a:t>
             </a:r>
             <a:endParaRPr lang="en-US" sz="2000" dirty="0"/>
           </a:p>
@@ -3612,126 +2993,489 @@
       </p:sp>
       <p:sp>
         <p:nvSpPr>
-          <p:cNvPr id="6" name="Text 4"/>
-          <p:cNvSpPr/>
-          <p:nvPr/>
-        </p:nvSpPr>
-        <p:spPr>
-          <a:xfrm>
-            <a:off x="731520" y="1051560"/>
-            <a:ext cx="7680960" cy="3108960"/>
-          </a:xfrm>
-          <a:prstGeom prst="rect">
-            <a:avLst/>
-          </a:prstGeom>
-          <a:noFill/>
-          <a:ln/>
-        </p:spPr>
-        <p:txBody>
-          <a:bodyPr wrap="square" rtlCol="0" anchor="t"/>
-          <a:lstStyle/>
-          <a:p>
-            <a:pPr marL="342900" indent="-342900">
-              <a:spcAft>
-                <a:spcPts val="800"/>
-              </a:spcAft>
-              <a:buSzPct val="100000"/>
-              <a:buChar char="•"/>
+          <p:cNvPr id="6" name="Shape 4"/>
+          <p:cNvSpPr/>
+          <p:nvPr/>
+        </p:nvSpPr>
+        <p:spPr>
+          <a:xfrm>
+            <a:off x="548640" y="1051560"/>
+            <a:ext cx="365760" cy="365760"/>
+          </a:xfrm>
+          <a:prstGeom prst="ellipse">
+            <a:avLst/>
+          </a:prstGeom>
+          <a:solidFill>
+            <a:srgbClr val="111D35"/>
+          </a:solidFill>
+          <a:ln/>
+        </p:spPr>
+      </p:sp>
+      <p:sp>
+        <p:nvSpPr>
+          <p:cNvPr id="7" name="Text 5"/>
+          <p:cNvSpPr/>
+          <p:nvPr/>
+        </p:nvSpPr>
+        <p:spPr>
+          <a:xfrm>
+            <a:off x="548640" y="1051560"/>
+            <a:ext cx="365760" cy="365760"/>
+          </a:xfrm>
+          <a:prstGeom prst="rect">
+            <a:avLst/>
+          </a:prstGeom>
+          <a:noFill/>
+          <a:ln/>
+        </p:spPr>
+        <p:txBody>
+          <a:bodyPr wrap="square" rtlCol="0" anchor="ctr"/>
+          <a:lstStyle/>
+          <a:p>
+            <a:pPr algn="ctr" indent="0" marL="0">
+              <a:buNone/>
+            </a:pPr>
+            <a:r>
+              <a:rPr lang="en-US" sz="1300" b="1" dirty="0">
+                <a:solidFill>
+                  <a:srgbClr val="FFFFFF"/>
+                </a:solidFill>
+                <a:latin typeface="Arial" pitchFamily="34" charset="0"/>
+                <a:ea typeface="Arial" pitchFamily="34" charset="-122"/>
+                <a:cs typeface="Arial" pitchFamily="34" charset="-120"/>
+              </a:rPr>
+              <a:t>1</a:t>
+            </a:r>
+            <a:endParaRPr lang="en-US" sz="1300" dirty="0"/>
+          </a:p>
+        </p:txBody>
+      </p:sp>
+      <p:sp>
+        <p:nvSpPr>
+          <p:cNvPr id="8" name="Text 6"/>
+          <p:cNvSpPr/>
+          <p:nvPr/>
+        </p:nvSpPr>
+        <p:spPr>
+          <a:xfrm>
+            <a:off x="1097280" y="1005840"/>
+            <a:ext cx="9601200" cy="502920"/>
+          </a:xfrm>
+          <a:prstGeom prst="rect">
+            <a:avLst/>
+          </a:prstGeom>
+          <a:noFill/>
+          <a:ln/>
+        </p:spPr>
+        <p:txBody>
+          <a:bodyPr wrap="square" rtlCol="0" anchor="ctr"/>
+          <a:lstStyle/>
+          <a:p>
+            <a:pPr indent="0" marL="0">
+              <a:buNone/>
             </a:pPr>
             <a:r>
               <a:rPr lang="en-US" sz="1500" dirty="0">
                 <a:solidFill>
                   <a:srgbClr val="3D3A36"/>
                 </a:solidFill>
-                <a:latin typeface="Calibri" pitchFamily="34" charset="0"/>
-                <a:ea typeface="Calibri" pitchFamily="34" charset="-122"/>
-                <a:cs typeface="Calibri" pitchFamily="34" charset="-120"/>
-              </a:rPr>
-              <a:t>When all outcomes are EQUALLY LIKELY: P(event) = favourable ÷ total.</a:t>
+                <a:latin typeface="Arial" pitchFamily="34" charset="0"/>
+                <a:ea typeface="Arial" pitchFamily="34" charset="-122"/>
+                <a:cs typeface="Arial" pitchFamily="34" charset="-120"/>
+              </a:rPr>
+              <a:t>Total sweets = 4 + 3 + 5 = 12.</a:t>
             </a:r>
             <a:endParaRPr lang="en-US" sz="1500" dirty="0"/>
           </a:p>
-          <a:p>
-            <a:pPr marL="342900" indent="-342900">
-              <a:spcAft>
-                <a:spcPts val="800"/>
-              </a:spcAft>
-              <a:buSzPct val="100000"/>
-              <a:buChar char="•"/>
+        </p:txBody>
+      </p:sp>
+      <p:sp>
+        <p:nvSpPr>
+          <p:cNvPr id="9" name="Shape 7"/>
+          <p:cNvSpPr/>
+          <p:nvPr/>
+        </p:nvSpPr>
+        <p:spPr>
+          <a:xfrm>
+            <a:off x="548640" y="1783080"/>
+            <a:ext cx="365760" cy="365760"/>
+          </a:xfrm>
+          <a:prstGeom prst="ellipse">
+            <a:avLst/>
+          </a:prstGeom>
+          <a:solidFill>
+            <a:srgbClr val="111D35"/>
+          </a:solidFill>
+          <a:ln/>
+        </p:spPr>
+      </p:sp>
+      <p:sp>
+        <p:nvSpPr>
+          <p:cNvPr id="10" name="Text 8"/>
+          <p:cNvSpPr/>
+          <p:nvPr/>
+        </p:nvSpPr>
+        <p:spPr>
+          <a:xfrm>
+            <a:off x="548640" y="1783080"/>
+            <a:ext cx="365760" cy="365760"/>
+          </a:xfrm>
+          <a:prstGeom prst="rect">
+            <a:avLst/>
+          </a:prstGeom>
+          <a:noFill/>
+          <a:ln/>
+        </p:spPr>
+        <p:txBody>
+          <a:bodyPr wrap="square" rtlCol="0" anchor="ctr"/>
+          <a:lstStyle/>
+          <a:p>
+            <a:pPr algn="ctr" indent="0" marL="0">
+              <a:buNone/>
+            </a:pPr>
+            <a:r>
+              <a:rPr lang="en-US" sz="1300" b="1" dirty="0">
+                <a:solidFill>
+                  <a:srgbClr val="FFFFFF"/>
+                </a:solidFill>
+                <a:latin typeface="Arial" pitchFamily="34" charset="0"/>
+                <a:ea typeface="Arial" pitchFamily="34" charset="-122"/>
+                <a:cs typeface="Arial" pitchFamily="34" charset="-120"/>
+              </a:rPr>
+              <a:t>2</a:t>
+            </a:r>
+            <a:endParaRPr lang="en-US" sz="1300" dirty="0"/>
+          </a:p>
+        </p:txBody>
+      </p:sp>
+      <p:sp>
+        <p:nvSpPr>
+          <p:cNvPr id="11" name="Text 9"/>
+          <p:cNvSpPr/>
+          <p:nvPr/>
+        </p:nvSpPr>
+        <p:spPr>
+          <a:xfrm>
+            <a:off x="1097280" y="1737360"/>
+            <a:ext cx="9601200" cy="502920"/>
+          </a:xfrm>
+          <a:prstGeom prst="rect">
+            <a:avLst/>
+          </a:prstGeom>
+          <a:noFill/>
+          <a:ln/>
+        </p:spPr>
+        <p:txBody>
+          <a:bodyPr wrap="square" rtlCol="0" anchor="ctr"/>
+          <a:lstStyle/>
+          <a:p>
+            <a:pPr indent="0" marL="0">
+              <a:buNone/>
             </a:pPr>
             <a:r>
               <a:rPr lang="en-US" sz="1500" dirty="0">
                 <a:solidFill>
                   <a:srgbClr val="3D3A36"/>
                 </a:solidFill>
-                <a:latin typeface="Calibri" pitchFamily="34" charset="0"/>
-                <a:ea typeface="Calibri" pitchFamily="34" charset="-122"/>
-                <a:cs typeface="Calibri" pitchFamily="34" charset="-120"/>
-              </a:rPr>
-              <a:t>Fair coin: P(heads) = 1/2. Fair dice: P(even) = 3/6 = 1/2.</a:t>
+                <a:latin typeface="Arial" pitchFamily="34" charset="0"/>
+                <a:ea typeface="Arial" pitchFamily="34" charset="-122"/>
+                <a:cs typeface="Arial" pitchFamily="34" charset="-120"/>
+              </a:rPr>
+              <a:t>P(red) = 4/12 = 1/3 ≈ 0.33 = 33%</a:t>
             </a:r>
             <a:endParaRPr lang="en-US" sz="1500" dirty="0"/>
           </a:p>
-          <a:p>
-            <a:pPr marL="342900" indent="-342900">
-              <a:spcAft>
-                <a:spcPts val="800"/>
-              </a:spcAft>
-              <a:buSzPct val="100000"/>
-              <a:buChar char="•"/>
+        </p:txBody>
+      </p:sp>
+      <p:sp>
+        <p:nvSpPr>
+          <p:cNvPr id="12" name="Shape 10"/>
+          <p:cNvSpPr/>
+          <p:nvPr/>
+        </p:nvSpPr>
+        <p:spPr>
+          <a:xfrm>
+            <a:off x="548640" y="2514600"/>
+            <a:ext cx="365760" cy="365760"/>
+          </a:xfrm>
+          <a:prstGeom prst="ellipse">
+            <a:avLst/>
+          </a:prstGeom>
+          <a:solidFill>
+            <a:srgbClr val="111D35"/>
+          </a:solidFill>
+          <a:ln/>
+        </p:spPr>
+      </p:sp>
+      <p:sp>
+        <p:nvSpPr>
+          <p:cNvPr id="13" name="Text 11"/>
+          <p:cNvSpPr/>
+          <p:nvPr/>
+        </p:nvSpPr>
+        <p:spPr>
+          <a:xfrm>
+            <a:off x="548640" y="2514600"/>
+            <a:ext cx="365760" cy="365760"/>
+          </a:xfrm>
+          <a:prstGeom prst="rect">
+            <a:avLst/>
+          </a:prstGeom>
+          <a:noFill/>
+          <a:ln/>
+        </p:spPr>
+        <p:txBody>
+          <a:bodyPr wrap="square" rtlCol="0" anchor="ctr"/>
+          <a:lstStyle/>
+          <a:p>
+            <a:pPr algn="ctr" indent="0" marL="0">
+              <a:buNone/>
+            </a:pPr>
+            <a:r>
+              <a:rPr lang="en-US" sz="1300" b="1" dirty="0">
+                <a:solidFill>
+                  <a:srgbClr val="FFFFFF"/>
+                </a:solidFill>
+                <a:latin typeface="Arial" pitchFamily="34" charset="0"/>
+                <a:ea typeface="Arial" pitchFamily="34" charset="-122"/>
+                <a:cs typeface="Arial" pitchFamily="34" charset="-120"/>
+              </a:rPr>
+              <a:t>3</a:t>
+            </a:r>
+            <a:endParaRPr lang="en-US" sz="1300" dirty="0"/>
+          </a:p>
+        </p:txBody>
+      </p:sp>
+      <p:sp>
+        <p:nvSpPr>
+          <p:cNvPr id="14" name="Text 12"/>
+          <p:cNvSpPr/>
+          <p:nvPr/>
+        </p:nvSpPr>
+        <p:spPr>
+          <a:xfrm>
+            <a:off x="1097280" y="2468880"/>
+            <a:ext cx="9601200" cy="502920"/>
+          </a:xfrm>
+          <a:prstGeom prst="rect">
+            <a:avLst/>
+          </a:prstGeom>
+          <a:noFill/>
+          <a:ln/>
+        </p:spPr>
+        <p:txBody>
+          <a:bodyPr wrap="square" rtlCol="0" anchor="ctr"/>
+          <a:lstStyle/>
+          <a:p>
+            <a:pPr indent="0" marL="0">
+              <a:buNone/>
             </a:pPr>
             <a:r>
               <a:rPr lang="en-US" sz="1500" dirty="0">
                 <a:solidFill>
                   <a:srgbClr val="3D3A36"/>
                 </a:solidFill>
-                <a:latin typeface="Calibri" pitchFamily="34" charset="0"/>
-                <a:ea typeface="Calibri" pitchFamily="34" charset="-122"/>
-                <a:cs typeface="Calibri" pitchFamily="34" charset="-120"/>
-              </a:rPr>
-              <a:t>Bag of 3 red and 2 blue marbles: P(red) = 3/5, P(blue) = 2/5.</a:t>
+                <a:latin typeface="Arial" pitchFamily="34" charset="0"/>
+                <a:ea typeface="Arial" pitchFamily="34" charset="-122"/>
+                <a:cs typeface="Arial" pitchFamily="34" charset="-120"/>
+              </a:rPr>
+              <a:t>P(green) = 3/12 = 1/4 = 0.25 = 25%</a:t>
             </a:r>
             <a:endParaRPr lang="en-US" sz="1500" dirty="0"/>
           </a:p>
-          <a:p>
-            <a:pPr marL="342900" indent="-342900">
-              <a:spcAft>
-                <a:spcPts val="800"/>
-              </a:spcAft>
-              <a:buSzPct val="100000"/>
-              <a:buChar char="•"/>
+        </p:txBody>
+      </p:sp>
+      <p:sp>
+        <p:nvSpPr>
+          <p:cNvPr id="15" name="Shape 13"/>
+          <p:cNvSpPr/>
+          <p:nvPr/>
+        </p:nvSpPr>
+        <p:spPr>
+          <a:xfrm>
+            <a:off x="548640" y="3246120"/>
+            <a:ext cx="365760" cy="365760"/>
+          </a:xfrm>
+          <a:prstGeom prst="ellipse">
+            <a:avLst/>
+          </a:prstGeom>
+          <a:solidFill>
+            <a:srgbClr val="111D35"/>
+          </a:solidFill>
+          <a:ln/>
+        </p:spPr>
+      </p:sp>
+      <p:sp>
+        <p:nvSpPr>
+          <p:cNvPr id="16" name="Text 14"/>
+          <p:cNvSpPr/>
+          <p:nvPr/>
+        </p:nvSpPr>
+        <p:spPr>
+          <a:xfrm>
+            <a:off x="548640" y="3246120"/>
+            <a:ext cx="365760" cy="365760"/>
+          </a:xfrm>
+          <a:prstGeom prst="rect">
+            <a:avLst/>
+          </a:prstGeom>
+          <a:noFill/>
+          <a:ln/>
+        </p:spPr>
+        <p:txBody>
+          <a:bodyPr wrap="square" rtlCol="0" anchor="ctr"/>
+          <a:lstStyle/>
+          <a:p>
+            <a:pPr algn="ctr" indent="0" marL="0">
+              <a:buNone/>
+            </a:pPr>
+            <a:r>
+              <a:rPr lang="en-US" sz="1300" b="1" dirty="0">
+                <a:solidFill>
+                  <a:srgbClr val="FFFFFF"/>
+                </a:solidFill>
+                <a:latin typeface="Arial" pitchFamily="34" charset="0"/>
+                <a:ea typeface="Arial" pitchFamily="34" charset="-122"/>
+                <a:cs typeface="Arial" pitchFamily="34" charset="-120"/>
+              </a:rPr>
+              <a:t>4</a:t>
+            </a:r>
+            <a:endParaRPr lang="en-US" sz="1300" dirty="0"/>
+          </a:p>
+        </p:txBody>
+      </p:sp>
+      <p:sp>
+        <p:nvSpPr>
+          <p:cNvPr id="17" name="Text 15"/>
+          <p:cNvSpPr/>
+          <p:nvPr/>
+        </p:nvSpPr>
+        <p:spPr>
+          <a:xfrm>
+            <a:off x="1097280" y="3200400"/>
+            <a:ext cx="9601200" cy="502920"/>
+          </a:xfrm>
+          <a:prstGeom prst="rect">
+            <a:avLst/>
+          </a:prstGeom>
+          <a:noFill/>
+          <a:ln/>
+        </p:spPr>
+        <p:txBody>
+          <a:bodyPr wrap="square" rtlCol="0" anchor="ctr"/>
+          <a:lstStyle/>
+          <a:p>
+            <a:pPr indent="0" marL="0">
+              <a:buNone/>
             </a:pPr>
             <a:r>
               <a:rPr lang="en-US" sz="1500" dirty="0">
                 <a:solidFill>
                   <a:srgbClr val="3D3A36"/>
                 </a:solidFill>
-                <a:latin typeface="Calibri" pitchFamily="34" charset="0"/>
-                <a:ea typeface="Calibri" pitchFamily="34" charset="-122"/>
-                <a:cs typeface="Calibri" pitchFamily="34" charset="-120"/>
-              </a:rPr>
-              <a:t>The probabilities of ALL outcomes must ADD UP to 1.</a:t>
+                <a:latin typeface="Arial" pitchFamily="34" charset="0"/>
+                <a:ea typeface="Arial" pitchFamily="34" charset="-122"/>
+                <a:cs typeface="Arial" pitchFamily="34" charset="-120"/>
+              </a:rPr>
+              <a:t>P(yellow) = 5/12 ≈ 0.42 = 42%</a:t>
             </a:r>
             <a:endParaRPr lang="en-US" sz="1500" dirty="0"/>
           </a:p>
-          <a:p>
-            <a:pPr marL="342900" indent="-342900">
-              <a:spcAft>
-                <a:spcPts val="800"/>
-              </a:spcAft>
-              <a:buSzPct val="100000"/>
-              <a:buChar char="•"/>
-            </a:pPr>
-            <a:r>
-              <a:rPr lang="en-US" sz="1500" dirty="0">
-                <a:solidFill>
-                  <a:srgbClr val="3D3A36"/>
-                </a:solidFill>
-                <a:latin typeface="Calibri" pitchFamily="34" charset="0"/>
-                <a:ea typeface="Calibri" pitchFamily="34" charset="-122"/>
-                <a:cs typeface="Calibri" pitchFamily="34" charset="-120"/>
-              </a:rPr>
-              <a:t>P(event NOT happening) = 1 − P(event happening).</a:t>
+        </p:txBody>
+      </p:sp>
+      <p:sp>
+        <p:nvSpPr>
+          <p:cNvPr id="18" name="Shape 16"/>
+          <p:cNvSpPr/>
+          <p:nvPr/>
+        </p:nvSpPr>
+        <p:spPr>
+          <a:xfrm>
+            <a:off x="548640" y="3977640"/>
+            <a:ext cx="365760" cy="365760"/>
+          </a:xfrm>
+          <a:prstGeom prst="ellipse">
+            <a:avLst/>
+          </a:prstGeom>
+          <a:solidFill>
+            <a:srgbClr val="2A9D8F"/>
+          </a:solidFill>
+          <a:ln/>
+        </p:spPr>
+      </p:sp>
+      <p:sp>
+        <p:nvSpPr>
+          <p:cNvPr id="19" name="Text 17"/>
+          <p:cNvSpPr/>
+          <p:nvPr/>
+        </p:nvSpPr>
+        <p:spPr>
+          <a:xfrm>
+            <a:off x="548640" y="3977640"/>
+            <a:ext cx="365760" cy="365760"/>
+          </a:xfrm>
+          <a:prstGeom prst="rect">
+            <a:avLst/>
+          </a:prstGeom>
+          <a:noFill/>
+          <a:ln/>
+        </p:spPr>
+        <p:txBody>
+          <a:bodyPr wrap="square" rtlCol="0" anchor="ctr"/>
+          <a:lstStyle/>
+          <a:p>
+            <a:pPr algn="ctr" indent="0" marL="0">
+              <a:buNone/>
+            </a:pPr>
+            <a:r>
+              <a:rPr lang="en-US" sz="1300" b="1" dirty="0">
+                <a:solidFill>
+                  <a:srgbClr val="FFFFFF"/>
+                </a:solidFill>
+                <a:latin typeface="Arial" pitchFamily="34" charset="0"/>
+                <a:ea typeface="Arial" pitchFamily="34" charset="-122"/>
+                <a:cs typeface="Arial" pitchFamily="34" charset="-120"/>
+              </a:rPr>
+              <a:t>5</a:t>
+            </a:r>
+            <a:endParaRPr lang="en-US" sz="1300" dirty="0"/>
+          </a:p>
+        </p:txBody>
+      </p:sp>
+      <p:sp>
+        <p:nvSpPr>
+          <p:cNvPr id="20" name="Text 18"/>
+          <p:cNvSpPr/>
+          <p:nvPr/>
+        </p:nvSpPr>
+        <p:spPr>
+          <a:xfrm>
+            <a:off x="1097280" y="3931920"/>
+            <a:ext cx="9601200" cy="502920"/>
+          </a:xfrm>
+          <a:prstGeom prst="rect">
+            <a:avLst/>
+          </a:prstGeom>
+          <a:noFill/>
+          <a:ln/>
+        </p:spPr>
+        <p:txBody>
+          <a:bodyPr wrap="square" rtlCol="0" anchor="ctr"/>
+          <a:lstStyle/>
+          <a:p>
+            <a:pPr indent="0" marL="0">
+              <a:buNone/>
+            </a:pPr>
+            <a:r>
+              <a:rPr lang="en-US" sz="1500" b="1" dirty="0">
+                <a:solidFill>
+                  <a:srgbClr val="2A9D8F"/>
+                </a:solidFill>
+                <a:latin typeface="Arial" pitchFamily="34" charset="0"/>
+                <a:ea typeface="Arial" pitchFamily="34" charset="-122"/>
+                <a:cs typeface="Arial" pitchFamily="34" charset="-120"/>
+              </a:rPr>
+              <a:t>Check: 1/3 + 1/4 + 5/12 = 4/12 + 3/12 + 5/12 = 12/12 = 1 ✓</a:t>
             </a:r>
             <a:endParaRPr lang="en-US" sz="1500" dirty="0"/>
           </a:p>
@@ -3778,47 +3522,7 @@
         <p:spPr>
           <a:xfrm>
             <a:off x="0" y="0"/>
-            <a:ext cx="9144000" cy="822960"/>
-          </a:xfrm>
-          <a:prstGeom prst="rect">
-            <a:avLst/>
-          </a:prstGeom>
-          <a:solidFill>
-            <a:srgbClr val="FFFFFF"/>
-          </a:solidFill>
-          <a:ln/>
-        </p:spPr>
-      </p:sp>
-      <p:sp>
-        <p:nvSpPr>
-          <p:cNvPr id="3" name="Shape 1"/>
-          <p:cNvSpPr/>
-          <p:nvPr/>
-        </p:nvSpPr>
-        <p:spPr>
-          <a:xfrm>
-            <a:off x="0" y="804672"/>
-            <a:ext cx="9144000" cy="27432"/>
-          </a:xfrm>
-          <a:prstGeom prst="rect">
-            <a:avLst/>
-          </a:prstGeom>
-          <a:solidFill>
-            <a:srgbClr val="E5E2DC"/>
-          </a:solidFill>
-          <a:ln/>
-        </p:spPr>
-      </p:sp>
-      <p:sp>
-        <p:nvSpPr>
-          <p:cNvPr id="4" name="Shape 2"/>
-          <p:cNvSpPr/>
-          <p:nvPr/>
-        </p:nvSpPr>
-        <p:spPr>
-          <a:xfrm>
-            <a:off x="548640" y="201168"/>
-            <a:ext cx="54864" cy="420624"/>
+            <a:ext cx="73152" cy="5148072"/>
           </a:xfrm>
           <a:prstGeom prst="rect">
             <a:avLst/>
@@ -3831,30 +3535,30 @@
       </p:sp>
       <p:sp>
         <p:nvSpPr>
-          <p:cNvPr id="5" name="Text 3"/>
-          <p:cNvSpPr/>
-          <p:nvPr/>
-        </p:nvSpPr>
-        <p:spPr>
-          <a:xfrm>
-            <a:off x="777240" y="137160"/>
-            <a:ext cx="7772400" cy="548640"/>
-          </a:xfrm>
-          <a:prstGeom prst="rect">
-            <a:avLst/>
-          </a:prstGeom>
-          <a:noFill/>
-          <a:ln/>
-        </p:spPr>
-        <p:txBody>
-          <a:bodyPr wrap="square" lIns="0" tIns="0" rIns="0" bIns="0" rtlCol="0" anchor="ctr"/>
+          <p:cNvPr id="3" name="Text 1"/>
+          <p:cNvSpPr/>
+          <p:nvPr/>
+        </p:nvSpPr>
+        <p:spPr>
+          <a:xfrm>
+            <a:off x="548640" y="274320"/>
+            <a:ext cx="9144000" cy="640080"/>
+          </a:xfrm>
+          <a:prstGeom prst="rect">
+            <a:avLst/>
+          </a:prstGeom>
+          <a:noFill/>
+          <a:ln/>
+        </p:spPr>
+        <p:txBody>
+          <a:bodyPr wrap="square" rtlCol="0" anchor="ctr"/>
           <a:lstStyle/>
           <a:p>
             <a:pPr indent="0" marL="0">
               <a:buNone/>
             </a:pPr>
             <a:r>
-              <a:rPr lang="en-US" sz="2000" b="1" dirty="0">
+              <a:rPr lang="en-US" sz="2400" b="1" dirty="0">
                 <a:solidFill>
                   <a:srgbClr val="1B2A4A"/>
                 </a:solidFill>
@@ -3864,40 +3568,40 @@
               </a:rPr>
               <a:t>Check Your Understanding</a:t>
             </a:r>
-            <a:endParaRPr lang="en-US" sz="2000" dirty="0"/>
-          </a:p>
-        </p:txBody>
-      </p:sp>
-      <p:sp>
-        <p:nvSpPr>
-          <p:cNvPr id="6" name="Shape 4"/>
-          <p:cNvSpPr/>
-          <p:nvPr/>
-        </p:nvSpPr>
-        <p:spPr>
-          <a:xfrm>
-            <a:off x="731520" y="1051560"/>
-            <a:ext cx="7680960" cy="438912"/>
+            <a:endParaRPr lang="en-US" sz="2400" dirty="0"/>
+          </a:p>
+        </p:txBody>
+      </p:sp>
+      <p:sp>
+        <p:nvSpPr>
+          <p:cNvPr id="4" name="Shape 2"/>
+          <p:cNvSpPr/>
+          <p:nvPr/>
+        </p:nvSpPr>
+        <p:spPr>
+          <a:xfrm>
+            <a:off x="548640" y="960120"/>
+            <a:ext cx="2286000" cy="36576"/>
           </a:xfrm>
           <a:prstGeom prst="rect">
             <a:avLst/>
           </a:prstGeom>
           <a:solidFill>
-            <a:srgbClr val="FFFFFF"/>
+            <a:srgbClr val="2A9D8F"/>
           </a:solidFill>
           <a:ln/>
         </p:spPr>
       </p:sp>
       <p:sp>
         <p:nvSpPr>
-          <p:cNvPr id="7" name="Text 5"/>
-          <p:cNvSpPr/>
-          <p:nvPr/>
-        </p:nvSpPr>
-        <p:spPr>
-          <a:xfrm>
-            <a:off x="868680" y="1051560"/>
-            <a:ext cx="320040" cy="438912"/>
+          <p:cNvPr id="5" name="Text 3"/>
+          <p:cNvSpPr/>
+          <p:nvPr/>
+        </p:nvSpPr>
+        <p:spPr>
+          <a:xfrm>
+            <a:off x="548640" y="1188720"/>
+            <a:ext cx="365760" cy="457200"/>
           </a:xfrm>
           <a:prstGeom prst="rect">
             <a:avLst/>
@@ -3913,12 +3617,57 @@
               <a:buNone/>
             </a:pPr>
             <a:r>
+              <a:rPr lang="en-US" sz="1600" dirty="0">
+                <a:solidFill>
+                  <a:srgbClr val="2A9D8F"/>
+                </a:solidFill>
+                <a:latin typeface="Arial" pitchFamily="34" charset="0"/>
+                <a:ea typeface="Arial" pitchFamily="34" charset="-122"/>
+                <a:cs typeface="Arial" pitchFamily="34" charset="-120"/>
+              </a:rPr>
+              <a:t>☐</a:t>
+            </a:r>
+            <a:endParaRPr lang="en-US" sz="1600" dirty="0"/>
+          </a:p>
+        </p:txBody>
+      </p:sp>
+      <p:sp>
+        <p:nvSpPr>
+          <p:cNvPr id="6" name="Text 4"/>
+          <p:cNvSpPr/>
+          <p:nvPr/>
+        </p:nvSpPr>
+        <p:spPr>
+          <a:xfrm>
+            <a:off x="1005840" y="1188720"/>
+            <a:ext cx="9601200" cy="457200"/>
+          </a:xfrm>
+          <a:prstGeom prst="rect">
+            <a:avLst/>
+          </a:prstGeom>
+          <a:noFill/>
+          <a:ln/>
+        </p:spPr>
+        <p:txBody>
+          <a:bodyPr wrap="square" rtlCol="0" anchor="ctr"/>
+          <a:lstStyle/>
+          <a:p>
+            <a:pPr indent="0" marL="0">
+              <a:lnSpc>
+                <a:spcPct val="130000"/>
+              </a:lnSpc>
+              <a:buNone/>
+            </a:pPr>
+            <a:r>
               <a:rPr lang="en-US" sz="1400" dirty="0">
                 <a:solidFill>
-                  <a:srgbClr val="2A9D8F"/>
-                </a:solidFill>
-              </a:rPr>
-              <a:t>☐</a:t>
+                  <a:srgbClr val="3D3A36"/>
+                </a:solidFill>
+                <a:latin typeface="Arial" pitchFamily="34" charset="0"/>
+                <a:ea typeface="Arial" pitchFamily="34" charset="-122"/>
+                <a:cs typeface="Arial" pitchFamily="34" charset="-120"/>
+              </a:rPr>
+              <a:t>I can place events on the probability scale (0 to 1).</a:t>
             </a:r>
             <a:endParaRPr lang="en-US" sz="1400" dirty="0"/>
           </a:p>
@@ -3926,14 +3675,14 @@
       </p:sp>
       <p:sp>
         <p:nvSpPr>
-          <p:cNvPr id="8" name="Text 6"/>
-          <p:cNvSpPr/>
-          <p:nvPr/>
-        </p:nvSpPr>
-        <p:spPr>
-          <a:xfrm>
-            <a:off x="1234440" y="1051560"/>
-            <a:ext cx="6949440" cy="438912"/>
+          <p:cNvPr id="7" name="Text 5"/>
+          <p:cNvSpPr/>
+          <p:nvPr/>
+        </p:nvSpPr>
+        <p:spPr>
+          <a:xfrm>
+            <a:off x="548640" y="1783080"/>
+            <a:ext cx="365760" cy="457200"/>
           </a:xfrm>
           <a:prstGeom prst="rect">
             <a:avLst/>
@@ -3949,50 +3698,72 @@
               <a:buNone/>
             </a:pPr>
             <a:r>
-              <a:rPr lang="en-US" sz="1300" dirty="0">
+              <a:rPr lang="en-US" sz="1600" dirty="0">
+                <a:solidFill>
+                  <a:srgbClr val="2A9D8F"/>
+                </a:solidFill>
+                <a:latin typeface="Arial" pitchFamily="34" charset="0"/>
+                <a:ea typeface="Arial" pitchFamily="34" charset="-122"/>
+                <a:cs typeface="Arial" pitchFamily="34" charset="-120"/>
+              </a:rPr>
+              <a:t>☐</a:t>
+            </a:r>
+            <a:endParaRPr lang="en-US" sz="1600" dirty="0"/>
+          </a:p>
+        </p:txBody>
+      </p:sp>
+      <p:sp>
+        <p:nvSpPr>
+          <p:cNvPr id="8" name="Text 6"/>
+          <p:cNvSpPr/>
+          <p:nvPr/>
+        </p:nvSpPr>
+        <p:spPr>
+          <a:xfrm>
+            <a:off x="1005840" y="1783080"/>
+            <a:ext cx="9601200" cy="457200"/>
+          </a:xfrm>
+          <a:prstGeom prst="rect">
+            <a:avLst/>
+          </a:prstGeom>
+          <a:noFill/>
+          <a:ln/>
+        </p:spPr>
+        <p:txBody>
+          <a:bodyPr wrap="square" rtlCol="0" anchor="ctr"/>
+          <a:lstStyle/>
+          <a:p>
+            <a:pPr indent="0" marL="0">
+              <a:lnSpc>
+                <a:spcPct val="130000"/>
+              </a:lnSpc>
+              <a:buNone/>
+            </a:pPr>
+            <a:r>
+              <a:rPr lang="en-US" sz="1400" dirty="0">
                 <a:solidFill>
                   <a:srgbClr val="3D3A36"/>
                 </a:solidFill>
-                <a:latin typeface="Calibri" pitchFamily="34" charset="0"/>
-                <a:ea typeface="Calibri" pitchFamily="34" charset="-122"/>
-                <a:cs typeface="Calibri" pitchFamily="34" charset="-120"/>
-              </a:rPr>
-              <a:t>I can use the probability scale (0 to 1)</a:t>
-            </a:r>
-            <a:endParaRPr lang="en-US" sz="1300" dirty="0"/>
-          </a:p>
-        </p:txBody>
-      </p:sp>
-      <p:sp>
-        <p:nvSpPr>
-          <p:cNvPr id="9" name="Shape 7"/>
-          <p:cNvSpPr/>
-          <p:nvPr/>
-        </p:nvSpPr>
-        <p:spPr>
-          <a:xfrm>
-            <a:off x="731520" y="1554480"/>
-            <a:ext cx="7680960" cy="438912"/>
-          </a:xfrm>
-          <a:prstGeom prst="rect">
-            <a:avLst/>
-          </a:prstGeom>
-          <a:solidFill>
-            <a:srgbClr val="F8F6F3"/>
-          </a:solidFill>
-          <a:ln/>
-        </p:spPr>
-      </p:sp>
-      <p:sp>
-        <p:nvSpPr>
-          <p:cNvPr id="10" name="Text 8"/>
-          <p:cNvSpPr/>
-          <p:nvPr/>
-        </p:nvSpPr>
-        <p:spPr>
-          <a:xfrm>
-            <a:off x="868680" y="1554480"/>
-            <a:ext cx="320040" cy="438912"/>
+                <a:latin typeface="Arial" pitchFamily="34" charset="0"/>
+                <a:ea typeface="Arial" pitchFamily="34" charset="-122"/>
+                <a:cs typeface="Arial" pitchFamily="34" charset="-120"/>
+              </a:rPr>
+              <a:t>I can calculate theoretical probability using favourable ÷ total.</a:t>
+            </a:r>
+            <a:endParaRPr lang="en-US" sz="1400" dirty="0"/>
+          </a:p>
+        </p:txBody>
+      </p:sp>
+      <p:sp>
+        <p:nvSpPr>
+          <p:cNvPr id="9" name="Text 7"/>
+          <p:cNvSpPr/>
+          <p:nvPr/>
+        </p:nvSpPr>
+        <p:spPr>
+          <a:xfrm>
+            <a:off x="548640" y="2377440"/>
+            <a:ext cx="365760" cy="457200"/>
           </a:xfrm>
           <a:prstGeom prst="rect">
             <a:avLst/>
@@ -4008,12 +3779,57 @@
               <a:buNone/>
             </a:pPr>
             <a:r>
+              <a:rPr lang="en-US" sz="1600" dirty="0">
+                <a:solidFill>
+                  <a:srgbClr val="2A9D8F"/>
+                </a:solidFill>
+                <a:latin typeface="Arial" pitchFamily="34" charset="0"/>
+                <a:ea typeface="Arial" pitchFamily="34" charset="-122"/>
+                <a:cs typeface="Arial" pitchFamily="34" charset="-120"/>
+              </a:rPr>
+              <a:t>☐</a:t>
+            </a:r>
+            <a:endParaRPr lang="en-US" sz="1600" dirty="0"/>
+          </a:p>
+        </p:txBody>
+      </p:sp>
+      <p:sp>
+        <p:nvSpPr>
+          <p:cNvPr id="10" name="Text 8"/>
+          <p:cNvSpPr/>
+          <p:nvPr/>
+        </p:nvSpPr>
+        <p:spPr>
+          <a:xfrm>
+            <a:off x="1005840" y="2377440"/>
+            <a:ext cx="9601200" cy="457200"/>
+          </a:xfrm>
+          <a:prstGeom prst="rect">
+            <a:avLst/>
+          </a:prstGeom>
+          <a:noFill/>
+          <a:ln/>
+        </p:spPr>
+        <p:txBody>
+          <a:bodyPr wrap="square" rtlCol="0" anchor="ctr"/>
+          <a:lstStyle/>
+          <a:p>
+            <a:pPr indent="0" marL="0">
+              <a:lnSpc>
+                <a:spcPct val="130000"/>
+              </a:lnSpc>
+              <a:buNone/>
+            </a:pPr>
+            <a:r>
               <a:rPr lang="en-US" sz="1400" dirty="0">
                 <a:solidFill>
-                  <a:srgbClr val="2A9D8F"/>
-                </a:solidFill>
-              </a:rPr>
-              <a:t>☐</a:t>
+                  <a:srgbClr val="3D3A36"/>
+                </a:solidFill>
+                <a:latin typeface="Arial" pitchFamily="34" charset="0"/>
+                <a:ea typeface="Arial" pitchFamily="34" charset="-122"/>
+                <a:cs typeface="Arial" pitchFamily="34" charset="-120"/>
+              </a:rPr>
+              <a:t>I can express probability as a fraction, decimal, or percentage.</a:t>
             </a:r>
             <a:endParaRPr lang="en-US" sz="1400" dirty="0"/>
           </a:p>
@@ -4027,8 +3843,8 @@
         </p:nvSpPr>
         <p:spPr>
           <a:xfrm>
-            <a:off x="1234440" y="1554480"/>
-            <a:ext cx="6949440" cy="438912"/>
+            <a:off x="548640" y="2971800"/>
+            <a:ext cx="365760" cy="457200"/>
           </a:xfrm>
           <a:prstGeom prst="rect">
             <a:avLst/>
@@ -4044,382 +3860,59 @@
               <a:buNone/>
             </a:pPr>
             <a:r>
-              <a:rPr lang="en-US" sz="1300" dirty="0">
+              <a:rPr lang="en-US" sz="1600" dirty="0">
+                <a:solidFill>
+                  <a:srgbClr val="2A9D8F"/>
+                </a:solidFill>
+                <a:latin typeface="Arial" pitchFamily="34" charset="0"/>
+                <a:ea typeface="Arial" pitchFamily="34" charset="-122"/>
+                <a:cs typeface="Arial" pitchFamily="34" charset="-120"/>
+              </a:rPr>
+              <a:t>☐</a:t>
+            </a:r>
+            <a:endParaRPr lang="en-US" sz="1600" dirty="0"/>
+          </a:p>
+        </p:txBody>
+      </p:sp>
+      <p:sp>
+        <p:nvSpPr>
+          <p:cNvPr id="12" name="Text 10"/>
+          <p:cNvSpPr/>
+          <p:nvPr/>
+        </p:nvSpPr>
+        <p:spPr>
+          <a:xfrm>
+            <a:off x="1005840" y="2971800"/>
+            <a:ext cx="9601200" cy="457200"/>
+          </a:xfrm>
+          <a:prstGeom prst="rect">
+            <a:avLst/>
+          </a:prstGeom>
+          <a:noFill/>
+          <a:ln/>
+        </p:spPr>
+        <p:txBody>
+          <a:bodyPr wrap="square" rtlCol="0" anchor="ctr"/>
+          <a:lstStyle/>
+          <a:p>
+            <a:pPr indent="0" marL="0">
+              <a:lnSpc>
+                <a:spcPct val="130000"/>
+              </a:lnSpc>
+              <a:buNone/>
+            </a:pPr>
+            <a:r>
+              <a:rPr lang="en-US" sz="1400" dirty="0">
                 <a:solidFill>
                   <a:srgbClr val="3D3A36"/>
                 </a:solidFill>
-                <a:latin typeface="Calibri" pitchFamily="34" charset="0"/>
-                <a:ea typeface="Calibri" pitchFamily="34" charset="-122"/>
-                <a:cs typeface="Calibri" pitchFamily="34" charset="-120"/>
-              </a:rPr>
-              <a:t>I can calculate theoretical probability</a:t>
-            </a:r>
-            <a:endParaRPr lang="en-US" sz="1300" dirty="0"/>
-          </a:p>
-        </p:txBody>
-      </p:sp>
-      <p:sp>
-        <p:nvSpPr>
-          <p:cNvPr id="12" name="Shape 10"/>
-          <p:cNvSpPr/>
-          <p:nvPr/>
-        </p:nvSpPr>
-        <p:spPr>
-          <a:xfrm>
-            <a:off x="731520" y="2057400"/>
-            <a:ext cx="7680960" cy="438912"/>
-          </a:xfrm>
-          <a:prstGeom prst="rect">
-            <a:avLst/>
-          </a:prstGeom>
-          <a:solidFill>
-            <a:srgbClr val="FFFFFF"/>
-          </a:solidFill>
-          <a:ln/>
-        </p:spPr>
-      </p:sp>
-      <p:sp>
-        <p:nvSpPr>
-          <p:cNvPr id="13" name="Text 11"/>
-          <p:cNvSpPr/>
-          <p:nvPr/>
-        </p:nvSpPr>
-        <p:spPr>
-          <a:xfrm>
-            <a:off x="868680" y="2057400"/>
-            <a:ext cx="320040" cy="438912"/>
-          </a:xfrm>
-          <a:prstGeom prst="rect">
-            <a:avLst/>
-          </a:prstGeom>
-          <a:noFill/>
-          <a:ln/>
-        </p:spPr>
-        <p:txBody>
-          <a:bodyPr wrap="square" rtlCol="0" anchor="ctr"/>
-          <a:lstStyle/>
-          <a:p>
-            <a:pPr indent="0" marL="0">
-              <a:buNone/>
-            </a:pPr>
-            <a:r>
-              <a:rPr lang="en-US" sz="1400" dirty="0">
-                <a:solidFill>
-                  <a:srgbClr val="2A9D8F"/>
-                </a:solidFill>
-              </a:rPr>
-              <a:t>☐</a:t>
+                <a:latin typeface="Arial" pitchFamily="34" charset="0"/>
+                <a:ea typeface="Arial" pitchFamily="34" charset="-122"/>
+                <a:cs typeface="Arial" pitchFamily="34" charset="-120"/>
+              </a:rPr>
+              <a:t>I know that all probabilities must add up to 1.</a:t>
             </a:r>
             <a:endParaRPr lang="en-US" sz="1400" dirty="0"/>
-          </a:p>
-        </p:txBody>
-      </p:sp>
-      <p:sp>
-        <p:nvSpPr>
-          <p:cNvPr id="14" name="Text 12"/>
-          <p:cNvSpPr/>
-          <p:nvPr/>
-        </p:nvSpPr>
-        <p:spPr>
-          <a:xfrm>
-            <a:off x="1234440" y="2057400"/>
-            <a:ext cx="6949440" cy="438912"/>
-          </a:xfrm>
-          <a:prstGeom prst="rect">
-            <a:avLst/>
-          </a:prstGeom>
-          <a:noFill/>
-          <a:ln/>
-        </p:spPr>
-        <p:txBody>
-          <a:bodyPr wrap="square" rtlCol="0" anchor="ctr"/>
-          <a:lstStyle/>
-          <a:p>
-            <a:pPr indent="0" marL="0">
-              <a:buNone/>
-            </a:pPr>
-            <a:r>
-              <a:rPr lang="en-US" sz="1300" dirty="0">
-                <a:solidFill>
-                  <a:srgbClr val="3D3A36"/>
-                </a:solidFill>
-                <a:latin typeface="Calibri" pitchFamily="34" charset="0"/>
-                <a:ea typeface="Calibri" pitchFamily="34" charset="-122"/>
-                <a:cs typeface="Calibri" pitchFamily="34" charset="-120"/>
-              </a:rPr>
-              <a:t>I can express probability as a fraction, decimal, or percentage</a:t>
-            </a:r>
-            <a:endParaRPr lang="en-US" sz="1300" dirty="0"/>
-          </a:p>
-        </p:txBody>
-      </p:sp>
-      <p:sp>
-        <p:nvSpPr>
-          <p:cNvPr id="15" name="Shape 13"/>
-          <p:cNvSpPr/>
-          <p:nvPr/>
-        </p:nvSpPr>
-        <p:spPr>
-          <a:xfrm>
-            <a:off x="731520" y="2560320"/>
-            <a:ext cx="7680960" cy="438912"/>
-          </a:xfrm>
-          <a:prstGeom prst="rect">
-            <a:avLst/>
-          </a:prstGeom>
-          <a:solidFill>
-            <a:srgbClr val="F8F6F3"/>
-          </a:solidFill>
-          <a:ln/>
-        </p:spPr>
-      </p:sp>
-      <p:sp>
-        <p:nvSpPr>
-          <p:cNvPr id="16" name="Text 14"/>
-          <p:cNvSpPr/>
-          <p:nvPr/>
-        </p:nvSpPr>
-        <p:spPr>
-          <a:xfrm>
-            <a:off x="868680" y="2560320"/>
-            <a:ext cx="320040" cy="438912"/>
-          </a:xfrm>
-          <a:prstGeom prst="rect">
-            <a:avLst/>
-          </a:prstGeom>
-          <a:noFill/>
-          <a:ln/>
-        </p:spPr>
-        <p:txBody>
-          <a:bodyPr wrap="square" rtlCol="0" anchor="ctr"/>
-          <a:lstStyle/>
-          <a:p>
-            <a:pPr indent="0" marL="0">
-              <a:buNone/>
-            </a:pPr>
-            <a:r>
-              <a:rPr lang="en-US" sz="1400" dirty="0">
-                <a:solidFill>
-                  <a:srgbClr val="2A9D8F"/>
-                </a:solidFill>
-              </a:rPr>
-              <a:t>☐</a:t>
-            </a:r>
-            <a:endParaRPr lang="en-US" sz="1400" dirty="0"/>
-          </a:p>
-        </p:txBody>
-      </p:sp>
-      <p:sp>
-        <p:nvSpPr>
-          <p:cNvPr id="17" name="Text 15"/>
-          <p:cNvSpPr/>
-          <p:nvPr/>
-        </p:nvSpPr>
-        <p:spPr>
-          <a:xfrm>
-            <a:off x="1234440" y="2560320"/>
-            <a:ext cx="6949440" cy="438912"/>
-          </a:xfrm>
-          <a:prstGeom prst="rect">
-            <a:avLst/>
-          </a:prstGeom>
-          <a:noFill/>
-          <a:ln/>
-        </p:spPr>
-        <p:txBody>
-          <a:bodyPr wrap="square" rtlCol="0" anchor="ctr"/>
-          <a:lstStyle/>
-          <a:p>
-            <a:pPr indent="0" marL="0">
-              <a:buNone/>
-            </a:pPr>
-            <a:r>
-              <a:rPr lang="en-US" sz="1300" dirty="0">
-                <a:solidFill>
-                  <a:srgbClr val="3D3A36"/>
-                </a:solidFill>
-                <a:latin typeface="Calibri" pitchFamily="34" charset="0"/>
-                <a:ea typeface="Calibri" pitchFamily="34" charset="-122"/>
-                <a:cs typeface="Calibri" pitchFamily="34" charset="-120"/>
-              </a:rPr>
-              <a:t>I know that all probabilities add up to 1</a:t>
-            </a:r>
-            <a:endParaRPr lang="en-US" sz="1300" dirty="0"/>
-          </a:p>
-        </p:txBody>
-      </p:sp>
-      <p:sp>
-        <p:nvSpPr>
-          <p:cNvPr id="18" name="Shape 16"/>
-          <p:cNvSpPr/>
-          <p:nvPr/>
-        </p:nvSpPr>
-        <p:spPr>
-          <a:xfrm>
-            <a:off x="731520" y="3063240"/>
-            <a:ext cx="7680960" cy="438912"/>
-          </a:xfrm>
-          <a:prstGeom prst="rect">
-            <a:avLst/>
-          </a:prstGeom>
-          <a:solidFill>
-            <a:srgbClr val="FFFFFF"/>
-          </a:solidFill>
-          <a:ln/>
-        </p:spPr>
-      </p:sp>
-      <p:sp>
-        <p:nvSpPr>
-          <p:cNvPr id="19" name="Text 17"/>
-          <p:cNvSpPr/>
-          <p:nvPr/>
-        </p:nvSpPr>
-        <p:spPr>
-          <a:xfrm>
-            <a:off x="868680" y="3063240"/>
-            <a:ext cx="320040" cy="438912"/>
-          </a:xfrm>
-          <a:prstGeom prst="rect">
-            <a:avLst/>
-          </a:prstGeom>
-          <a:noFill/>
-          <a:ln/>
-        </p:spPr>
-        <p:txBody>
-          <a:bodyPr wrap="square" rtlCol="0" anchor="ctr"/>
-          <a:lstStyle/>
-          <a:p>
-            <a:pPr indent="0" marL="0">
-              <a:buNone/>
-            </a:pPr>
-            <a:r>
-              <a:rPr lang="en-US" sz="1400" dirty="0">
-                <a:solidFill>
-                  <a:srgbClr val="2A9D8F"/>
-                </a:solidFill>
-              </a:rPr>
-              <a:t>☐</a:t>
-            </a:r>
-            <a:endParaRPr lang="en-US" sz="1400" dirty="0"/>
-          </a:p>
-        </p:txBody>
-      </p:sp>
-      <p:sp>
-        <p:nvSpPr>
-          <p:cNvPr id="20" name="Text 18"/>
-          <p:cNvSpPr/>
-          <p:nvPr/>
-        </p:nvSpPr>
-        <p:spPr>
-          <a:xfrm>
-            <a:off x="1234440" y="3063240"/>
-            <a:ext cx="6949440" cy="438912"/>
-          </a:xfrm>
-          <a:prstGeom prst="rect">
-            <a:avLst/>
-          </a:prstGeom>
-          <a:noFill/>
-          <a:ln/>
-        </p:spPr>
-        <p:txBody>
-          <a:bodyPr wrap="square" rtlCol="0" anchor="ctr"/>
-          <a:lstStyle/>
-          <a:p>
-            <a:pPr indent="0" marL="0">
-              <a:buNone/>
-            </a:pPr>
-            <a:r>
-              <a:rPr lang="en-US" sz="1300" dirty="0">
-                <a:solidFill>
-                  <a:srgbClr val="3D3A36"/>
-                </a:solidFill>
-                <a:latin typeface="Calibri" pitchFamily="34" charset="0"/>
-                <a:ea typeface="Calibri" pitchFamily="34" charset="-122"/>
-                <a:cs typeface="Calibri" pitchFamily="34" charset="-120"/>
-              </a:rPr>
-              <a:t>I can find P(not happening) = 1 − P(happening)</a:t>
-            </a:r>
-            <a:endParaRPr lang="en-US" sz="1300" dirty="0"/>
-          </a:p>
-        </p:txBody>
-      </p:sp>
-      <p:sp>
-        <p:nvSpPr>
-          <p:cNvPr id="21" name="Shape 19"/>
-          <p:cNvSpPr/>
-          <p:nvPr/>
-        </p:nvSpPr>
-        <p:spPr>
-          <a:xfrm>
-            <a:off x="731520" y="3749040"/>
-            <a:ext cx="7680960" cy="594360"/>
-          </a:xfrm>
-          <a:prstGeom prst="rect">
-            <a:avLst/>
-          </a:prstGeom>
-          <a:solidFill>
-            <a:srgbClr val="E8F5F3"/>
-          </a:solidFill>
-          <a:ln/>
-          <a:effectLst>
-            <a:outerShdw sx="100000" sy="100000" kx="0" ky="0" algn="bl" rotWithShape="0" blurRad="50800" dist="25400" dir="8100000">
-              <a:srgbClr val="000000">
-                <a:alpha val="10000"/>
-              </a:srgbClr>
-            </a:outerShdw>
-          </a:effectLst>
-        </p:spPr>
-      </p:sp>
-      <p:sp>
-        <p:nvSpPr>
-          <p:cNvPr id="22" name="Text 20"/>
-          <p:cNvSpPr/>
-          <p:nvPr/>
-        </p:nvSpPr>
-        <p:spPr>
-          <a:xfrm>
-            <a:off x="914400" y="3749040"/>
-            <a:ext cx="7315200" cy="594360"/>
-          </a:xfrm>
-          <a:prstGeom prst="rect">
-            <a:avLst/>
-          </a:prstGeom>
-          <a:noFill/>
-          <a:ln/>
-        </p:spPr>
-        <p:txBody>
-          <a:bodyPr wrap="square" rtlCol="0" anchor="ctr"/>
-          <a:lstStyle/>
-          <a:p>
-            <a:pPr indent="0" marL="0">
-              <a:buNone/>
-            </a:pPr>
-            <a:r>
-              <a:rPr lang="en-US" sz="1200" b="1" dirty="0">
-                <a:solidFill>
-                  <a:srgbClr val="2A9D8F"/>
-                </a:solidFill>
-                <a:latin typeface="Calibri" pitchFamily="34" charset="0"/>
-                <a:ea typeface="Calibri" pitchFamily="34" charset="-122"/>
-                <a:cs typeface="Calibri" pitchFamily="34" charset="-120"/>
-              </a:rPr>
-              <a:t>Key Idea: </a:t>
-            </a:r>
-            <a:pPr indent="0" marL="0">
-              <a:buNone/>
-            </a:pPr>
-            <a:r>
-              <a:rPr lang="en-US" sz="1200" i="1" dirty="0">
-                <a:solidFill>
-                  <a:srgbClr val="3D3A36"/>
-                </a:solidFill>
-                <a:latin typeface="Calibri" pitchFamily="34" charset="0"/>
-                <a:ea typeface="Calibri" pitchFamily="34" charset="-122"/>
-                <a:cs typeface="Calibri" pitchFamily="34" charset="-120"/>
-              </a:rPr>
-              <a:t>Probability tells us how likely something is — always between 0 and 1.</a:t>
-            </a:r>
-            <a:endParaRPr lang="en-US" sz="1200" dirty="0"/>
           </a:p>
         </p:txBody>
       </p:sp>
@@ -4434,6 +3927,13 @@
 <file path=ppt/slides/slide7.xml><?xml version="1.0" encoding="utf-8"?>
 <p:sld xmlns:a="http://schemas.openxmlformats.org/drawingml/2006/main" xmlns:r="http://schemas.openxmlformats.org/officeDocument/2006/relationships" xmlns:p="http://schemas.openxmlformats.org/presentationml/2006/main">
   <p:cSld name="Slide 7">
+    <p:bg>
+      <p:bgPr>
+        <a:solidFill>
+          <a:srgbClr val="111D35"/>
+        </a:solidFill>
+      </p:bgPr>
+    </p:bg>
     <p:spTree>
       <p:nvGrpSpPr>
         <p:cNvPr id="1" name=""/>
@@ -4450,76 +3950,14 @@
       </p:grpSpPr>
       <p:sp>
         <p:nvSpPr>
-          <p:cNvPr id="2" name="Shape 0"/>
-          <p:cNvSpPr/>
-          <p:nvPr/>
-        </p:nvSpPr>
-        <p:spPr>
-          <a:xfrm>
-            <a:off x="0" y="0"/>
-            <a:ext cx="9144000" cy="5143500"/>
-          </a:xfrm>
-          <a:prstGeom prst="rect">
-            <a:avLst/>
-          </a:prstGeom>
-          <a:solidFill>
-            <a:srgbClr val="1B2A4A"/>
-          </a:solidFill>
-          <a:ln/>
-        </p:spPr>
-      </p:sp>
-      <p:sp>
-        <p:nvSpPr>
-          <p:cNvPr id="3" name="Shape 1"/>
-          <p:cNvSpPr/>
-          <p:nvPr/>
-        </p:nvSpPr>
-        <p:spPr>
-          <a:xfrm>
-            <a:off x="0" y="4777740"/>
-            <a:ext cx="9144000" cy="365760"/>
-          </a:xfrm>
-          <a:prstGeom prst="rect">
-            <a:avLst/>
-          </a:prstGeom>
-          <a:solidFill>
-            <a:srgbClr val="2A9D8F"/>
-          </a:solidFill>
-          <a:ln/>
-        </p:spPr>
-      </p:sp>
-      <p:sp>
-        <p:nvSpPr>
-          <p:cNvPr id="4" name="Shape 2"/>
-          <p:cNvSpPr/>
-          <p:nvPr/>
-        </p:nvSpPr>
-        <p:spPr>
-          <a:xfrm>
-            <a:off x="-914400" y="-914400"/>
-            <a:ext cx="3657600" cy="3657600"/>
-          </a:xfrm>
-          <a:prstGeom prst="ellipse">
-            <a:avLst/>
-          </a:prstGeom>
-          <a:solidFill>
-            <a:srgbClr val="2A9D8F">
-              <a:alpha val="10000"/>
-            </a:srgbClr>
-          </a:solidFill>
-          <a:ln/>
-        </p:spPr>
-      </p:sp>
-      <p:sp>
-        <p:nvSpPr>
-          <p:cNvPr id="5" name="Text 3"/>
-          <p:cNvSpPr/>
-          <p:nvPr/>
-        </p:nvSpPr>
-        <p:spPr>
-          <a:xfrm>
-            <a:off x="731520" y="1463040"/>
-            <a:ext cx="7680960" cy="822960"/>
+          <p:cNvPr id="2" name="Text 0"/>
+          <p:cNvSpPr/>
+          <p:nvPr/>
+        </p:nvSpPr>
+        <p:spPr>
+          <a:xfrm>
+            <a:off x="731520" y="1371600"/>
+            <a:ext cx="9144000" cy="914400"/>
           </a:xfrm>
           <a:prstGeom prst="rect">
             <a:avLst/>
@@ -4531,11 +3969,11 @@
           <a:bodyPr wrap="square" rtlCol="0" anchor="ctr"/>
           <a:lstStyle/>
           <a:p>
-            <a:pPr algn="ctr" indent="0" marL="0">
+            <a:pPr indent="0" marL="0">
               <a:buNone/>
             </a:pPr>
             <a:r>
-              <a:rPr lang="en-US" sz="3400" b="1" dirty="0">
+              <a:rPr lang="en-US" sz="3200" b="1" dirty="0">
                 <a:solidFill>
                   <a:srgbClr val="FFFFFF"/>
                 </a:solidFill>
@@ -4545,20 +3983,20 @@
               </a:rPr>
               <a:t>Review &amp; Practise</a:t>
             </a:r>
-            <a:endParaRPr lang="en-US" sz="3400" dirty="0"/>
-          </a:p>
-        </p:txBody>
-      </p:sp>
-      <p:sp>
-        <p:nvSpPr>
-          <p:cNvPr id="6" name="Text 4"/>
-          <p:cNvSpPr/>
-          <p:nvPr/>
-        </p:nvSpPr>
-        <p:spPr>
-          <a:xfrm>
-            <a:off x="731520" y="2468880"/>
-            <a:ext cx="7680960" cy="457200"/>
+            <a:endParaRPr lang="en-US" sz="3200" dirty="0"/>
+          </a:p>
+        </p:txBody>
+      </p:sp>
+      <p:sp>
+        <p:nvSpPr>
+          <p:cNvPr id="3" name="Text 1"/>
+          <p:cNvSpPr/>
+          <p:nvPr/>
+        </p:nvSpPr>
+        <p:spPr>
+          <a:xfrm>
+            <a:off x="731520" y="2377440"/>
+            <a:ext cx="7315200" cy="548640"/>
           </a:xfrm>
           <a:prstGeom prst="rect">
             <a:avLst/>
@@ -4570,60 +4008,62 @@
           <a:bodyPr wrap="square" rtlCol="0" anchor="ctr"/>
           <a:lstStyle/>
           <a:p>
-            <a:pPr algn="ctr" indent="0" marL="0">
+            <a:pPr indent="0" marL="0">
               <a:buNone/>
             </a:pPr>
             <a:r>
-              <a:rPr lang="en-US" sz="1800" dirty="0">
-                <a:solidFill>
-                  <a:srgbClr val="2A9D8F"/>
-                </a:solidFill>
-                <a:latin typeface="Calibri" pitchFamily="34" charset="0"/>
-                <a:ea typeface="Calibri" pitchFamily="34" charset="-122"/>
-                <a:cs typeface="Calibri" pitchFamily="34" charset="-120"/>
+              <a:rPr lang="en-US" sz="1500" dirty="0">
+                <a:solidFill>
+                  <a:srgbClr val="FFFFFF">
+                    <a:alpha val="60000"/>
+                  </a:srgbClr>
+                </a:solidFill>
+                <a:latin typeface="Arial" pitchFamily="34" charset="0"/>
+                <a:ea typeface="Arial" pitchFamily="34" charset="-122"/>
+                <a:cs typeface="Arial" pitchFamily="34" charset="-120"/>
+              </a:rPr>
+              <a:t>Use the Self-Quiz, Review Games, and Practice Builder to test yourself.</a:t>
+            </a:r>
+            <a:endParaRPr lang="en-US" sz="1500" dirty="0"/>
+          </a:p>
+        </p:txBody>
+      </p:sp>
+      <p:sp>
+        <p:nvSpPr>
+          <p:cNvPr id="4" name="Text 2"/>
+          <p:cNvSpPr/>
+          <p:nvPr/>
+        </p:nvSpPr>
+        <p:spPr>
+          <a:xfrm>
+            <a:off x="731520" y="3291840"/>
+            <a:ext cx="3657600" cy="457200"/>
+          </a:xfrm>
+          <a:prstGeom prst="rect">
+            <a:avLst/>
+          </a:prstGeom>
+          <a:noFill/>
+          <a:ln/>
+        </p:spPr>
+        <p:txBody>
+          <a:bodyPr wrap="square" rtlCol="0" anchor="ctr"/>
+          <a:lstStyle/>
+          <a:p>
+            <a:pPr indent="0" marL="0">
+              <a:buNone/>
+            </a:pPr>
+            <a:r>
+              <a:rPr lang="en-US" sz="1800" b="1" dirty="0">
+                <a:solidFill>
+                  <a:srgbClr val="E9C46A"/>
+                </a:solidFill>
+                <a:latin typeface="Georgia" pitchFamily="34" charset="0"/>
+                <a:ea typeface="Georgia" pitchFamily="34" charset="-122"/>
+                <a:cs typeface="Georgia" pitchFamily="34" charset="-120"/>
               </a:rPr>
               <a:t>mrzocchi.com</a:t>
             </a:r>
             <a:endParaRPr lang="en-US" sz="1800" dirty="0"/>
-          </a:p>
-        </p:txBody>
-      </p:sp>
-      <p:sp>
-        <p:nvSpPr>
-          <p:cNvPr id="7" name="Text 5"/>
-          <p:cNvSpPr/>
-          <p:nvPr/>
-        </p:nvSpPr>
-        <p:spPr>
-          <a:xfrm>
-            <a:off x="731520" y="3108960"/>
-            <a:ext cx="7680960" cy="457200"/>
-          </a:xfrm>
-          <a:prstGeom prst="rect">
-            <a:avLst/>
-          </a:prstGeom>
-          <a:noFill/>
-          <a:ln/>
-        </p:spPr>
-        <p:txBody>
-          <a:bodyPr wrap="square" rtlCol="0" anchor="ctr"/>
-          <a:lstStyle/>
-          <a:p>
-            <a:pPr algn="ctr" indent="0" marL="0">
-              <a:buNone/>
-            </a:pPr>
-            <a:r>
-              <a:rPr lang="en-US" sz="1300" dirty="0">
-                <a:solidFill>
-                  <a:srgbClr val="9B9690"/>
-                </a:solidFill>
-                <a:latin typeface="Calibri" pitchFamily="34" charset="0"/>
-                <a:ea typeface="Calibri" pitchFamily="34" charset="-122"/>
-                <a:cs typeface="Calibri" pitchFamily="34" charset="-120"/>
-              </a:rPr>
-              <a:t>Use the Self-Quiz, Review Games, and Practice Builder to test yourself.</a:t>
-            </a:r>
-            <a:endParaRPr lang="en-US" sz="1300" dirty="0"/>
           </a:p>
         </p:txBody>
       </p:sp>
